--- a/iesa.pptx
+++ b/iesa.pptx
@@ -4,6 +4,9 @@
   <p:sldMasterIdLst>
     <p:sldMasterId id="2147483648" r:id="rId1"/>
   </p:sldMasterIdLst>
+  <p:notesMasterIdLst>
+    <p:notesMasterId r:id="rId27"/>
+  </p:notesMasterIdLst>
   <p:sldIdLst>
     <p:sldId id="256" r:id="rId2"/>
     <p:sldId id="257" r:id="rId3"/>
@@ -17,21 +20,20 @@
     <p:sldId id="265" r:id="rId11"/>
     <p:sldId id="266" r:id="rId12"/>
     <p:sldId id="267" r:id="rId13"/>
-    <p:sldId id="268" r:id="rId14"/>
-    <p:sldId id="269" r:id="rId15"/>
-    <p:sldId id="270" r:id="rId16"/>
-    <p:sldId id="271" r:id="rId17"/>
+    <p:sldId id="270" r:id="rId14"/>
+    <p:sldId id="271" r:id="rId15"/>
+    <p:sldId id="268" r:id="rId16"/>
+    <p:sldId id="269" r:id="rId17"/>
     <p:sldId id="272" r:id="rId18"/>
     <p:sldId id="273" r:id="rId19"/>
     <p:sldId id="274" r:id="rId20"/>
-    <p:sldId id="275" r:id="rId21"/>
-    <p:sldId id="276" r:id="rId22"/>
-    <p:sldId id="277" r:id="rId23"/>
-    <p:sldId id="278" r:id="rId24"/>
+    <p:sldId id="279" r:id="rId21"/>
+    <p:sldId id="280" r:id="rId22"/>
+    <p:sldId id="275" r:id="rId23"/>
+    <p:sldId id="276" r:id="rId24"/>
+    <p:sldId id="277" r:id="rId25"/>
+    <p:sldId id="278" r:id="rId26"/>
   </p:sldIdLst>
-  <p:notesMasterIdLst>
-    <p:notesMasterId r:id="rId25"/>
-  </p:notesMasterIdLst>
   <p:sldSz cx="12192000" cy="6858000"/>
   <p:notesSz cx="6858000" cy="12192000"/>
   <p:defaultTextStyle>
@@ -164,7 +166,7 @@
         <p:spPr>
           <a:xfrm>
             <a:off x="0" y="0"/>
-            <a:ext cx="2971800" cy="458788"/>
+            <a:ext cx="2971800" cy="609600"/>
           </a:xfrm>
           <a:prstGeom prst="rect">
             <a:avLst/>
@@ -195,7 +197,7 @@
         <p:spPr>
           <a:xfrm>
             <a:off x="3884613" y="0"/>
-            <a:ext cx="2971800" cy="458788"/>
+            <a:ext cx="2971800" cy="609600"/>
           </a:xfrm>
           <a:prstGeom prst="rect">
             <a:avLst/>
@@ -209,9 +211,9 @@
             </a:lvl1pPr>
           </a:lstStyle>
           <a:p>
-            <a:fld id="{5282F153-3F37-0F45-9E97-73ACFA13230C}" type="datetimeFigureOut">
-              <a:rPr lang="en-US"/>
-              <a:t>7/23/19</a:t>
+            <a:fld id="{0AC9F27F-2707-43B5-9694-EF5B641DDED3}" type="datetimeFigureOut">
+              <a:rPr lang="en-US" smtClean="0"/>
+              <a:t>9/9/2026</a:t>
             </a:fld>
             <a:endParaRPr lang="en-US"/>
           </a:p>
@@ -229,8 +231,8 @@
         </p:nvSpPr>
         <p:spPr>
           <a:xfrm>
-            <a:off x="685800" y="1143000"/>
-            <a:ext cx="5486400" cy="3086100"/>
+            <a:off x="-635000" y="914400"/>
+            <a:ext cx="8128000" cy="4572000"/>
           </a:xfrm>
           <a:prstGeom prst="rect">
             <a:avLst/>
@@ -262,8 +264,8 @@
         </p:nvSpPr>
         <p:spPr>
           <a:xfrm>
-            <a:off x="685800" y="4400550"/>
-            <a:ext cx="5486400" cy="3600450"/>
+            <a:off x="685800" y="5791200"/>
+            <a:ext cx="5486400" cy="5486400"/>
           </a:xfrm>
           <a:prstGeom prst="rect">
             <a:avLst/>
@@ -275,37 +277,38 @@
           <a:p>
             <a:pPr lvl="0"/>
             <a:r>
-              <a:rPr lang="en-US"/>
+              <a:rPr lang="en-US" smtClean="0"/>
               <a:t>Click to edit Master text styles</a:t>
             </a:r>
           </a:p>
           <a:p>
             <a:pPr lvl="1"/>
             <a:r>
-              <a:rPr lang="en-US"/>
+              <a:rPr lang="en-US" smtClean="0"/>
               <a:t>Second level</a:t>
             </a:r>
           </a:p>
           <a:p>
             <a:pPr lvl="2"/>
             <a:r>
-              <a:rPr lang="en-US"/>
+              <a:rPr lang="en-US" smtClean="0"/>
               <a:t>Third level</a:t>
             </a:r>
           </a:p>
           <a:p>
             <a:pPr lvl="3"/>
             <a:r>
-              <a:rPr lang="en-US"/>
+              <a:rPr lang="en-US" smtClean="0"/>
               <a:t>Fourth level</a:t>
             </a:r>
           </a:p>
           <a:p>
             <a:pPr lvl="4"/>
             <a:r>
-              <a:rPr lang="en-US"/>
+              <a:rPr lang="en-US" smtClean="0"/>
               <a:t>Fifth level</a:t>
             </a:r>
+            <a:endParaRPr lang="en-US"/>
           </a:p>
         </p:txBody>
       </p:sp>
@@ -321,8 +324,8 @@
         </p:nvSpPr>
         <p:spPr>
           <a:xfrm>
-            <a:off x="0" y="8685213"/>
-            <a:ext cx="2971800" cy="458787"/>
+            <a:off x="0" y="11580813"/>
+            <a:ext cx="2971800" cy="609600"/>
           </a:xfrm>
           <a:prstGeom prst="rect">
             <a:avLst/>
@@ -352,8 +355,8 @@
         </p:nvSpPr>
         <p:spPr>
           <a:xfrm>
-            <a:off x="3884613" y="8685213"/>
-            <a:ext cx="2971800" cy="458787"/>
+            <a:off x="3884613" y="11580813"/>
+            <a:ext cx="2971800" cy="609600"/>
           </a:xfrm>
           <a:prstGeom prst="rect">
             <a:avLst/>
@@ -367,8 +370,8 @@
             </a:lvl1pPr>
           </a:lstStyle>
           <a:p>
-            <a:fld id="{CE5E9CC1-C706-0F49-92D6-E571CC5EEA8F}" type="slidenum">
-              <a:rPr lang="en-US"/>
+            <a:fld id="{64D5A72A-7C8F-45EB-A708-D91316973EEB}" type="slidenum">
+              <a:rPr lang="en-US" smtClean="0"/>
               <a:t>‹#›</a:t>
             </a:fld>
             <a:endParaRPr lang="en-US"/>
@@ -378,7 +381,7 @@
     </p:spTree>
     <p:extLst>
       <p:ext uri="{BB962C8B-B14F-4D97-AF65-F5344CB8AC3E}">
-        <p14:creationId xmlns:p14="http://schemas.microsoft.com/office/powerpoint/2010/main" val="1024086991"/>
+        <p14:creationId xmlns:p14="http://schemas.microsoft.com/office/powerpoint/2010/main" val="3226871118"/>
       </p:ext>
     </p:extLst>
   </p:cSld>
@@ -526,7 +529,6 @@
               <a:rPr lang="en-US" dirty="0"/>
               <a:t>Butterflies in my belly. You are the future of this country — and of the world. UI graduates are built for global challenges.</a:t>
             </a:r>
-            <a:endParaRPr lang="en-US" dirty="0"/>
           </a:p>
         </p:txBody>
       </p:sp>
@@ -614,7 +616,6 @@
               <a:rPr lang="en-US" dirty="0"/>
               <a:t>Everybody is rushing to enjoy the benefits of autonomous systems.</a:t>
             </a:r>
-            <a:endParaRPr lang="en-US" dirty="0"/>
           </a:p>
         </p:txBody>
       </p:sp>
@@ -702,7 +703,6 @@
               <a:rPr lang="en-US" dirty="0"/>
               <a:t>So let us break it down. But the simple answer to everything is one word.</a:t>
             </a:r>
-            <a:endParaRPr lang="en-US" dirty="0"/>
           </a:p>
         </p:txBody>
       </p:sp>
@@ -790,7 +790,6 @@
               <a:rPr lang="en-US" dirty="0"/>
               <a:t>Call and response. Say ownership. Say ownership. Then: what does ownership mean?</a:t>
             </a:r>
-            <a:endParaRPr lang="en-US" dirty="0"/>
           </a:p>
         </p:txBody>
       </p:sp>
@@ -876,9 +875,8 @@
           <a:p>
             <a:r>
               <a:rPr lang="en-US" dirty="0"/>
-              <a:t>The difference is in the taste. Each taste is a business secret, guarded jealously. That secret did not come from a global platform.</a:t>
-            </a:r>
-            <a:endParaRPr lang="en-US" dirty="0"/>
+              <a:t>Creativity is not born in a day.</a:t>
+            </a:r>
           </a:p>
         </p:txBody>
       </p:sp>
@@ -964,9 +962,8 @@
           <a:p>
             <a:r>
               <a:rPr lang="en-US" dirty="0"/>
-              <a:t>It takes a human to dictate the direction and impact of research — and research is what keeps an economy growing.</a:t>
-            </a:r>
-            <a:endParaRPr lang="en-US" dirty="0"/>
+              <a:t>It is fine to get ideas. But you have no ownership. Somebody asks AI for a speech — you won't even be able to relate to it. The idea must come from you.</a:t>
+            </a:r>
           </a:p>
         </p:txBody>
       </p:sp>
@@ -1052,9 +1049,8 @@
           <a:p>
             <a:r>
               <a:rPr lang="en-US" dirty="0"/>
-              <a:t>Creativity is not born in a day.</a:t>
-            </a:r>
-            <a:endParaRPr lang="en-US" dirty="0"/>
+              <a:t>The difference is in the taste. Each taste is a business secret, guarded jealously. That secret did not come from a global platform.</a:t>
+            </a:r>
           </a:p>
         </p:txBody>
       </p:sp>
@@ -1140,9 +1136,8 @@
           <a:p>
             <a:r>
               <a:rPr lang="en-US" dirty="0"/>
-              <a:t>It is fine to get ideas. But you have no ownership. Somebody asks AI for a speech — you won't even be able to relate to it. The idea must come from you.</a:t>
-            </a:r>
-            <a:endParaRPr lang="en-US" dirty="0"/>
+              <a:t>It takes a human to dictate the direction and impact of research — and research is what keeps an economy growing.</a:t>
+            </a:r>
           </a:p>
         </p:txBody>
       </p:sp>
@@ -1230,7 +1225,6 @@
               <a:rPr lang="en-US" dirty="0"/>
               <a:t>An amplifier comes with energy but no signal. It takes a signal and gives it greater power.</a:t>
             </a:r>
-            <a:endParaRPr lang="en-US" dirty="0"/>
           </a:p>
         </p:txBody>
       </p:sp>
@@ -1318,7 +1312,6 @@
               <a:rPr lang="en-US" dirty="0"/>
               <a:t>Homework: the diligent student uses AI to consult more, solve more, be challenged more. The lazy one copies even what AI didn't say to copy.</a:t>
             </a:r>
-            <a:endParaRPr lang="en-US" dirty="0"/>
           </a:p>
         </p:txBody>
       </p:sp>
@@ -1406,7 +1399,6 @@
               <a:rPr lang="en-US" dirty="0"/>
               <a:t>My point is simple. We must do the work.</a:t>
             </a:r>
-            <a:endParaRPr lang="en-US" dirty="0"/>
           </a:p>
         </p:txBody>
       </p:sp>
@@ -1494,7 +1486,6 @@
               <a:rPr lang="en-US" dirty="0"/>
               <a:t>Industrial and Production Engineering is the engine room of the nation.</a:t>
             </a:r>
-            <a:endParaRPr lang="en-US" dirty="0"/>
           </a:p>
         </p:txBody>
       </p:sp>
@@ -1580,9 +1571,8 @@
           <a:p>
             <a:r>
               <a:rPr lang="en-US" dirty="0"/>
-              <a:t>I told you — it is an amplifier. Use it. But remember: YOU are what it takes to be successful.</a:t>
-            </a:r>
-            <a:endParaRPr lang="en-US" dirty="0"/>
+              <a:t>An amplifier comes with energy but no signal. It takes a signal and gives it greater power.</a:t>
+            </a:r>
           </a:p>
         </p:txBody>
       </p:sp>
@@ -1668,9 +1658,8 @@
           <a:p>
             <a:r>
               <a:rPr lang="en-US" dirty="0"/>
-              <a:t>Your project may be to make Mama proud, to be rich, to build something the whole world uses. Those who did it — how did they start?</a:t>
-            </a:r>
-            <a:endParaRPr lang="en-US" dirty="0"/>
+              <a:t>An amplifier comes with energy but no signal. It takes a signal and gives it greater power.</a:t>
+            </a:r>
           </a:p>
         </p:txBody>
       </p:sp>
@@ -1756,9 +1745,8 @@
           <a:p>
             <a:r>
               <a:rPr lang="en-US" dirty="0"/>
-              <a:t>Thank you for being a wonderful audience. Thanks to the organisers. Wonderful conference. God bless you.</a:t>
-            </a:r>
-            <a:endParaRPr lang="en-US" dirty="0"/>
+              <a:t>I told you — it is an amplifier. Use it. But remember: YOU are what it takes to be successful.</a:t>
+            </a:r>
           </a:p>
         </p:txBody>
       </p:sp>
@@ -1844,9 +1832,8 @@
           <a:p>
             <a:r>
               <a:rPr lang="en-US" dirty="0"/>
-              <a:t>Q&amp;A. Ownership answers most questions: research, creativity, hard work.</a:t>
-            </a:r>
-            <a:endParaRPr lang="en-US" dirty="0"/>
+              <a:t>Your project may be to make Mama proud, to be rich, to build something the whole world uses. Those who did it — how did they start?</a:t>
+            </a:r>
           </a:p>
         </p:txBody>
       </p:sp>
@@ -1868,6 +1855,180 @@
             <a:fld id="{F7021451-1387-4CA6-816F-3879F97B5CBC}" type="slidenum">
               <a:rPr lang="en-US"/>
               <a:t>23</a:t>
+            </a:fld>
+            <a:endParaRPr lang="en-US"/>
+          </a:p>
+        </p:txBody>
+      </p:sp>
+    </p:spTree>
+    <p:extLst>
+      <p:ext uri="{BB962C8B-B14F-4D97-AF65-F5344CB8AC3E}">
+        <p14:creationId xmlns:p14="http://schemas.microsoft.com/office/powerpoint/2010/main" val="1024086991"/>
+      </p:ext>
+    </p:extLst>
+  </p:cSld>
+  <p:clrMapOvr>
+    <a:masterClrMapping/>
+  </p:clrMapOvr>
+</p:notes>
+</file>
+
+<file path=ppt/notesSlides/notesSlide24.xml><?xml version="1.0" encoding="utf-8"?>
+<p:notes xmlns:a="http://schemas.openxmlformats.org/drawingml/2006/main" xmlns:r="http://schemas.openxmlformats.org/officeDocument/2006/relationships" xmlns:p="http://schemas.openxmlformats.org/presentationml/2006/main">
+  <p:cSld>
+    <p:spTree>
+      <p:nvGrpSpPr>
+        <p:cNvPr id="1" name=""/>
+        <p:cNvGrpSpPr/>
+        <p:nvPr/>
+      </p:nvGrpSpPr>
+      <p:grpSpPr>
+        <a:xfrm>
+          <a:off x="0" y="0"/>
+          <a:ext cx="0" cy="0"/>
+          <a:chOff x="0" y="0"/>
+          <a:chExt cx="0" cy="0"/>
+        </a:xfrm>
+      </p:grpSpPr>
+      <p:sp>
+        <p:nvSpPr>
+          <p:cNvPr id="2" name="Slide Image Placeholder 1"/>
+          <p:cNvSpPr>
+            <a:spLocks noGrp="1" noRot="1" noChangeAspect="1"/>
+          </p:cNvSpPr>
+          <p:nvPr>
+            <p:ph type="sldImg"/>
+          </p:nvPr>
+        </p:nvSpPr>
+        <p:spPr/>
+      </p:sp>
+      <p:sp>
+        <p:nvSpPr>
+          <p:cNvPr id="3" name="Notes Placeholder 2"/>
+          <p:cNvSpPr>
+            <a:spLocks noGrp="1"/>
+          </p:cNvSpPr>
+          <p:nvPr>
+            <p:ph type="body" idx="1"/>
+          </p:nvPr>
+        </p:nvSpPr>
+        <p:spPr/>
+        <p:txBody>
+          <a:bodyPr/>
+          <a:lstStyle/>
+          <a:p>
+            <a:r>
+              <a:rPr lang="en-US" dirty="0"/>
+              <a:t>Thank you for being a wonderful audience. Thanks to the organisers. Wonderful conference. God bless you.</a:t>
+            </a:r>
+          </a:p>
+        </p:txBody>
+      </p:sp>
+      <p:sp>
+        <p:nvSpPr>
+          <p:cNvPr id="4" name="Slide Number Placeholder 3"/>
+          <p:cNvSpPr>
+            <a:spLocks noGrp="1"/>
+          </p:cNvSpPr>
+          <p:nvPr>
+            <p:ph type="sldNum" sz="quarter" idx="10"/>
+          </p:nvPr>
+        </p:nvSpPr>
+        <p:spPr/>
+        <p:txBody>
+          <a:bodyPr/>
+          <a:lstStyle/>
+          <a:p>
+            <a:fld id="{F7021451-1387-4CA6-816F-3879F97B5CBC}" type="slidenum">
+              <a:rPr lang="en-US"/>
+              <a:t>24</a:t>
+            </a:fld>
+            <a:endParaRPr lang="en-US"/>
+          </a:p>
+        </p:txBody>
+      </p:sp>
+    </p:spTree>
+    <p:extLst>
+      <p:ext uri="{BB962C8B-B14F-4D97-AF65-F5344CB8AC3E}">
+        <p14:creationId xmlns:p14="http://schemas.microsoft.com/office/powerpoint/2010/main" val="1024086991"/>
+      </p:ext>
+    </p:extLst>
+  </p:cSld>
+  <p:clrMapOvr>
+    <a:masterClrMapping/>
+  </p:clrMapOvr>
+</p:notes>
+</file>
+
+<file path=ppt/notesSlides/notesSlide25.xml><?xml version="1.0" encoding="utf-8"?>
+<p:notes xmlns:a="http://schemas.openxmlformats.org/drawingml/2006/main" xmlns:r="http://schemas.openxmlformats.org/officeDocument/2006/relationships" xmlns:p="http://schemas.openxmlformats.org/presentationml/2006/main">
+  <p:cSld>
+    <p:spTree>
+      <p:nvGrpSpPr>
+        <p:cNvPr id="1" name=""/>
+        <p:cNvGrpSpPr/>
+        <p:nvPr/>
+      </p:nvGrpSpPr>
+      <p:grpSpPr>
+        <a:xfrm>
+          <a:off x="0" y="0"/>
+          <a:ext cx="0" cy="0"/>
+          <a:chOff x="0" y="0"/>
+          <a:chExt cx="0" cy="0"/>
+        </a:xfrm>
+      </p:grpSpPr>
+      <p:sp>
+        <p:nvSpPr>
+          <p:cNvPr id="2" name="Slide Image Placeholder 1"/>
+          <p:cNvSpPr>
+            <a:spLocks noGrp="1" noRot="1" noChangeAspect="1"/>
+          </p:cNvSpPr>
+          <p:nvPr>
+            <p:ph type="sldImg"/>
+          </p:nvPr>
+        </p:nvSpPr>
+        <p:spPr/>
+      </p:sp>
+      <p:sp>
+        <p:nvSpPr>
+          <p:cNvPr id="3" name="Notes Placeholder 2"/>
+          <p:cNvSpPr>
+            <a:spLocks noGrp="1"/>
+          </p:cNvSpPr>
+          <p:nvPr>
+            <p:ph type="body" idx="1"/>
+          </p:nvPr>
+        </p:nvSpPr>
+        <p:spPr/>
+        <p:txBody>
+          <a:bodyPr/>
+          <a:lstStyle/>
+          <a:p>
+            <a:r>
+              <a:rPr lang="en-US" dirty="0"/>
+              <a:t>Q&amp;A. Ownership answers most questions: research, creativity, hard work.</a:t>
+            </a:r>
+          </a:p>
+        </p:txBody>
+      </p:sp>
+      <p:sp>
+        <p:nvSpPr>
+          <p:cNvPr id="4" name="Slide Number Placeholder 3"/>
+          <p:cNvSpPr>
+            <a:spLocks noGrp="1"/>
+          </p:cNvSpPr>
+          <p:nvPr>
+            <p:ph type="sldNum" sz="quarter" idx="10"/>
+          </p:nvPr>
+        </p:nvSpPr>
+        <p:spPr/>
+        <p:txBody>
+          <a:bodyPr/>
+          <a:lstStyle/>
+          <a:p>
+            <a:fld id="{F7021451-1387-4CA6-816F-3879F97B5CBC}" type="slidenum">
+              <a:rPr lang="en-US"/>
+              <a:t>25</a:t>
             </a:fld>
             <a:endParaRPr lang="en-US"/>
           </a:p>
@@ -1934,7 +2095,6 @@
               <a:rPr lang="en-US" dirty="0"/>
               <a:t>What does it mean to industrialise? Break things into processes. Make every aspect a facility of its own, a value element in the chain. Then you have built an industry.</a:t>
             </a:r>
-            <a:endParaRPr lang="en-US" dirty="0"/>
           </a:p>
         </p:txBody>
       </p:sp>
@@ -2022,7 +2182,6 @@
               <a:rPr lang="en-US" dirty="0"/>
               <a:t>That is why this department holds a dear place in my heart.</a:t>
             </a:r>
-            <a:endParaRPr lang="en-US" dirty="0"/>
           </a:p>
         </p:txBody>
       </p:sp>
@@ -2110,7 +2269,6 @@
               <a:rPr lang="en-US" dirty="0"/>
               <a:t>Value chain, supply chain — the essence is a production economy: one that solves people's problems and produces what they want.</a:t>
             </a:r>
-            <a:endParaRPr lang="en-US" dirty="0"/>
           </a:p>
         </p:txBody>
       </p:sp>
@@ -2198,7 +2356,6 @@
               <a:rPr lang="en-US" dirty="0"/>
               <a:t>Bring the research idea — we give you access to this company's funding. That is industrialising a sector. That is what makes them great.</a:t>
             </a:r>
-            <a:endParaRPr lang="en-US" dirty="0"/>
           </a:p>
         </p:txBody>
       </p:sp>
@@ -2286,7 +2443,6 @@
               <a:rPr lang="en-US" dirty="0"/>
               <a:t>Why? Because we have not understood the power of industrialisation.</a:t>
             </a:r>
-            <a:endParaRPr lang="en-US" dirty="0"/>
           </a:p>
         </p:txBody>
       </p:sp>
@@ -2374,7 +2530,6 @@
               <a:rPr lang="en-US" dirty="0"/>
               <a:t>And that brings me to the theme of today's event.</a:t>
             </a:r>
-            <a:endParaRPr lang="en-US" dirty="0"/>
           </a:p>
         </p:txBody>
       </p:sp>
@@ -2462,7 +2617,6 @@
               <a:rPr lang="en-US" dirty="0"/>
               <a:t>The world has moved. Before: will AI take our jobs? Now: do we still need humans at all?</a:t>
             </a:r>
-            <a:endParaRPr lang="en-US" dirty="0"/>
           </a:p>
         </p:txBody>
       </p:sp>
@@ -2535,6 +2689,11 @@
 <file path=ppt/slideMasters/slideMaster1.xml><?xml version="1.0" encoding="utf-8"?>
 <p:sldMaster xmlns:a="http://schemas.openxmlformats.org/drawingml/2006/main" xmlns:r="http://schemas.openxmlformats.org/officeDocument/2006/relationships" xmlns:p="http://schemas.openxmlformats.org/presentationml/2006/main">
   <p:cSld>
+    <p:bg>
+      <p:bgRef idx="1001">
+        <a:schemeClr val="bg1"/>
+      </p:bgRef>
+    </p:bg>
     <p:spTree>
       <p:nvGrpSpPr>
         <p:cNvPr id="1" name=""/>
@@ -2817,6 +2976,7 @@
         <a:solidFill>
           <a:srgbClr val="12302A"/>
         </a:solidFill>
+        <a:effectLst/>
       </p:bgPr>
     </p:bg>
     <p:spTree>
@@ -2875,45 +3035,6 @@
       </p:sp>
       <p:sp>
         <p:nvSpPr>
-          <p:cNvPr id="4" name="Text 2"/>
-          <p:cNvSpPr txBox="1"/>
-          <p:nvPr/>
-        </p:nvSpPr>
-        <p:spPr>
-          <a:xfrm>
-            <a:off x="777240" y="1005840"/>
-            <a:ext cx="8412480" cy="365760"/>
-          </a:xfrm>
-          <a:prstGeom prst="rect">
-            <a:avLst/>
-          </a:prstGeom>
-          <a:noFill/>
-          <a:ln/>
-        </p:spPr>
-        <p:txBody>
-          <a:bodyPr wrap="square" lIns="0" tIns="0" rIns="0" bIns="0" rtlCol="0" anchor="ctr"/>
-          <a:lstStyle/>
-          <a:p>
-            <a:pPr indent="0" marL="0">
-              <a:buNone/>
-            </a:pPr>
-            <a:r>
-              <a:rPr lang="en-US" sz="1400" b="1" spc="250" kern="0" dirty="0">
-                <a:solidFill>
-                  <a:srgbClr val="E8A317"/>
-                </a:solidFill>
-                <a:latin typeface="Calibri" pitchFamily="34" charset="0"/>
-                <a:ea typeface="Calibri" pitchFamily="34" charset="-122"/>
-                <a:cs typeface="Calibri" pitchFamily="34" charset="-120"/>
-              </a:rPr>
-              <a:t>IESA PROCESS DAY 2026  ·  PITCH YOUR PROCESS</a:t>
-            </a:r>
-            <a:endParaRPr lang="en-US" sz="1400" dirty="0"/>
-          </a:p>
-        </p:txBody>
-      </p:sp>
-      <p:sp>
-        <p:nvSpPr>
           <p:cNvPr id="5" name="Text 3"/>
           <p:cNvSpPr txBox="1"/>
           <p:nvPr/>
@@ -2933,7 +3054,7 @@
           <a:bodyPr wrap="square" lIns="0" tIns="0" rIns="0" bIns="0" rtlCol="0" anchor="t"/>
           <a:lstStyle/>
           <a:p>
-            <a:pPr indent="0" marL="0">
+            <a:pPr marL="0" indent="0">
               <a:lnSpc>
                 <a:spcPts val="6400"/>
               </a:lnSpc>
@@ -2953,7 +3074,7 @@
             <a:endParaRPr lang="en-US" sz="5800" dirty="0"/>
           </a:p>
           <a:p>
-            <a:pPr indent="0" marL="0">
+            <a:pPr marL="0" indent="0">
               <a:lnSpc>
                 <a:spcPts val="6400"/>
               </a:lnSpc>
@@ -3015,7 +3136,7 @@
           <a:bodyPr wrap="square" lIns="0" tIns="0" rIns="0" bIns="0" rtlCol="0" anchor="ctr"/>
           <a:lstStyle/>
           <a:p>
-            <a:pPr indent="0" marL="0">
+            <a:pPr marL="0" indent="0">
               <a:lnSpc>
                 <a:spcPts val="2600"/>
               </a:lnSpc>
@@ -3035,7 +3156,7 @@
             <a:endParaRPr lang="en-US" sz="2200" dirty="0"/>
           </a:p>
           <a:p>
-            <a:pPr indent="0" marL="0">
+            <a:pPr marL="0" indent="0">
               <a:lnSpc>
                 <a:spcPts val="2600"/>
               </a:lnSpc>
@@ -3055,7 +3176,7 @@
             <a:endParaRPr lang="en-US" sz="2200" dirty="0"/>
           </a:p>
           <a:p>
-            <a:pPr indent="0" marL="0">
+            <a:pPr marL="0" indent="0">
               <a:lnSpc>
                 <a:spcPts val="2600"/>
               </a:lnSpc>
@@ -3092,6 +3213,7 @@
         <a:solidFill>
           <a:srgbClr val="FFFFFF"/>
         </a:solidFill>
+        <a:effectLst/>
       </p:bgPr>
     </p:bg>
     <p:spTree>
@@ -3129,11 +3251,11 @@
           <a:bodyPr wrap="square" lIns="0" tIns="0" rIns="0" bIns="0" rtlCol="0" anchor="ctr"/>
           <a:lstStyle/>
           <a:p>
-            <a:pPr indent="0" marL="0">
+            <a:pPr marL="0" indent="0">
               <a:buNone/>
             </a:pPr>
             <a:r>
-              <a:rPr lang="en-US" sz="1400" b="1" spc="250" kern="0" dirty="0">
+              <a:rPr lang="en-US" sz="1400" b="1" kern="0" spc="250" dirty="0">
                 <a:solidFill>
                   <a:srgbClr val="2C5F4A"/>
                 </a:solidFill>
@@ -3168,7 +3290,7 @@
           <a:bodyPr wrap="square" lIns="0" tIns="0" rIns="0" bIns="0" rtlCol="0" anchor="ctr"/>
           <a:lstStyle/>
           <a:p>
-            <a:pPr indent="0" marL="0">
+            <a:pPr marL="0" indent="0">
               <a:buNone/>
             </a:pPr>
             <a:r>
@@ -3229,11 +3351,11 @@
           <a:bodyPr wrap="square" lIns="0" tIns="0" rIns="0" bIns="0" rtlCol="0" anchor="ctr"/>
           <a:lstStyle/>
           <a:p>
-            <a:pPr indent="0" marL="0">
+            <a:pPr marL="0" indent="0">
               <a:buNone/>
             </a:pPr>
             <a:r>
-              <a:rPr lang="en-US" sz="1500" b="1" spc="250" kern="0" dirty="0">
+              <a:rPr lang="en-US" sz="1500" b="1" kern="0" spc="250" dirty="0">
                 <a:solidFill>
                   <a:srgbClr val="6E7B74"/>
                 </a:solidFill>
@@ -3268,7 +3390,7 @@
           <a:bodyPr wrap="square" lIns="0" tIns="0" rIns="0" bIns="0" rtlCol="0" anchor="ctr"/>
           <a:lstStyle/>
           <a:p>
-            <a:pPr indent="0" marL="0">
+            <a:pPr marL="0" indent="0">
               <a:lnSpc>
                 <a:spcPts val="4000"/>
               </a:lnSpc>
@@ -3288,7 +3410,7 @@
             <a:endParaRPr lang="en-US" sz="3200" dirty="0"/>
           </a:p>
           <a:p>
-            <a:pPr indent="0" marL="0">
+            <a:pPr marL="0" indent="0">
               <a:lnSpc>
                 <a:spcPts val="4000"/>
               </a:lnSpc>
@@ -3352,11 +3474,11 @@
           <a:bodyPr wrap="square" lIns="0" tIns="0" rIns="0" bIns="0" rtlCol="0" anchor="ctr"/>
           <a:lstStyle/>
           <a:p>
-            <a:pPr indent="0" marL="0">
+            <a:pPr marL="0" indent="0">
               <a:buNone/>
             </a:pPr>
             <a:r>
-              <a:rPr lang="en-US" sz="1500" b="1" spc="250" kern="0" dirty="0">
+              <a:rPr lang="en-US" sz="1500" b="1" kern="0" spc="250" dirty="0">
                 <a:solidFill>
                   <a:srgbClr val="E8A317"/>
                 </a:solidFill>
@@ -3391,14 +3513,14 @@
           <a:bodyPr wrap="square" lIns="0" tIns="0" rIns="0" bIns="0" rtlCol="0" anchor="ctr"/>
           <a:lstStyle/>
           <a:p>
-            <a:pPr indent="0" marL="0">
+            <a:pPr marL="0" indent="0">
               <a:lnSpc>
                 <a:spcPts val="4000"/>
               </a:lnSpc>
               <a:buNone/>
             </a:pPr>
             <a:r>
-              <a:rPr lang="en-US" sz="3200" b="1" dirty="0">
+              <a:rPr lang="en-US" sz="3200" b="1" dirty="0" smtClean="0">
                 <a:solidFill>
                   <a:srgbClr val="FFFFFF"/>
                 </a:solidFill>
@@ -3406,27 +3528,7 @@
                 <a:ea typeface="Cambria" pitchFamily="34" charset="-122"/>
                 <a:cs typeface="Cambria" pitchFamily="34" charset="-120"/>
               </a:rPr>
-              <a:t>“Do we still</a:t>
-            </a:r>
-            <a:endParaRPr lang="en-US" sz="3200" dirty="0"/>
-          </a:p>
-          <a:p>
-            <a:pPr indent="0" marL="0">
-              <a:lnSpc>
-                <a:spcPts val="4000"/>
-              </a:lnSpc>
-              <a:buNone/>
-            </a:pPr>
-            <a:r>
-              <a:rPr lang="en-US" sz="3200" b="1" dirty="0">
-                <a:solidFill>
-                  <a:srgbClr val="FFFFFF"/>
-                </a:solidFill>
-                <a:latin typeface="Cambria" pitchFamily="34" charset="0"/>
-                <a:ea typeface="Cambria" pitchFamily="34" charset="-122"/>
-                <a:cs typeface="Cambria" pitchFamily="34" charset="-120"/>
-              </a:rPr>
-              <a:t>need humans?”</a:t>
+              <a:t>“How much less humans can I prune down to?”</a:t>
             </a:r>
             <a:endParaRPr lang="en-US" sz="3200" dirty="0"/>
           </a:p>
@@ -3518,6 +3620,7 @@
         <a:solidFill>
           <a:srgbClr val="FFFFFF"/>
         </a:solidFill>
+        <a:effectLst/>
       </p:bgPr>
     </p:bg>
     <p:spTree>
@@ -3555,11 +3658,11 @@
           <a:bodyPr wrap="square" lIns="0" tIns="0" rIns="0" bIns="0" rtlCol="0" anchor="ctr"/>
           <a:lstStyle/>
           <a:p>
-            <a:pPr indent="0" marL="0">
+            <a:pPr marL="0" indent="0">
               <a:buNone/>
             </a:pPr>
             <a:r>
-              <a:rPr lang="en-US" sz="1400" b="1" spc="250" kern="0" dirty="0">
+              <a:rPr lang="en-US" sz="1400" b="1" kern="0" spc="250" dirty="0">
                 <a:solidFill>
                   <a:srgbClr val="2C5F4A"/>
                 </a:solidFill>
@@ -3594,7 +3697,7 @@
           <a:bodyPr wrap="square" lIns="0" tIns="0" rIns="0" bIns="0" rtlCol="0" anchor="ctr"/>
           <a:lstStyle/>
           <a:p>
-            <a:pPr indent="0" marL="0">
+            <a:pPr marL="0" indent="0">
               <a:buNone/>
             </a:pPr>
             <a:r>
@@ -3653,7 +3756,7 @@
           <a:bodyPr wrap="square" lIns="0" tIns="0" rIns="0" bIns="0" rtlCol="0" anchor="ctr"/>
           <a:lstStyle/>
           <a:p>
-            <a:pPr algn="ctr" indent="0" marL="0">
+            <a:pPr marL="0" indent="0" algn="ctr">
               <a:buNone/>
             </a:pPr>
             <a:r>
@@ -3692,7 +3795,7 @@
           <a:bodyPr wrap="square" lIns="0" tIns="0" rIns="0" bIns="0" rtlCol="0" anchor="ctr"/>
           <a:lstStyle/>
           <a:p>
-            <a:pPr indent="0" marL="0">
+            <a:pPr marL="0" indent="0">
               <a:lnSpc>
                 <a:spcPts val="3400"/>
               </a:lnSpc>
@@ -3707,7 +3810,18 @@
                 <a:ea typeface="Cambria" pitchFamily="34" charset="-122"/>
                 <a:cs typeface="Cambria" pitchFamily="34" charset="-120"/>
               </a:rPr>
-              <a:t>Can AI do everything humans need — or are we under-appreciating the human in the system?</a:t>
+              <a:t>Can AI do everything humans </a:t>
+            </a:r>
+            <a:r>
+              <a:rPr lang="en-US" sz="2600" b="1" dirty="0" smtClean="0">
+                <a:solidFill>
+                  <a:srgbClr val="12302A"/>
+                </a:solidFill>
+                <a:latin typeface="Cambria" pitchFamily="34" charset="0"/>
+                <a:ea typeface="Cambria" pitchFamily="34" charset="-122"/>
+                <a:cs typeface="Cambria" pitchFamily="34" charset="-120"/>
+              </a:rPr>
+              <a:t>need ? Or is there still room for human intelligence?</a:t>
             </a:r>
             <a:endParaRPr lang="en-US" sz="2600" dirty="0"/>
           </a:p>
@@ -3754,7 +3868,7 @@
           <a:bodyPr wrap="square" lIns="0" tIns="0" rIns="0" bIns="0" rtlCol="0" anchor="ctr"/>
           <a:lstStyle/>
           <a:p>
-            <a:pPr algn="ctr" indent="0" marL="0">
+            <a:pPr marL="0" indent="0" algn="ctr">
               <a:buNone/>
             </a:pPr>
             <a:r>
@@ -3793,7 +3907,7 @@
           <a:bodyPr wrap="square" lIns="0" tIns="0" rIns="0" bIns="0" rtlCol="0" anchor="ctr"/>
           <a:lstStyle/>
           <a:p>
-            <a:pPr indent="0" marL="0">
+            <a:pPr marL="0" indent="0">
               <a:lnSpc>
                 <a:spcPts val="3400"/>
               </a:lnSpc>
@@ -3808,7 +3922,62 @@
                 <a:ea typeface="Cambria" pitchFamily="34" charset="-122"/>
                 <a:cs typeface="Cambria" pitchFamily="34" charset="-120"/>
               </a:rPr>
-              <a:t>If a process must last, deliver impact, and scale — are there values AI cannot produce?</a:t>
+              <a:t>If a process must last, deliver impact, and </a:t>
+            </a:r>
+            <a:r>
+              <a:rPr lang="en-US" sz="2600" b="1" dirty="0" smtClean="0">
+                <a:solidFill>
+                  <a:srgbClr val="12302A"/>
+                </a:solidFill>
+                <a:latin typeface="Cambria" pitchFamily="34" charset="0"/>
+                <a:ea typeface="Cambria" pitchFamily="34" charset="-122"/>
+                <a:cs typeface="Cambria" pitchFamily="34" charset="-120"/>
+              </a:rPr>
+              <a:t>scale, could it be up to AI alone? Or are </a:t>
+            </a:r>
+            <a:r>
+              <a:rPr lang="en-US" sz="2600" b="1" dirty="0">
+                <a:solidFill>
+                  <a:srgbClr val="12302A"/>
+                </a:solidFill>
+                <a:latin typeface="Cambria" pitchFamily="34" charset="0"/>
+                <a:ea typeface="Cambria" pitchFamily="34" charset="-122"/>
+                <a:cs typeface="Cambria" pitchFamily="34" charset="-120"/>
+              </a:rPr>
+              <a:t>there </a:t>
+            </a:r>
+            <a:r>
+              <a:rPr lang="en-US" sz="2600" b="1" dirty="0" smtClean="0">
+                <a:solidFill>
+                  <a:srgbClr val="12302A"/>
+                </a:solidFill>
+                <a:latin typeface="Cambria" pitchFamily="34" charset="0"/>
+                <a:ea typeface="Cambria" pitchFamily="34" charset="-122"/>
+                <a:cs typeface="Cambria" pitchFamily="34" charset="-120"/>
+              </a:rPr>
+              <a:t>limits to how far </a:t>
+            </a:r>
+            <a:r>
+              <a:rPr lang="en-US" sz="2600" b="1" dirty="0">
+                <a:solidFill>
+                  <a:srgbClr val="12302A"/>
+                </a:solidFill>
+                <a:latin typeface="Cambria" pitchFamily="34" charset="0"/>
+                <a:ea typeface="Cambria" pitchFamily="34" charset="-122"/>
+                <a:cs typeface="Cambria" pitchFamily="34" charset="-120"/>
+              </a:rPr>
+              <a:t>AI </a:t>
+            </a:r>
+            <a:r>
+              <a:rPr lang="en-US" sz="2600" b="1" dirty="0" smtClean="0">
+                <a:solidFill>
+                  <a:srgbClr val="12302A"/>
+                </a:solidFill>
+                <a:latin typeface="Cambria" pitchFamily="34" charset="0"/>
+                <a:ea typeface="Cambria" pitchFamily="34" charset="-122"/>
+                <a:cs typeface="Cambria" pitchFamily="34" charset="-120"/>
+              </a:rPr>
+              <a:t>can help build?</a:t>
             </a:r>
             <a:endParaRPr lang="en-US" sz="2600" dirty="0"/>
           </a:p>
@@ -3857,11 +4026,11 @@
           <a:bodyPr wrap="square" lIns="0" tIns="0" rIns="0" bIns="0" rtlCol="0" anchor="ctr"/>
           <a:lstStyle/>
           <a:p>
-            <a:pPr indent="0" marL="0">
+            <a:pPr marL="0" indent="0">
               <a:buNone/>
             </a:pPr>
             <a:r>
-              <a:rPr lang="en-US" sz="3000" b="1" dirty="0">
+              <a:rPr lang="en-US" sz="3000" b="1" dirty="0" smtClean="0">
                 <a:solidFill>
                   <a:srgbClr val="E8A317"/>
                 </a:solidFill>
@@ -3869,7 +4038,7 @@
                 <a:ea typeface="Cambria" pitchFamily="34" charset="-122"/>
                 <a:cs typeface="Cambria" pitchFamily="34" charset="-120"/>
               </a:rPr>
-              <a:t>The answer is YES.</a:t>
+              <a:t>Debatable.</a:t>
             </a:r>
             <a:endParaRPr lang="en-US" sz="3000" dirty="0"/>
           </a:p>
@@ -3891,6 +4060,7 @@
         <a:solidFill>
           <a:srgbClr val="12302A"/>
         </a:solidFill>
+        <a:effectLst/>
       </p:bgPr>
     </p:bg>
     <p:spTree>
@@ -3968,7 +4138,7 @@
           <a:bodyPr wrap="square" lIns="0" tIns="0" rIns="0" bIns="0" rtlCol="0" anchor="ctr"/>
           <a:lstStyle/>
           <a:p>
-            <a:pPr algn="ctr" indent="0" marL="0">
+            <a:pPr marL="0" indent="0" algn="ctr">
               <a:buNone/>
             </a:pPr>
             <a:r>
@@ -3994,8 +4164,8 @@
         </p:nvSpPr>
         <p:spPr>
           <a:xfrm>
-            <a:off x="685800" y="2103120"/>
-            <a:ext cx="10820095" cy="2194560"/>
+            <a:off x="359508" y="2103120"/>
+            <a:ext cx="11146387" cy="2194560"/>
           </a:xfrm>
           <a:prstGeom prst="rect">
             <a:avLst/>
@@ -4007,11 +4177,11 @@
           <a:bodyPr wrap="square" lIns="0" tIns="0" rIns="0" bIns="0" rtlCol="0" anchor="ctr"/>
           <a:lstStyle/>
           <a:p>
-            <a:pPr algn="ctr" indent="0" marL="0">
+            <a:pPr marL="0" indent="0" algn="ctr">
               <a:buNone/>
             </a:pPr>
             <a:r>
-              <a:rPr lang="en-US" sz="9600" b="1" spc="600" kern="0" dirty="0">
+              <a:rPr lang="en-US" sz="8800" b="1" kern="0" spc="600" dirty="0" smtClean="0">
                 <a:solidFill>
                   <a:srgbClr val="FFFFFF"/>
                 </a:solidFill>
@@ -4019,48 +4189,9 @@
                 <a:ea typeface="Cambria" pitchFamily="34" charset="-122"/>
                 <a:cs typeface="Cambria" pitchFamily="34" charset="-120"/>
               </a:rPr>
-              <a:t>OWNERSHIP</a:t>
-            </a:r>
-            <a:endParaRPr lang="en-US" sz="9600" dirty="0"/>
-          </a:p>
-        </p:txBody>
-      </p:sp>
-      <p:sp>
-        <p:nvSpPr>
-          <p:cNvPr id="6" name="Text 4"/>
-          <p:cNvSpPr txBox="1"/>
-          <p:nvPr/>
-        </p:nvSpPr>
-        <p:spPr>
-          <a:xfrm>
-            <a:off x="685800" y="4480560"/>
-            <a:ext cx="10820095" cy="731520"/>
-          </a:xfrm>
-          <a:prstGeom prst="rect">
-            <a:avLst/>
-          </a:prstGeom>
-          <a:noFill/>
-          <a:ln/>
-        </p:spPr>
-        <p:txBody>
-          <a:bodyPr wrap="square" lIns="0" tIns="0" rIns="0" bIns="0" rtlCol="0" anchor="ctr"/>
-          <a:lstStyle/>
-          <a:p>
-            <a:pPr algn="ctr" indent="0" marL="0">
-              <a:buNone/>
-            </a:pPr>
-            <a:r>
-              <a:rPr lang="en-US" sz="3000" b="1" i="1" dirty="0">
-                <a:solidFill>
-                  <a:srgbClr val="E8A317"/>
-                </a:solidFill>
-                <a:latin typeface="Cambria" pitchFamily="34" charset="0"/>
-                <a:ea typeface="Cambria" pitchFamily="34" charset="-122"/>
-                <a:cs typeface="Cambria" pitchFamily="34" charset="-120"/>
-              </a:rPr>
-              <a:t>Everybody, say: ownership.</a:t>
-            </a:r>
-            <a:endParaRPr lang="en-US" sz="3000" dirty="0"/>
+              <a:t>OWNERSHIP is KEY</a:t>
+            </a:r>
+            <a:endParaRPr lang="en-US" sz="8800" dirty="0"/>
           </a:p>
         </p:txBody>
       </p:sp>
@@ -4074,12 +4205,13 @@
 
 <file path=ppt/slides/slide13.xml><?xml version="1.0" encoding="utf-8"?>
 <p:sld xmlns:a="http://schemas.openxmlformats.org/drawingml/2006/main" xmlns:r="http://schemas.openxmlformats.org/officeDocument/2006/relationships" xmlns:p="http://schemas.openxmlformats.org/presentationml/2006/main">
-  <p:cSld name="Slide 13">
+  <p:cSld name="Slide 15">
     <p:bg>
       <p:bgPr>
         <a:solidFill>
           <a:srgbClr val="12302A"/>
         </a:solidFill>
+        <a:effectLst/>
       </p:bgPr>
     </p:bg>
     <p:spTree>
@@ -4157,7 +4289,7 @@
           <a:bodyPr wrap="square" lIns="0" tIns="0" rIns="0" bIns="0" rtlCol="0" anchor="ctr"/>
           <a:lstStyle/>
           <a:p>
-            <a:pPr algn="ctr" indent="0" marL="0">
+            <a:pPr marL="0" indent="0" algn="ctr">
               <a:buNone/>
             </a:pPr>
             <a:r>
@@ -4169,7 +4301,7 @@
                 <a:ea typeface="Cambria" pitchFamily="34" charset="-122"/>
                 <a:cs typeface="Cambria" pitchFamily="34" charset="-120"/>
               </a:rPr>
-              <a:t>1</a:t>
+              <a:t>2</a:t>
             </a:r>
             <a:endParaRPr lang="en-US" sz="4200" dirty="0"/>
           </a:p>
@@ -4196,14 +4328,14 @@
           <a:bodyPr wrap="square" lIns="0" tIns="0" rIns="0" bIns="0" rtlCol="0" anchor="ctr"/>
           <a:lstStyle/>
           <a:p>
-            <a:pPr indent="0" marL="0">
+            <a:pPr marL="0" indent="0">
               <a:lnSpc>
                 <a:spcPts val="5800"/>
               </a:lnSpc>
               <a:buNone/>
             </a:pPr>
             <a:r>
-              <a:rPr lang="en-US" sz="5000" b="1" dirty="0">
+              <a:rPr lang="en-US" sz="5000" b="1" dirty="0" smtClean="0">
                 <a:solidFill>
                   <a:srgbClr val="FFFFFF"/>
                 </a:solidFill>
@@ -4211,27 +4343,7 @@
                 <a:ea typeface="Cambria" pitchFamily="34" charset="-122"/>
                 <a:cs typeface="Cambria" pitchFamily="34" charset="-120"/>
               </a:rPr>
-              <a:t>Ownership of</a:t>
-            </a:r>
-            <a:endParaRPr lang="en-US" sz="5000" dirty="0"/>
-          </a:p>
-          <a:p>
-            <a:pPr indent="0" marL="0">
-              <a:lnSpc>
-                <a:spcPts val="5800"/>
-              </a:lnSpc>
-              <a:buNone/>
-            </a:pPr>
-            <a:r>
-              <a:rPr lang="en-US" sz="5000" b="1" dirty="0">
-                <a:solidFill>
-                  <a:srgbClr val="FFFFFF"/>
-                </a:solidFill>
-                <a:latin typeface="Cambria" pitchFamily="34" charset="0"/>
-                <a:ea typeface="Cambria" pitchFamily="34" charset="-122"/>
-                <a:cs typeface="Cambria" pitchFamily="34" charset="-120"/>
-              </a:rPr>
-              <a:t>research</a:t>
+              <a:t>Ownership is creativity</a:t>
             </a:r>
             <a:endParaRPr lang="en-US" sz="5000" dirty="0"/>
           </a:p>
@@ -4258,7 +4370,7 @@
           <a:bodyPr wrap="square" lIns="0" tIns="0" rIns="0" bIns="0" rtlCol="0" anchor="ctr"/>
           <a:lstStyle/>
           <a:p>
-            <a:pPr indent="0" marL="0">
+            <a:pPr marL="0" indent="0">
               <a:buNone/>
             </a:pPr>
             <a:r>
@@ -4270,7 +4382,7 @@
                 <a:ea typeface="Calibri" pitchFamily="34" charset="-122"/>
                 <a:cs typeface="Calibri" pitchFamily="34" charset="-120"/>
               </a:rPr>
-              <a:t>Coca-Cola vs Pepsi</a:t>
+              <a:t>The hallmark of every great revolution</a:t>
             </a:r>
             <a:endParaRPr lang="en-US" sz="2200" dirty="0"/>
           </a:p>
@@ -4286,12 +4398,13 @@
 
 <file path=ppt/slides/slide14.xml><?xml version="1.0" encoding="utf-8"?>
 <p:sld xmlns:a="http://schemas.openxmlformats.org/drawingml/2006/main" xmlns:r="http://schemas.openxmlformats.org/officeDocument/2006/relationships" xmlns:p="http://schemas.openxmlformats.org/presentationml/2006/main">
-  <p:cSld name="Slide 14">
+  <p:cSld name="Slide 16">
     <p:bg>
       <p:bgPr>
         <a:solidFill>
           <a:srgbClr val="FFFFFF"/>
         </a:solidFill>
+        <a:effectLst/>
       </p:bgPr>
     </p:bg>
     <p:spTree>
@@ -4329,11 +4442,11 @@
           <a:bodyPr wrap="square" lIns="0" tIns="0" rIns="0" bIns="0" rtlCol="0" anchor="ctr"/>
           <a:lstStyle/>
           <a:p>
-            <a:pPr indent="0" marL="0">
+            <a:pPr marL="0" indent="0">
               <a:buNone/>
             </a:pPr>
             <a:r>
-              <a:rPr lang="en-US" sz="1400" b="1" spc="250" kern="0" dirty="0">
+              <a:rPr lang="en-US" sz="1400" b="1" kern="0" spc="250" dirty="0">
                 <a:solidFill>
                   <a:srgbClr val="2C5F4A"/>
                 </a:solidFill>
@@ -4341,7 +4454,7 @@
                 <a:ea typeface="Calibri" pitchFamily="34" charset="-122"/>
                 <a:cs typeface="Calibri" pitchFamily="34" charset="-120"/>
               </a:rPr>
-              <a:t>OWNERSHIP · 1</a:t>
+              <a:t>OWNERSHIP · 2</a:t>
             </a:r>
             <a:endParaRPr lang="en-US" sz="1400" dirty="0"/>
           </a:p>
@@ -4368,11 +4481,11 @@
           <a:bodyPr wrap="square" lIns="0" tIns="0" rIns="0" bIns="0" rtlCol="0" anchor="ctr"/>
           <a:lstStyle/>
           <a:p>
-            <a:pPr indent="0" marL="0">
+            <a:pPr marL="0" indent="0">
               <a:buNone/>
             </a:pPr>
             <a:r>
-              <a:rPr lang="en-US" sz="4600" b="1" dirty="0">
+              <a:rPr lang="en-US" sz="4400" b="1" dirty="0">
                 <a:solidFill>
                   <a:srgbClr val="12302A"/>
                 </a:solidFill>
@@ -4380,22 +4493,86 @@
                 <a:ea typeface="Cambria" pitchFamily="34" charset="-122"/>
                 <a:cs typeface="Cambria" pitchFamily="34" charset="-120"/>
               </a:rPr>
-              <a:t>Research is beyond AI</a:t>
-            </a:r>
-            <a:endParaRPr lang="en-US" sz="4600" dirty="0"/>
-          </a:p>
-        </p:txBody>
-      </p:sp>
-      <p:sp>
-        <p:nvSpPr>
-          <p:cNvPr id="4" name="Text 2"/>
-          <p:cNvSpPr txBox="1"/>
-          <p:nvPr/>
-        </p:nvSpPr>
-        <p:spPr>
-          <a:xfrm>
-            <a:off x="685800" y="2148840"/>
-            <a:ext cx="4937760" cy="914400"/>
+              <a:t>Creativity </a:t>
+            </a:r>
+            <a:r>
+              <a:rPr lang="en-US" sz="4400" b="1" dirty="0" smtClean="0">
+                <a:solidFill>
+                  <a:srgbClr val="12302A"/>
+                </a:solidFill>
+                <a:latin typeface="Cambria" pitchFamily="34" charset="0"/>
+                <a:ea typeface="Cambria" pitchFamily="34" charset="-122"/>
+                <a:cs typeface="Cambria" pitchFamily="34" charset="-120"/>
+              </a:rPr>
+              <a:t>needs </a:t>
+            </a:r>
+            <a:r>
+              <a:rPr lang="en-US" sz="4400" b="1" dirty="0">
+                <a:solidFill>
+                  <a:srgbClr val="12302A"/>
+                </a:solidFill>
+                <a:latin typeface="Cambria" pitchFamily="34" charset="0"/>
+                <a:ea typeface="Cambria" pitchFamily="34" charset="-122"/>
+                <a:cs typeface="Cambria" pitchFamily="34" charset="-120"/>
+              </a:rPr>
+              <a:t>four things</a:t>
+            </a:r>
+            <a:endParaRPr lang="en-US" sz="4400" dirty="0"/>
+          </a:p>
+        </p:txBody>
+      </p:sp>
+      <p:sp>
+        <p:nvSpPr>
+          <p:cNvPr id="4" name="Shape 2"/>
+          <p:cNvSpPr/>
+          <p:nvPr/>
+        </p:nvSpPr>
+        <p:spPr>
+          <a:xfrm>
+            <a:off x="685800" y="2103120"/>
+            <a:ext cx="2560320" cy="2011680"/>
+          </a:xfrm>
+          <a:prstGeom prst="roundRect">
+            <a:avLst>
+              <a:gd name="adj" fmla="val 4545"/>
+            </a:avLst>
+          </a:prstGeom>
+          <a:solidFill>
+            <a:srgbClr val="12302A"/>
+          </a:solidFill>
+          <a:ln/>
+        </p:spPr>
+      </p:sp>
+      <p:sp>
+        <p:nvSpPr>
+          <p:cNvPr id="5" name="Shape 3"/>
+          <p:cNvSpPr/>
+          <p:nvPr/>
+        </p:nvSpPr>
+        <p:spPr>
+          <a:xfrm>
+            <a:off x="914400" y="2331720"/>
+            <a:ext cx="502920" cy="502920"/>
+          </a:xfrm>
+          <a:prstGeom prst="ellipse">
+            <a:avLst/>
+          </a:prstGeom>
+          <a:solidFill>
+            <a:srgbClr val="E8A317"/>
+          </a:solidFill>
+          <a:ln/>
+        </p:spPr>
+      </p:sp>
+      <p:sp>
+        <p:nvSpPr>
+          <p:cNvPr id="6" name="Text 4"/>
+          <p:cNvSpPr txBox="1"/>
+          <p:nvPr/>
+        </p:nvSpPr>
+        <p:spPr>
+          <a:xfrm>
+            <a:off x="914400" y="2295144"/>
+            <a:ext cx="502920" cy="502920"/>
           </a:xfrm>
           <a:prstGeom prst="rect">
             <a:avLst/>
@@ -4407,11 +4584,449 @@
           <a:bodyPr wrap="square" lIns="0" tIns="0" rIns="0" bIns="0" rtlCol="0" anchor="ctr"/>
           <a:lstStyle/>
           <a:p>
-            <a:pPr indent="0" marL="0">
+            <a:pPr marL="0" indent="0" algn="ctr">
               <a:buNone/>
             </a:pPr>
             <a:r>
-              <a:rPr lang="en-US" sz="2400" dirty="0">
+              <a:rPr lang="en-US" sz="1400" b="1" dirty="0">
+                <a:solidFill>
+                  <a:srgbClr val="12302A"/>
+                </a:solidFill>
+                <a:latin typeface="Cambria" pitchFamily="34" charset="0"/>
+                <a:ea typeface="Cambria" pitchFamily="34" charset="-122"/>
+                <a:cs typeface="Cambria" pitchFamily="34" charset="-120"/>
+              </a:rPr>
+              <a:t>1</a:t>
+            </a:r>
+            <a:endParaRPr lang="en-US" sz="1400" dirty="0"/>
+          </a:p>
+        </p:txBody>
+      </p:sp>
+      <p:sp>
+        <p:nvSpPr>
+          <p:cNvPr id="7" name="Text 5"/>
+          <p:cNvSpPr txBox="1"/>
+          <p:nvPr/>
+        </p:nvSpPr>
+        <p:spPr>
+          <a:xfrm>
+            <a:off x="868680" y="2971800"/>
+            <a:ext cx="2286000" cy="914400"/>
+          </a:xfrm>
+          <a:prstGeom prst="rect">
+            <a:avLst/>
+          </a:prstGeom>
+          <a:noFill/>
+          <a:ln/>
+        </p:spPr>
+        <p:txBody>
+          <a:bodyPr wrap="square" lIns="0" tIns="0" rIns="0" bIns="0" rtlCol="0" anchor="ctr"/>
+          <a:lstStyle/>
+          <a:p>
+            <a:pPr marL="0" indent="0">
+              <a:buNone/>
+            </a:pPr>
+            <a:r>
+              <a:rPr lang="en-US" sz="2100" b="1" dirty="0">
+                <a:solidFill>
+                  <a:srgbClr val="FFFFFF"/>
+                </a:solidFill>
+                <a:latin typeface="Cambria" pitchFamily="34" charset="0"/>
+                <a:ea typeface="Cambria" pitchFamily="34" charset="-122"/>
+                <a:cs typeface="Cambria" pitchFamily="34" charset="-120"/>
+              </a:rPr>
+              <a:t>Exposure</a:t>
+            </a:r>
+            <a:endParaRPr lang="en-US" sz="2100" dirty="0"/>
+          </a:p>
+        </p:txBody>
+      </p:sp>
+      <p:sp>
+        <p:nvSpPr>
+          <p:cNvPr id="8" name="Shape 6"/>
+          <p:cNvSpPr/>
+          <p:nvPr/>
+        </p:nvSpPr>
+        <p:spPr>
+          <a:xfrm>
+            <a:off x="3429000" y="2103120"/>
+            <a:ext cx="2560320" cy="2011680"/>
+          </a:xfrm>
+          <a:prstGeom prst="roundRect">
+            <a:avLst>
+              <a:gd name="adj" fmla="val 4545"/>
+            </a:avLst>
+          </a:prstGeom>
+          <a:solidFill>
+            <a:srgbClr val="12302A"/>
+          </a:solidFill>
+          <a:ln/>
+        </p:spPr>
+      </p:sp>
+      <p:sp>
+        <p:nvSpPr>
+          <p:cNvPr id="9" name="Shape 7"/>
+          <p:cNvSpPr/>
+          <p:nvPr/>
+        </p:nvSpPr>
+        <p:spPr>
+          <a:xfrm>
+            <a:off x="3657600" y="2331720"/>
+            <a:ext cx="502920" cy="502920"/>
+          </a:xfrm>
+          <a:prstGeom prst="ellipse">
+            <a:avLst/>
+          </a:prstGeom>
+          <a:solidFill>
+            <a:srgbClr val="E8A317"/>
+          </a:solidFill>
+          <a:ln/>
+        </p:spPr>
+      </p:sp>
+      <p:sp>
+        <p:nvSpPr>
+          <p:cNvPr id="10" name="Text 8"/>
+          <p:cNvSpPr txBox="1"/>
+          <p:nvPr/>
+        </p:nvSpPr>
+        <p:spPr>
+          <a:xfrm>
+            <a:off x="3657600" y="2295144"/>
+            <a:ext cx="502920" cy="502920"/>
+          </a:xfrm>
+          <a:prstGeom prst="rect">
+            <a:avLst/>
+          </a:prstGeom>
+          <a:noFill/>
+          <a:ln/>
+        </p:spPr>
+        <p:txBody>
+          <a:bodyPr wrap="square" lIns="0" tIns="0" rIns="0" bIns="0" rtlCol="0" anchor="ctr"/>
+          <a:lstStyle/>
+          <a:p>
+            <a:pPr marL="0" indent="0" algn="ctr">
+              <a:buNone/>
+            </a:pPr>
+            <a:r>
+              <a:rPr lang="en-US" sz="1400" b="1" dirty="0">
+                <a:solidFill>
+                  <a:srgbClr val="12302A"/>
+                </a:solidFill>
+                <a:latin typeface="Cambria" pitchFamily="34" charset="0"/>
+                <a:ea typeface="Cambria" pitchFamily="34" charset="-122"/>
+                <a:cs typeface="Cambria" pitchFamily="34" charset="-120"/>
+              </a:rPr>
+              <a:t>2</a:t>
+            </a:r>
+            <a:endParaRPr lang="en-US" sz="1400" dirty="0"/>
+          </a:p>
+        </p:txBody>
+      </p:sp>
+      <p:sp>
+        <p:nvSpPr>
+          <p:cNvPr id="11" name="Text 9"/>
+          <p:cNvSpPr txBox="1"/>
+          <p:nvPr/>
+        </p:nvSpPr>
+        <p:spPr>
+          <a:xfrm>
+            <a:off x="3611880" y="2971800"/>
+            <a:ext cx="2286000" cy="914400"/>
+          </a:xfrm>
+          <a:prstGeom prst="rect">
+            <a:avLst/>
+          </a:prstGeom>
+          <a:noFill/>
+          <a:ln/>
+        </p:spPr>
+        <p:txBody>
+          <a:bodyPr wrap="square" lIns="0" tIns="0" rIns="0" bIns="0" rtlCol="0" anchor="ctr"/>
+          <a:lstStyle/>
+          <a:p>
+            <a:pPr marL="0" indent="0">
+              <a:buNone/>
+            </a:pPr>
+            <a:r>
+              <a:rPr lang="en-US" sz="2100" b="1" dirty="0">
+                <a:solidFill>
+                  <a:srgbClr val="FFFFFF"/>
+                </a:solidFill>
+                <a:latin typeface="Cambria" pitchFamily="34" charset="0"/>
+                <a:ea typeface="Cambria" pitchFamily="34" charset="-122"/>
+                <a:cs typeface="Cambria" pitchFamily="34" charset="-120"/>
+              </a:rPr>
+              <a:t>Experience</a:t>
+            </a:r>
+            <a:endParaRPr lang="en-US" sz="2100" dirty="0"/>
+          </a:p>
+        </p:txBody>
+      </p:sp>
+      <p:sp>
+        <p:nvSpPr>
+          <p:cNvPr id="12" name="Shape 10"/>
+          <p:cNvSpPr/>
+          <p:nvPr/>
+        </p:nvSpPr>
+        <p:spPr>
+          <a:xfrm>
+            <a:off x="6172200" y="2103120"/>
+            <a:ext cx="2560320" cy="2011680"/>
+          </a:xfrm>
+          <a:prstGeom prst="roundRect">
+            <a:avLst>
+              <a:gd name="adj" fmla="val 4545"/>
+            </a:avLst>
+          </a:prstGeom>
+          <a:solidFill>
+            <a:srgbClr val="12302A"/>
+          </a:solidFill>
+          <a:ln/>
+        </p:spPr>
+      </p:sp>
+      <p:sp>
+        <p:nvSpPr>
+          <p:cNvPr id="13" name="Shape 11"/>
+          <p:cNvSpPr/>
+          <p:nvPr/>
+        </p:nvSpPr>
+        <p:spPr>
+          <a:xfrm>
+            <a:off x="6400800" y="2331720"/>
+            <a:ext cx="502920" cy="502920"/>
+          </a:xfrm>
+          <a:prstGeom prst="ellipse">
+            <a:avLst/>
+          </a:prstGeom>
+          <a:solidFill>
+            <a:srgbClr val="E8A317"/>
+          </a:solidFill>
+          <a:ln/>
+        </p:spPr>
+      </p:sp>
+      <p:sp>
+        <p:nvSpPr>
+          <p:cNvPr id="14" name="Text 12"/>
+          <p:cNvSpPr txBox="1"/>
+          <p:nvPr/>
+        </p:nvSpPr>
+        <p:spPr>
+          <a:xfrm>
+            <a:off x="6400800" y="2295144"/>
+            <a:ext cx="502920" cy="502920"/>
+          </a:xfrm>
+          <a:prstGeom prst="rect">
+            <a:avLst/>
+          </a:prstGeom>
+          <a:noFill/>
+          <a:ln/>
+        </p:spPr>
+        <p:txBody>
+          <a:bodyPr wrap="square" lIns="0" tIns="0" rIns="0" bIns="0" rtlCol="0" anchor="ctr"/>
+          <a:lstStyle/>
+          <a:p>
+            <a:pPr marL="0" indent="0" algn="ctr">
+              <a:buNone/>
+            </a:pPr>
+            <a:r>
+              <a:rPr lang="en-US" sz="1400" b="1" dirty="0">
+                <a:solidFill>
+                  <a:srgbClr val="12302A"/>
+                </a:solidFill>
+                <a:latin typeface="Cambria" pitchFamily="34" charset="0"/>
+                <a:ea typeface="Cambria" pitchFamily="34" charset="-122"/>
+                <a:cs typeface="Cambria" pitchFamily="34" charset="-120"/>
+              </a:rPr>
+              <a:t>3</a:t>
+            </a:r>
+            <a:endParaRPr lang="en-US" sz="1400" dirty="0"/>
+          </a:p>
+        </p:txBody>
+      </p:sp>
+      <p:sp>
+        <p:nvSpPr>
+          <p:cNvPr id="15" name="Text 13"/>
+          <p:cNvSpPr txBox="1"/>
+          <p:nvPr/>
+        </p:nvSpPr>
+        <p:spPr>
+          <a:xfrm>
+            <a:off x="6355080" y="2971800"/>
+            <a:ext cx="2286000" cy="914400"/>
+          </a:xfrm>
+          <a:prstGeom prst="rect">
+            <a:avLst/>
+          </a:prstGeom>
+          <a:noFill/>
+          <a:ln/>
+        </p:spPr>
+        <p:txBody>
+          <a:bodyPr wrap="square" lIns="0" tIns="0" rIns="0" bIns="0" rtlCol="0" anchor="ctr"/>
+          <a:lstStyle/>
+          <a:p>
+            <a:pPr marL="0" indent="0">
+              <a:buNone/>
+            </a:pPr>
+            <a:r>
+              <a:rPr lang="en-US" sz="2100" b="1" dirty="0" smtClean="0">
+                <a:solidFill>
+                  <a:srgbClr val="FFFFFF"/>
+                </a:solidFill>
+                <a:latin typeface="Cambria" pitchFamily="34" charset="0"/>
+                <a:ea typeface="Cambria" pitchFamily="34" charset="-122"/>
+                <a:cs typeface="Cambria" pitchFamily="34" charset="-120"/>
+              </a:rPr>
+              <a:t>Insight</a:t>
+            </a:r>
+            <a:endParaRPr lang="en-US" sz="2100" dirty="0"/>
+          </a:p>
+        </p:txBody>
+      </p:sp>
+      <p:sp>
+        <p:nvSpPr>
+          <p:cNvPr id="16" name="Shape 14"/>
+          <p:cNvSpPr/>
+          <p:nvPr/>
+        </p:nvSpPr>
+        <p:spPr>
+          <a:xfrm>
+            <a:off x="8915400" y="2103120"/>
+            <a:ext cx="2560320" cy="2011680"/>
+          </a:xfrm>
+          <a:prstGeom prst="roundRect">
+            <a:avLst>
+              <a:gd name="adj" fmla="val 4545"/>
+            </a:avLst>
+          </a:prstGeom>
+          <a:solidFill>
+            <a:srgbClr val="E8A317"/>
+          </a:solidFill>
+          <a:ln/>
+        </p:spPr>
+      </p:sp>
+      <p:sp>
+        <p:nvSpPr>
+          <p:cNvPr id="17" name="Shape 15"/>
+          <p:cNvSpPr/>
+          <p:nvPr/>
+        </p:nvSpPr>
+        <p:spPr>
+          <a:xfrm>
+            <a:off x="9144000" y="2331720"/>
+            <a:ext cx="502920" cy="502920"/>
+          </a:xfrm>
+          <a:prstGeom prst="ellipse">
+            <a:avLst/>
+          </a:prstGeom>
+          <a:solidFill>
+            <a:srgbClr val="12302A"/>
+          </a:solidFill>
+          <a:ln/>
+        </p:spPr>
+      </p:sp>
+      <p:sp>
+        <p:nvSpPr>
+          <p:cNvPr id="18" name="Text 16"/>
+          <p:cNvSpPr txBox="1"/>
+          <p:nvPr/>
+        </p:nvSpPr>
+        <p:spPr>
+          <a:xfrm>
+            <a:off x="9144000" y="2295144"/>
+            <a:ext cx="502920" cy="502920"/>
+          </a:xfrm>
+          <a:prstGeom prst="rect">
+            <a:avLst/>
+          </a:prstGeom>
+          <a:noFill/>
+          <a:ln/>
+        </p:spPr>
+        <p:txBody>
+          <a:bodyPr wrap="square" lIns="0" tIns="0" rIns="0" bIns="0" rtlCol="0" anchor="ctr"/>
+          <a:lstStyle/>
+          <a:p>
+            <a:pPr marL="0" indent="0" algn="ctr">
+              <a:buNone/>
+            </a:pPr>
+            <a:r>
+              <a:rPr lang="en-US" sz="1400" b="1" dirty="0">
+                <a:solidFill>
+                  <a:srgbClr val="FFFFFF"/>
+                </a:solidFill>
+                <a:latin typeface="Cambria" pitchFamily="34" charset="0"/>
+                <a:ea typeface="Cambria" pitchFamily="34" charset="-122"/>
+                <a:cs typeface="Cambria" pitchFamily="34" charset="-120"/>
+              </a:rPr>
+              <a:t>4</a:t>
+            </a:r>
+            <a:endParaRPr lang="en-US" sz="1400" dirty="0"/>
+          </a:p>
+        </p:txBody>
+      </p:sp>
+      <p:sp>
+        <p:nvSpPr>
+          <p:cNvPr id="19" name="Text 17"/>
+          <p:cNvSpPr txBox="1"/>
+          <p:nvPr/>
+        </p:nvSpPr>
+        <p:spPr>
+          <a:xfrm>
+            <a:off x="9098280" y="2971800"/>
+            <a:ext cx="2286000" cy="914400"/>
+          </a:xfrm>
+          <a:prstGeom prst="rect">
+            <a:avLst/>
+          </a:prstGeom>
+          <a:noFill/>
+          <a:ln/>
+        </p:spPr>
+        <p:txBody>
+          <a:bodyPr wrap="square" lIns="0" tIns="0" rIns="0" bIns="0" rtlCol="0" anchor="ctr"/>
+          <a:lstStyle/>
+          <a:p>
+            <a:pPr marL="0" indent="0">
+              <a:buNone/>
+            </a:pPr>
+            <a:r>
+              <a:rPr lang="en-US" sz="2100" b="1" dirty="0">
+                <a:solidFill>
+                  <a:srgbClr val="12302A"/>
+                </a:solidFill>
+                <a:latin typeface="Cambria" pitchFamily="34" charset="0"/>
+                <a:ea typeface="Cambria" pitchFamily="34" charset="-122"/>
+                <a:cs typeface="Cambria" pitchFamily="34" charset="-120"/>
+              </a:rPr>
+              <a:t>Wisdom</a:t>
+            </a:r>
+            <a:endParaRPr lang="en-US" sz="2100" dirty="0"/>
+          </a:p>
+        </p:txBody>
+      </p:sp>
+      <p:sp>
+        <p:nvSpPr>
+          <p:cNvPr id="20" name="Text 18"/>
+          <p:cNvSpPr txBox="1"/>
+          <p:nvPr/>
+        </p:nvSpPr>
+        <p:spPr>
+          <a:xfrm>
+            <a:off x="685800" y="4297680"/>
+            <a:ext cx="10820095" cy="457200"/>
+          </a:xfrm>
+          <a:prstGeom prst="rect">
+            <a:avLst/>
+          </a:prstGeom>
+          <a:noFill/>
+          <a:ln/>
+        </p:spPr>
+        <p:txBody>
+          <a:bodyPr wrap="square" lIns="0" tIns="0" rIns="0" bIns="0" rtlCol="0" anchor="ctr"/>
+          <a:lstStyle/>
+          <a:p>
+            <a:pPr marL="0" indent="0">
+              <a:buNone/>
+            </a:pPr>
+            <a:r>
+              <a:rPr lang="en-US" sz="2000" i="1" dirty="0">
                 <a:solidFill>
                   <a:srgbClr val="6E7B74"/>
                 </a:solidFill>
@@ -4419,42 +5034,44 @@
                 <a:ea typeface="Calibri" pitchFamily="34" charset="-122"/>
                 <a:cs typeface="Calibri" pitchFamily="34" charset="-120"/>
               </a:rPr>
-              <a:t>AI collects the data</a:t>
-            </a:r>
-            <a:endParaRPr lang="en-US" sz="2400" dirty="0"/>
-          </a:p>
-        </p:txBody>
-      </p:sp>
-      <p:sp>
-        <p:nvSpPr>
-          <p:cNvPr id="5" name="Shape 3"/>
+              <a:t>Wisdom: to see what others do not see.</a:t>
+            </a:r>
+            <a:endParaRPr lang="en-US" sz="2000" dirty="0"/>
+          </a:p>
+        </p:txBody>
+      </p:sp>
+      <p:sp>
+        <p:nvSpPr>
+          <p:cNvPr id="21" name="Shape 19"/>
           <p:cNvSpPr/>
           <p:nvPr/>
         </p:nvSpPr>
         <p:spPr>
           <a:xfrm>
-            <a:off x="5760720" y="2423160"/>
-            <a:ext cx="548640" cy="365760"/>
-          </a:xfrm>
-          <a:prstGeom prst="rightArrow">
-            <a:avLst/>
+            <a:off x="685800" y="4937760"/>
+            <a:ext cx="10820095" cy="1280160"/>
+          </a:xfrm>
+          <a:prstGeom prst="roundRect">
+            <a:avLst>
+              <a:gd name="adj" fmla="val 7143"/>
+            </a:avLst>
           </a:prstGeom>
           <a:solidFill>
-            <a:srgbClr val="E8A317"/>
+            <a:srgbClr val="F1F3F1"/>
           </a:solidFill>
           <a:ln/>
         </p:spPr>
       </p:sp>
       <p:sp>
         <p:nvSpPr>
-          <p:cNvPr id="6" name="Text 4"/>
-          <p:cNvSpPr txBox="1"/>
-          <p:nvPr/>
-        </p:nvSpPr>
-        <p:spPr>
-          <a:xfrm>
-            <a:off x="6537960" y="2148840"/>
-            <a:ext cx="4937760" cy="914400"/>
+          <p:cNvPr id="22" name="Text 20"/>
+          <p:cNvSpPr txBox="1"/>
+          <p:nvPr/>
+        </p:nvSpPr>
+        <p:spPr>
+          <a:xfrm>
+            <a:off x="1051560" y="4937760"/>
+            <a:ext cx="10088575" cy="1280160"/>
           </a:xfrm>
           <a:prstGeom prst="rect">
             <a:avLst/>
@@ -4466,11 +5083,11 @@
           <a:bodyPr wrap="square" lIns="0" tIns="0" rIns="0" bIns="0" rtlCol="0" anchor="ctr"/>
           <a:lstStyle/>
           <a:p>
-            <a:pPr indent="0" marL="0">
+            <a:pPr marL="0" indent="0">
               <a:buNone/>
             </a:pPr>
             <a:r>
-              <a:rPr lang="en-US" sz="2600" b="1" dirty="0">
+              <a:rPr lang="en-US" sz="2400" b="1" dirty="0">
                 <a:solidFill>
                   <a:srgbClr val="12302A"/>
                 </a:solidFill>
@@ -4478,244 +5095,9 @@
                 <a:ea typeface="Cambria" pitchFamily="34" charset="-122"/>
                 <a:cs typeface="Cambria" pitchFamily="34" charset="-120"/>
               </a:rPr>
-              <a:t>You decide what to collect</a:t>
-            </a:r>
-            <a:endParaRPr lang="en-US" sz="2600" dirty="0"/>
-          </a:p>
-        </p:txBody>
-      </p:sp>
-      <p:sp>
-        <p:nvSpPr>
-          <p:cNvPr id="7" name="Text 5"/>
-          <p:cNvSpPr txBox="1"/>
-          <p:nvPr/>
-        </p:nvSpPr>
-        <p:spPr>
-          <a:xfrm>
-            <a:off x="685800" y="3291840"/>
-            <a:ext cx="4937760" cy="914400"/>
-          </a:xfrm>
-          <a:prstGeom prst="rect">
-            <a:avLst/>
-          </a:prstGeom>
-          <a:noFill/>
-          <a:ln/>
-        </p:spPr>
-        <p:txBody>
-          <a:bodyPr wrap="square" lIns="0" tIns="0" rIns="0" bIns="0" rtlCol="0" anchor="ctr"/>
-          <a:lstStyle/>
-          <a:p>
-            <a:pPr indent="0" marL="0">
-              <a:buNone/>
-            </a:pPr>
-            <a:r>
-              <a:rPr lang="en-US" sz="2400" dirty="0">
-                <a:solidFill>
-                  <a:srgbClr val="6E7B74"/>
-                </a:solidFill>
-                <a:latin typeface="Calibri" pitchFamily="34" charset="0"/>
-                <a:ea typeface="Calibri" pitchFamily="34" charset="-122"/>
-                <a:cs typeface="Calibri" pitchFamily="34" charset="-120"/>
-              </a:rPr>
-              <a:t>AI runs the analytics</a:t>
+              <a:t>“ChatGPT, give me an idea”  →  no ownership. You cannot take it anywhere.</a:t>
             </a:r>
             <a:endParaRPr lang="en-US" sz="2400" dirty="0"/>
-          </a:p>
-        </p:txBody>
-      </p:sp>
-      <p:sp>
-        <p:nvSpPr>
-          <p:cNvPr id="8" name="Shape 6"/>
-          <p:cNvSpPr/>
-          <p:nvPr/>
-        </p:nvSpPr>
-        <p:spPr>
-          <a:xfrm>
-            <a:off x="5760720" y="3566160"/>
-            <a:ext cx="548640" cy="365760"/>
-          </a:xfrm>
-          <a:prstGeom prst="rightArrow">
-            <a:avLst/>
-          </a:prstGeom>
-          <a:solidFill>
-            <a:srgbClr val="E8A317"/>
-          </a:solidFill>
-          <a:ln/>
-        </p:spPr>
-      </p:sp>
-      <p:sp>
-        <p:nvSpPr>
-          <p:cNvPr id="9" name="Text 7"/>
-          <p:cNvSpPr txBox="1"/>
-          <p:nvPr/>
-        </p:nvSpPr>
-        <p:spPr>
-          <a:xfrm>
-            <a:off x="6537960" y="3291840"/>
-            <a:ext cx="4937760" cy="914400"/>
-          </a:xfrm>
-          <a:prstGeom prst="rect">
-            <a:avLst/>
-          </a:prstGeom>
-          <a:noFill/>
-          <a:ln/>
-        </p:spPr>
-        <p:txBody>
-          <a:bodyPr wrap="square" lIns="0" tIns="0" rIns="0" bIns="0" rtlCol="0" anchor="ctr"/>
-          <a:lstStyle/>
-          <a:p>
-            <a:pPr indent="0" marL="0">
-              <a:buNone/>
-            </a:pPr>
-            <a:r>
-              <a:rPr lang="en-US" sz="2600" b="1" dirty="0">
-                <a:solidFill>
-                  <a:srgbClr val="12302A"/>
-                </a:solidFill>
-                <a:latin typeface="Cambria" pitchFamily="34" charset="0"/>
-                <a:ea typeface="Cambria" pitchFamily="34" charset="-122"/>
-                <a:cs typeface="Cambria" pitchFamily="34" charset="-120"/>
-              </a:rPr>
-              <a:t>You infer what is going on</a:t>
-            </a:r>
-            <a:endParaRPr lang="en-US" sz="2600" dirty="0"/>
-          </a:p>
-        </p:txBody>
-      </p:sp>
-      <p:sp>
-        <p:nvSpPr>
-          <p:cNvPr id="10" name="Text 8"/>
-          <p:cNvSpPr txBox="1"/>
-          <p:nvPr/>
-        </p:nvSpPr>
-        <p:spPr>
-          <a:xfrm>
-            <a:off x="685800" y="4434840"/>
-            <a:ext cx="4937760" cy="914400"/>
-          </a:xfrm>
-          <a:prstGeom prst="rect">
-            <a:avLst/>
-          </a:prstGeom>
-          <a:noFill/>
-          <a:ln/>
-        </p:spPr>
-        <p:txBody>
-          <a:bodyPr wrap="square" lIns="0" tIns="0" rIns="0" bIns="0" rtlCol="0" anchor="ctr"/>
-          <a:lstStyle/>
-          <a:p>
-            <a:pPr indent="0" marL="0">
-              <a:buNone/>
-            </a:pPr>
-            <a:r>
-              <a:rPr lang="en-US" sz="2400" dirty="0">
-                <a:solidFill>
-                  <a:srgbClr val="6E7B74"/>
-                </a:solidFill>
-                <a:latin typeface="Calibri" pitchFamily="34" charset="0"/>
-                <a:ea typeface="Calibri" pitchFamily="34" charset="-122"/>
-                <a:cs typeface="Calibri" pitchFamily="34" charset="-120"/>
-              </a:rPr>
-              <a:t>AI writes the report</a:t>
-            </a:r>
-            <a:endParaRPr lang="en-US" sz="2400" dirty="0"/>
-          </a:p>
-        </p:txBody>
-      </p:sp>
-      <p:sp>
-        <p:nvSpPr>
-          <p:cNvPr id="11" name="Shape 9"/>
-          <p:cNvSpPr/>
-          <p:nvPr/>
-        </p:nvSpPr>
-        <p:spPr>
-          <a:xfrm>
-            <a:off x="5760720" y="4709160"/>
-            <a:ext cx="548640" cy="365760"/>
-          </a:xfrm>
-          <a:prstGeom prst="rightArrow">
-            <a:avLst/>
-          </a:prstGeom>
-          <a:solidFill>
-            <a:srgbClr val="E8A317"/>
-          </a:solidFill>
-          <a:ln/>
-        </p:spPr>
-      </p:sp>
-      <p:sp>
-        <p:nvSpPr>
-          <p:cNvPr id="12" name="Text 10"/>
-          <p:cNvSpPr txBox="1"/>
-          <p:nvPr/>
-        </p:nvSpPr>
-        <p:spPr>
-          <a:xfrm>
-            <a:off x="6537960" y="4434840"/>
-            <a:ext cx="4937760" cy="914400"/>
-          </a:xfrm>
-          <a:prstGeom prst="rect">
-            <a:avLst/>
-          </a:prstGeom>
-          <a:noFill/>
-          <a:ln/>
-        </p:spPr>
-        <p:txBody>
-          <a:bodyPr wrap="square" lIns="0" tIns="0" rIns="0" bIns="0" rtlCol="0" anchor="ctr"/>
-          <a:lstStyle/>
-          <a:p>
-            <a:pPr indent="0" marL="0">
-              <a:buNone/>
-            </a:pPr>
-            <a:r>
-              <a:rPr lang="en-US" sz="2600" b="1" dirty="0">
-                <a:solidFill>
-                  <a:srgbClr val="12302A"/>
-                </a:solidFill>
-                <a:latin typeface="Cambria" pitchFamily="34" charset="0"/>
-                <a:ea typeface="Cambria" pitchFamily="34" charset="-122"/>
-                <a:cs typeface="Cambria" pitchFamily="34" charset="-120"/>
-              </a:rPr>
-              <a:t>You created the agenda</a:t>
-            </a:r>
-            <a:endParaRPr lang="en-US" sz="2600" dirty="0"/>
-          </a:p>
-        </p:txBody>
-      </p:sp>
-      <p:sp>
-        <p:nvSpPr>
-          <p:cNvPr id="13" name="Text 11"/>
-          <p:cNvSpPr txBox="1"/>
-          <p:nvPr/>
-        </p:nvSpPr>
-        <p:spPr>
-          <a:xfrm>
-            <a:off x="685800" y="5532120"/>
-            <a:ext cx="10820095" cy="731520"/>
-          </a:xfrm>
-          <a:prstGeom prst="rect">
-            <a:avLst/>
-          </a:prstGeom>
-          <a:noFill/>
-          <a:ln/>
-        </p:spPr>
-        <p:txBody>
-          <a:bodyPr wrap="square" lIns="0" tIns="0" rIns="0" bIns="0" rtlCol="0" anchor="ctr"/>
-          <a:lstStyle/>
-          <a:p>
-            <a:pPr indent="0" marL="0">
-              <a:buNone/>
-            </a:pPr>
-            <a:r>
-              <a:rPr lang="en-US" sz="2600" b="1" i="1" dirty="0">
-                <a:solidFill>
-                  <a:srgbClr val="2C5F4A"/>
-                </a:solidFill>
-                <a:latin typeface="Cambria" pitchFamily="34" charset="0"/>
-                <a:ea typeface="Cambria" pitchFamily="34" charset="-122"/>
-                <a:cs typeface="Cambria" pitchFamily="34" charset="-120"/>
-              </a:rPr>
-              <a:t>The data that made Coca-Cola will never be in the public domain.</a:t>
-            </a:r>
-            <a:endParaRPr lang="en-US" sz="2600" dirty="0"/>
           </a:p>
         </p:txBody>
       </p:sp>
@@ -4729,12 +5111,13 @@
 
 <file path=ppt/slides/slide15.xml><?xml version="1.0" encoding="utf-8"?>
 <p:sld xmlns:a="http://schemas.openxmlformats.org/drawingml/2006/main" xmlns:r="http://schemas.openxmlformats.org/officeDocument/2006/relationships" xmlns:p="http://schemas.openxmlformats.org/presentationml/2006/main">
-  <p:cSld name="Slide 15">
+  <p:cSld name="Slide 13">
     <p:bg>
       <p:bgPr>
         <a:solidFill>
           <a:srgbClr val="12302A"/>
         </a:solidFill>
+        <a:effectLst/>
       </p:bgPr>
     </p:bg>
     <p:spTree>
@@ -4812,7 +5195,7 @@
           <a:bodyPr wrap="square" lIns="0" tIns="0" rIns="0" bIns="0" rtlCol="0" anchor="ctr"/>
           <a:lstStyle/>
           <a:p>
-            <a:pPr algn="ctr" indent="0" marL="0">
+            <a:pPr marL="0" indent="0" algn="ctr">
               <a:buNone/>
             </a:pPr>
             <a:r>
@@ -4824,7 +5207,7 @@
                 <a:ea typeface="Cambria" pitchFamily="34" charset="-122"/>
                 <a:cs typeface="Cambria" pitchFamily="34" charset="-120"/>
               </a:rPr>
-              <a:t>2</a:t>
+              <a:t>1</a:t>
             </a:r>
             <a:endParaRPr lang="en-US" sz="4200" dirty="0"/>
           </a:p>
@@ -4851,11 +5234,10 @@
           <a:bodyPr wrap="square" lIns="0" tIns="0" rIns="0" bIns="0" rtlCol="0" anchor="ctr"/>
           <a:lstStyle/>
           <a:p>
-            <a:pPr indent="0" marL="0">
+            <a:pPr>
               <a:lnSpc>
                 <a:spcPts val="5800"/>
               </a:lnSpc>
-              <a:buNone/>
             </a:pPr>
             <a:r>
               <a:rPr lang="en-US" sz="5000" b="1" dirty="0">
@@ -4866,27 +5248,7 @@
                 <a:ea typeface="Cambria" pitchFamily="34" charset="-122"/>
                 <a:cs typeface="Cambria" pitchFamily="34" charset="-120"/>
               </a:rPr>
-              <a:t>Ownership of</a:t>
-            </a:r>
-            <a:endParaRPr lang="en-US" sz="5000" dirty="0"/>
-          </a:p>
-          <a:p>
-            <a:pPr indent="0" marL="0">
-              <a:lnSpc>
-                <a:spcPts val="5800"/>
-              </a:lnSpc>
-              <a:buNone/>
-            </a:pPr>
-            <a:r>
-              <a:rPr lang="en-US" sz="5000" b="1" dirty="0">
-                <a:solidFill>
-                  <a:srgbClr val="FFFFFF"/>
-                </a:solidFill>
-                <a:latin typeface="Cambria" pitchFamily="34" charset="0"/>
-                <a:ea typeface="Cambria" pitchFamily="34" charset="-122"/>
-                <a:cs typeface="Cambria" pitchFamily="34" charset="-120"/>
-              </a:rPr>
-              <a:t>creativity</a:t>
+              <a:t>Ownership is research</a:t>
             </a:r>
             <a:endParaRPr lang="en-US" sz="5000" dirty="0"/>
           </a:p>
@@ -4913,7 +5275,7 @@
           <a:bodyPr wrap="square" lIns="0" tIns="0" rIns="0" bIns="0" rtlCol="0" anchor="ctr"/>
           <a:lstStyle/>
           <a:p>
-            <a:pPr indent="0" marL="0">
+            <a:pPr marL="0" indent="0">
               <a:buNone/>
             </a:pPr>
             <a:r>
@@ -4925,7 +5287,7 @@
                 <a:ea typeface="Calibri" pitchFamily="34" charset="-122"/>
                 <a:cs typeface="Calibri" pitchFamily="34" charset="-120"/>
               </a:rPr>
-              <a:t>The hallmark of every great revolution</a:t>
+              <a:t>Coca-Cola vs Pepsi</a:t>
             </a:r>
             <a:endParaRPr lang="en-US" sz="2200" dirty="0"/>
           </a:p>
@@ -4941,12 +5303,13 @@
 
 <file path=ppt/slides/slide16.xml><?xml version="1.0" encoding="utf-8"?>
 <p:sld xmlns:a="http://schemas.openxmlformats.org/drawingml/2006/main" xmlns:r="http://schemas.openxmlformats.org/officeDocument/2006/relationships" xmlns:p="http://schemas.openxmlformats.org/presentationml/2006/main">
-  <p:cSld name="Slide 16">
+  <p:cSld name="Slide 14">
     <p:bg>
       <p:bgPr>
         <a:solidFill>
           <a:srgbClr val="FFFFFF"/>
         </a:solidFill>
+        <a:effectLst/>
       </p:bgPr>
     </p:bg>
     <p:spTree>
@@ -4984,11 +5347,11 @@
           <a:bodyPr wrap="square" lIns="0" tIns="0" rIns="0" bIns="0" rtlCol="0" anchor="ctr"/>
           <a:lstStyle/>
           <a:p>
-            <a:pPr indent="0" marL="0">
+            <a:pPr marL="0" indent="0">
               <a:buNone/>
             </a:pPr>
             <a:r>
-              <a:rPr lang="en-US" sz="1400" b="1" spc="250" kern="0" dirty="0">
+              <a:rPr lang="en-US" sz="1400" b="1" kern="0" spc="250" dirty="0">
                 <a:solidFill>
                   <a:srgbClr val="2C5F4A"/>
                 </a:solidFill>
@@ -4996,7 +5359,7 @@
                 <a:ea typeface="Calibri" pitchFamily="34" charset="-122"/>
                 <a:cs typeface="Calibri" pitchFamily="34" charset="-120"/>
               </a:rPr>
-              <a:t>OWNERSHIP · 2</a:t>
+              <a:t>OWNERSHIP · 1</a:t>
             </a:r>
             <a:endParaRPr lang="en-US" sz="1400" dirty="0"/>
           </a:p>
@@ -5023,11 +5386,11 @@
           <a:bodyPr wrap="square" lIns="0" tIns="0" rIns="0" bIns="0" rtlCol="0" anchor="ctr"/>
           <a:lstStyle/>
           <a:p>
-            <a:pPr indent="0" marL="0">
+            <a:pPr marL="0" indent="0">
               <a:buNone/>
             </a:pPr>
             <a:r>
-              <a:rPr lang="en-US" sz="4400" b="1" dirty="0">
+              <a:rPr lang="en-US" sz="4600" b="1" dirty="0">
                 <a:solidFill>
                   <a:srgbClr val="12302A"/>
                 </a:solidFill>
@@ -5035,33 +5398,61 @@
                 <a:ea typeface="Cambria" pitchFamily="34" charset="-122"/>
                 <a:cs typeface="Cambria" pitchFamily="34" charset="-120"/>
               </a:rPr>
-              <a:t>Creativity takes four things</a:t>
-            </a:r>
-            <a:endParaRPr lang="en-US" sz="4400" dirty="0"/>
-          </a:p>
-        </p:txBody>
-      </p:sp>
-      <p:sp>
-        <p:nvSpPr>
-          <p:cNvPr id="4" name="Shape 2"/>
-          <p:cNvSpPr/>
-          <p:nvPr/>
-        </p:nvSpPr>
-        <p:spPr>
-          <a:xfrm>
-            <a:off x="685800" y="2103120"/>
-            <a:ext cx="2560320" cy="2011680"/>
-          </a:xfrm>
-          <a:prstGeom prst="roundRect">
-            <a:avLst>
-              <a:gd name="adj" fmla="val 4545"/>
-            </a:avLst>
-          </a:prstGeom>
-          <a:solidFill>
-            <a:srgbClr val="12302A"/>
-          </a:solidFill>
-          <a:ln/>
-        </p:spPr>
+              <a:t>Research is </a:t>
+            </a:r>
+            <a:r>
+              <a:rPr lang="en-US" sz="4600" b="1" dirty="0" smtClean="0">
+                <a:solidFill>
+                  <a:srgbClr val="12302A"/>
+                </a:solidFill>
+                <a:latin typeface="Cambria" pitchFamily="34" charset="0"/>
+                <a:ea typeface="Cambria" pitchFamily="34" charset="-122"/>
+                <a:cs typeface="Cambria" pitchFamily="34" charset="-120"/>
+              </a:rPr>
+              <a:t>beyond what AI can do alone</a:t>
+            </a:r>
+            <a:endParaRPr lang="en-US" sz="4600" dirty="0"/>
+          </a:p>
+        </p:txBody>
+      </p:sp>
+      <p:sp>
+        <p:nvSpPr>
+          <p:cNvPr id="4" name="Text 2"/>
+          <p:cNvSpPr txBox="1"/>
+          <p:nvPr/>
+        </p:nvSpPr>
+        <p:spPr>
+          <a:xfrm>
+            <a:off x="685800" y="2148840"/>
+            <a:ext cx="4937760" cy="914400"/>
+          </a:xfrm>
+          <a:prstGeom prst="rect">
+            <a:avLst/>
+          </a:prstGeom>
+          <a:noFill/>
+          <a:ln/>
+        </p:spPr>
+        <p:txBody>
+          <a:bodyPr wrap="square" lIns="0" tIns="0" rIns="0" bIns="0" rtlCol="0" anchor="ctr"/>
+          <a:lstStyle/>
+          <a:p>
+            <a:pPr marL="0" indent="0">
+              <a:buNone/>
+            </a:pPr>
+            <a:r>
+              <a:rPr lang="en-US" sz="2400" dirty="0">
+                <a:solidFill>
+                  <a:srgbClr val="6E7B74"/>
+                </a:solidFill>
+                <a:latin typeface="Calibri" pitchFamily="34" charset="0"/>
+                <a:ea typeface="Calibri" pitchFamily="34" charset="-122"/>
+                <a:cs typeface="Calibri" pitchFamily="34" charset="-120"/>
+              </a:rPr>
+              <a:t>AI collects the data</a:t>
+            </a:r>
+            <a:endParaRPr lang="en-US" sz="2400" dirty="0"/>
+          </a:p>
+        </p:txBody>
       </p:sp>
       <p:sp>
         <p:nvSpPr>
@@ -5071,10 +5462,10 @@
         </p:nvSpPr>
         <p:spPr>
           <a:xfrm>
-            <a:off x="914400" y="2331720"/>
-            <a:ext cx="502920" cy="502920"/>
-          </a:xfrm>
-          <a:prstGeom prst="ellipse">
+            <a:off x="5760720" y="2423160"/>
+            <a:ext cx="548640" cy="365760"/>
+          </a:xfrm>
+          <a:prstGeom prst="rightArrow">
             <a:avLst/>
           </a:prstGeom>
           <a:solidFill>
@@ -5091,8 +5482,8 @@
         </p:nvSpPr>
         <p:spPr>
           <a:xfrm>
-            <a:off x="914400" y="2295144"/>
-            <a:ext cx="502920" cy="502920"/>
+            <a:off x="6537960" y="2148840"/>
+            <a:ext cx="4937760" cy="914400"/>
           </a:xfrm>
           <a:prstGeom prst="rect">
             <a:avLst/>
@@ -5104,11 +5495,11 @@
           <a:bodyPr wrap="square" lIns="0" tIns="0" rIns="0" bIns="0" rtlCol="0" anchor="ctr"/>
           <a:lstStyle/>
           <a:p>
-            <a:pPr algn="ctr" indent="0" marL="0">
+            <a:pPr marL="0" indent="0">
               <a:buNone/>
             </a:pPr>
             <a:r>
-              <a:rPr lang="en-US" sz="1400" b="1" dirty="0">
+              <a:rPr lang="en-US" sz="2600" b="1" dirty="0">
                 <a:solidFill>
                   <a:srgbClr val="12302A"/>
                 </a:solidFill>
@@ -5116,9 +5507,9 @@
                 <a:ea typeface="Cambria" pitchFamily="34" charset="-122"/>
                 <a:cs typeface="Cambria" pitchFamily="34" charset="-120"/>
               </a:rPr>
-              <a:t>1</a:t>
-            </a:r>
-            <a:endParaRPr lang="en-US" sz="1400" dirty="0"/>
+              <a:t>You decide what to collect</a:t>
+            </a:r>
+            <a:endParaRPr lang="en-US" sz="2600" dirty="0"/>
           </a:p>
         </p:txBody>
       </p:sp>
@@ -5130,8 +5521,8 @@
         </p:nvSpPr>
         <p:spPr>
           <a:xfrm>
-            <a:off x="868680" y="2971800"/>
-            <a:ext cx="2286000" cy="914400"/>
+            <a:off x="685800" y="3291840"/>
+            <a:ext cx="4937760" cy="914400"/>
           </a:xfrm>
           <a:prstGeom prst="rect">
             <a:avLst/>
@@ -5143,58 +5534,145 @@
           <a:bodyPr wrap="square" lIns="0" tIns="0" rIns="0" bIns="0" rtlCol="0" anchor="ctr"/>
           <a:lstStyle/>
           <a:p>
-            <a:pPr indent="0" marL="0">
+            <a:pPr marL="0" indent="0">
               <a:buNone/>
             </a:pPr>
             <a:r>
-              <a:rPr lang="en-US" sz="2100" b="1" dirty="0">
-                <a:solidFill>
-                  <a:srgbClr val="FFFFFF"/>
+              <a:rPr lang="en-US" sz="2400" dirty="0">
+                <a:solidFill>
+                  <a:srgbClr val="6E7B74"/>
+                </a:solidFill>
+                <a:latin typeface="Calibri" pitchFamily="34" charset="0"/>
+                <a:ea typeface="Calibri" pitchFamily="34" charset="-122"/>
+                <a:cs typeface="Calibri" pitchFamily="34" charset="-120"/>
+              </a:rPr>
+              <a:t>AI runs the analytics</a:t>
+            </a:r>
+            <a:endParaRPr lang="en-US" sz="2400" dirty="0"/>
+          </a:p>
+        </p:txBody>
+      </p:sp>
+      <p:sp>
+        <p:nvSpPr>
+          <p:cNvPr id="8" name="Shape 6"/>
+          <p:cNvSpPr/>
+          <p:nvPr/>
+        </p:nvSpPr>
+        <p:spPr>
+          <a:xfrm>
+            <a:off x="5760720" y="3566160"/>
+            <a:ext cx="548640" cy="365760"/>
+          </a:xfrm>
+          <a:prstGeom prst="rightArrow">
+            <a:avLst/>
+          </a:prstGeom>
+          <a:solidFill>
+            <a:srgbClr val="E8A317"/>
+          </a:solidFill>
+          <a:ln/>
+        </p:spPr>
+      </p:sp>
+      <p:sp>
+        <p:nvSpPr>
+          <p:cNvPr id="9" name="Text 7"/>
+          <p:cNvSpPr txBox="1"/>
+          <p:nvPr/>
+        </p:nvSpPr>
+        <p:spPr>
+          <a:xfrm>
+            <a:off x="6537960" y="3291840"/>
+            <a:ext cx="4937760" cy="914400"/>
+          </a:xfrm>
+          <a:prstGeom prst="rect">
+            <a:avLst/>
+          </a:prstGeom>
+          <a:noFill/>
+          <a:ln/>
+        </p:spPr>
+        <p:txBody>
+          <a:bodyPr wrap="square" lIns="0" tIns="0" rIns="0" bIns="0" rtlCol="0" anchor="ctr"/>
+          <a:lstStyle/>
+          <a:p>
+            <a:pPr marL="0" indent="0">
+              <a:buNone/>
+            </a:pPr>
+            <a:r>
+              <a:rPr lang="en-US" sz="2600" b="1" dirty="0">
+                <a:solidFill>
+                  <a:srgbClr val="12302A"/>
                 </a:solidFill>
                 <a:latin typeface="Cambria" pitchFamily="34" charset="0"/>
                 <a:ea typeface="Cambria" pitchFamily="34" charset="-122"/>
                 <a:cs typeface="Cambria" pitchFamily="34" charset="-120"/>
               </a:rPr>
-              <a:t>Exposure</a:t>
-            </a:r>
-            <a:endParaRPr lang="en-US" sz="2100" dirty="0"/>
-          </a:p>
-        </p:txBody>
-      </p:sp>
-      <p:sp>
-        <p:nvSpPr>
-          <p:cNvPr id="8" name="Shape 6"/>
+              <a:t>You </a:t>
+            </a:r>
+            <a:r>
+              <a:rPr lang="en-US" sz="2600" b="1" dirty="0" smtClean="0">
+                <a:solidFill>
+                  <a:srgbClr val="12302A"/>
+                </a:solidFill>
+                <a:latin typeface="Cambria" pitchFamily="34" charset="0"/>
+                <a:ea typeface="Cambria" pitchFamily="34" charset="-122"/>
+                <a:cs typeface="Cambria" pitchFamily="34" charset="-120"/>
+              </a:rPr>
+              <a:t>make your inferences</a:t>
+            </a:r>
+            <a:endParaRPr lang="en-US" sz="2600" dirty="0"/>
+          </a:p>
+        </p:txBody>
+      </p:sp>
+      <p:sp>
+        <p:nvSpPr>
+          <p:cNvPr id="10" name="Text 8"/>
+          <p:cNvSpPr txBox="1"/>
+          <p:nvPr/>
+        </p:nvSpPr>
+        <p:spPr>
+          <a:xfrm>
+            <a:off x="685800" y="4434840"/>
+            <a:ext cx="4937760" cy="914400"/>
+          </a:xfrm>
+          <a:prstGeom prst="rect">
+            <a:avLst/>
+          </a:prstGeom>
+          <a:noFill/>
+          <a:ln/>
+        </p:spPr>
+        <p:txBody>
+          <a:bodyPr wrap="square" lIns="0" tIns="0" rIns="0" bIns="0" rtlCol="0" anchor="ctr"/>
+          <a:lstStyle/>
+          <a:p>
+            <a:pPr marL="0" indent="0">
+              <a:buNone/>
+            </a:pPr>
+            <a:r>
+              <a:rPr lang="en-US" sz="2400" dirty="0">
+                <a:solidFill>
+                  <a:srgbClr val="6E7B74"/>
+                </a:solidFill>
+                <a:latin typeface="Calibri" pitchFamily="34" charset="0"/>
+                <a:ea typeface="Calibri" pitchFamily="34" charset="-122"/>
+                <a:cs typeface="Calibri" pitchFamily="34" charset="-120"/>
+              </a:rPr>
+              <a:t>AI writes the report</a:t>
+            </a:r>
+            <a:endParaRPr lang="en-US" sz="2400" dirty="0"/>
+          </a:p>
+        </p:txBody>
+      </p:sp>
+      <p:sp>
+        <p:nvSpPr>
+          <p:cNvPr id="11" name="Shape 9"/>
           <p:cNvSpPr/>
           <p:nvPr/>
         </p:nvSpPr>
         <p:spPr>
           <a:xfrm>
-            <a:off x="3429000" y="2103120"/>
-            <a:ext cx="2560320" cy="2011680"/>
-          </a:xfrm>
-          <a:prstGeom prst="roundRect">
-            <a:avLst>
-              <a:gd name="adj" fmla="val 4545"/>
-            </a:avLst>
-          </a:prstGeom>
-          <a:solidFill>
-            <a:srgbClr val="12302A"/>
-          </a:solidFill>
-          <a:ln/>
-        </p:spPr>
-      </p:sp>
-      <p:sp>
-        <p:nvSpPr>
-          <p:cNvPr id="9" name="Shape 7"/>
-          <p:cNvSpPr/>
-          <p:nvPr/>
-        </p:nvSpPr>
-        <p:spPr>
-          <a:xfrm>
-            <a:off x="3657600" y="2331720"/>
-            <a:ext cx="502920" cy="502920"/>
-          </a:xfrm>
-          <a:prstGeom prst="ellipse">
+            <a:off x="5760720" y="4709160"/>
+            <a:ext cx="548640" cy="365760"/>
+          </a:xfrm>
+          <a:prstGeom prst="rightArrow">
             <a:avLst/>
           </a:prstGeom>
           <a:solidFill>
@@ -5205,14 +5683,14 @@
       </p:sp>
       <p:sp>
         <p:nvSpPr>
-          <p:cNvPr id="10" name="Text 8"/>
-          <p:cNvSpPr txBox="1"/>
-          <p:nvPr/>
-        </p:nvSpPr>
-        <p:spPr>
-          <a:xfrm>
-            <a:off x="3657600" y="2295144"/>
-            <a:ext cx="502920" cy="502920"/>
+          <p:cNvPr id="12" name="Text 10"/>
+          <p:cNvSpPr txBox="1"/>
+          <p:nvPr/>
+        </p:nvSpPr>
+        <p:spPr>
+          <a:xfrm>
+            <a:off x="6537960" y="4434840"/>
+            <a:ext cx="4937760" cy="914400"/>
           </a:xfrm>
           <a:prstGeom prst="rect">
             <a:avLst/>
@@ -5224,11 +5702,11 @@
           <a:bodyPr wrap="square" lIns="0" tIns="0" rIns="0" bIns="0" rtlCol="0" anchor="ctr"/>
           <a:lstStyle/>
           <a:p>
-            <a:pPr algn="ctr" indent="0" marL="0">
+            <a:pPr marL="0" indent="0">
               <a:buNone/>
             </a:pPr>
             <a:r>
-              <a:rPr lang="en-US" sz="1400" b="1" dirty="0">
+              <a:rPr lang="en-US" sz="2600" b="1" dirty="0">
                 <a:solidFill>
                   <a:srgbClr val="12302A"/>
                 </a:solidFill>
@@ -5236,103 +5714,33 @@
                 <a:ea typeface="Cambria" pitchFamily="34" charset="-122"/>
                 <a:cs typeface="Cambria" pitchFamily="34" charset="-120"/>
               </a:rPr>
-              <a:t>2</a:t>
-            </a:r>
-            <a:endParaRPr lang="en-US" sz="1400" dirty="0"/>
-          </a:p>
-        </p:txBody>
-      </p:sp>
-      <p:sp>
-        <p:nvSpPr>
-          <p:cNvPr id="11" name="Text 9"/>
-          <p:cNvSpPr txBox="1"/>
-          <p:nvPr/>
-        </p:nvSpPr>
-        <p:spPr>
-          <a:xfrm>
-            <a:off x="3611880" y="2971800"/>
-            <a:ext cx="2286000" cy="914400"/>
-          </a:xfrm>
-          <a:prstGeom prst="rect">
-            <a:avLst/>
-          </a:prstGeom>
-          <a:noFill/>
-          <a:ln/>
-        </p:spPr>
-        <p:txBody>
-          <a:bodyPr wrap="square" lIns="0" tIns="0" rIns="0" bIns="0" rtlCol="0" anchor="ctr"/>
-          <a:lstStyle/>
-          <a:p>
-            <a:pPr indent="0" marL="0">
-              <a:buNone/>
-            </a:pPr>
-            <a:r>
-              <a:rPr lang="en-US" sz="2100" b="1" dirty="0">
-                <a:solidFill>
-                  <a:srgbClr val="FFFFFF"/>
+              <a:t>You </a:t>
+            </a:r>
+            <a:r>
+              <a:rPr lang="en-US" sz="2600" b="1" dirty="0" smtClean="0">
+                <a:solidFill>
+                  <a:srgbClr val="12302A"/>
                 </a:solidFill>
                 <a:latin typeface="Cambria" pitchFamily="34" charset="0"/>
                 <a:ea typeface="Cambria" pitchFamily="34" charset="-122"/>
                 <a:cs typeface="Cambria" pitchFamily="34" charset="-120"/>
               </a:rPr>
-              <a:t>Experience</a:t>
-            </a:r>
-            <a:endParaRPr lang="en-US" sz="2100" dirty="0"/>
-          </a:p>
-        </p:txBody>
-      </p:sp>
-      <p:sp>
-        <p:nvSpPr>
-          <p:cNvPr id="12" name="Shape 10"/>
-          <p:cNvSpPr/>
-          <p:nvPr/>
-        </p:nvSpPr>
-        <p:spPr>
-          <a:xfrm>
-            <a:off x="6172200" y="2103120"/>
-            <a:ext cx="2560320" cy="2011680"/>
-          </a:xfrm>
-          <a:prstGeom prst="roundRect">
-            <a:avLst>
-              <a:gd name="adj" fmla="val 4545"/>
-            </a:avLst>
-          </a:prstGeom>
-          <a:solidFill>
-            <a:srgbClr val="12302A"/>
-          </a:solidFill>
-          <a:ln/>
-        </p:spPr>
-      </p:sp>
-      <p:sp>
-        <p:nvSpPr>
-          <p:cNvPr id="13" name="Shape 11"/>
-          <p:cNvSpPr/>
-          <p:nvPr/>
-        </p:nvSpPr>
-        <p:spPr>
-          <a:xfrm>
-            <a:off x="6400800" y="2331720"/>
-            <a:ext cx="502920" cy="502920"/>
-          </a:xfrm>
-          <a:prstGeom prst="ellipse">
-            <a:avLst/>
-          </a:prstGeom>
-          <a:solidFill>
-            <a:srgbClr val="E8A317"/>
-          </a:solidFill>
-          <a:ln/>
-        </p:spPr>
-      </p:sp>
-      <p:sp>
-        <p:nvSpPr>
-          <p:cNvPr id="14" name="Text 12"/>
-          <p:cNvSpPr txBox="1"/>
-          <p:nvPr/>
-        </p:nvSpPr>
-        <p:spPr>
-          <a:xfrm>
-            <a:off x="6400800" y="2295144"/>
-            <a:ext cx="502920" cy="502920"/>
+              <a:t>justify the positions taken</a:t>
+            </a:r>
+            <a:endParaRPr lang="en-US" sz="2600" dirty="0"/>
+          </a:p>
+        </p:txBody>
+      </p:sp>
+      <p:sp>
+        <p:nvSpPr>
+          <p:cNvPr id="13" name="Text 11"/>
+          <p:cNvSpPr txBox="1"/>
+          <p:nvPr/>
+        </p:nvSpPr>
+        <p:spPr>
+          <a:xfrm>
+            <a:off x="685800" y="5532120"/>
+            <a:ext cx="10820095" cy="731520"/>
           </a:xfrm>
           <a:prstGeom prst="rect">
             <a:avLst/>
@@ -5344,280 +5752,43 @@
           <a:bodyPr wrap="square" lIns="0" tIns="0" rIns="0" bIns="0" rtlCol="0" anchor="ctr"/>
           <a:lstStyle/>
           <a:p>
-            <a:pPr algn="ctr" indent="0" marL="0">
+            <a:pPr marL="0" indent="0">
               <a:buNone/>
             </a:pPr>
             <a:r>
-              <a:rPr lang="en-US" sz="1400" b="1" dirty="0">
-                <a:solidFill>
-                  <a:srgbClr val="12302A"/>
+              <a:rPr lang="en-US" sz="2600" b="1" i="1" dirty="0">
+                <a:solidFill>
+                  <a:srgbClr val="2C5F4A"/>
                 </a:solidFill>
                 <a:latin typeface="Cambria" pitchFamily="34" charset="0"/>
                 <a:ea typeface="Cambria" pitchFamily="34" charset="-122"/>
                 <a:cs typeface="Cambria" pitchFamily="34" charset="-120"/>
               </a:rPr>
-              <a:t>3</a:t>
-            </a:r>
-            <a:endParaRPr lang="en-US" sz="1400" dirty="0"/>
-          </a:p>
-        </p:txBody>
-      </p:sp>
-      <p:sp>
-        <p:nvSpPr>
-          <p:cNvPr id="15" name="Text 13"/>
-          <p:cNvSpPr txBox="1"/>
-          <p:nvPr/>
-        </p:nvSpPr>
-        <p:spPr>
-          <a:xfrm>
-            <a:off x="6355080" y="2971800"/>
-            <a:ext cx="2286000" cy="914400"/>
-          </a:xfrm>
-          <a:prstGeom prst="rect">
-            <a:avLst/>
-          </a:prstGeom>
-          <a:noFill/>
-          <a:ln/>
-        </p:spPr>
-        <p:txBody>
-          <a:bodyPr wrap="square" lIns="0" tIns="0" rIns="0" bIns="0" rtlCol="0" anchor="ctr"/>
-          <a:lstStyle/>
-          <a:p>
-            <a:pPr indent="0" marL="0">
-              <a:buNone/>
-            </a:pPr>
-            <a:r>
-              <a:rPr lang="en-US" sz="2100" b="1" dirty="0">
-                <a:solidFill>
-                  <a:srgbClr val="FFFFFF"/>
+              <a:t>The data that made </a:t>
+            </a:r>
+            <a:r>
+              <a:rPr lang="en-US" sz="2600" b="1" i="1" dirty="0" smtClean="0">
+                <a:solidFill>
+                  <a:srgbClr val="2C5F4A"/>
                 </a:solidFill>
                 <a:latin typeface="Cambria" pitchFamily="34" charset="0"/>
                 <a:ea typeface="Cambria" pitchFamily="34" charset="-122"/>
                 <a:cs typeface="Cambria" pitchFamily="34" charset="-120"/>
               </a:rPr>
-              <a:t>Enlightenment</a:t>
-            </a:r>
-            <a:endParaRPr lang="en-US" sz="2100" dirty="0"/>
-          </a:p>
-        </p:txBody>
-      </p:sp>
-      <p:sp>
-        <p:nvSpPr>
-          <p:cNvPr id="16" name="Shape 14"/>
-          <p:cNvSpPr/>
-          <p:nvPr/>
-        </p:nvSpPr>
-        <p:spPr>
-          <a:xfrm>
-            <a:off x="8915400" y="2103120"/>
-            <a:ext cx="2560320" cy="2011680"/>
-          </a:xfrm>
-          <a:prstGeom prst="roundRect">
-            <a:avLst>
-              <a:gd name="adj" fmla="val 4545"/>
-            </a:avLst>
-          </a:prstGeom>
-          <a:solidFill>
-            <a:srgbClr val="E8A317"/>
-          </a:solidFill>
-          <a:ln/>
-        </p:spPr>
-      </p:sp>
-      <p:sp>
-        <p:nvSpPr>
-          <p:cNvPr id="17" name="Shape 15"/>
-          <p:cNvSpPr/>
-          <p:nvPr/>
-        </p:nvSpPr>
-        <p:spPr>
-          <a:xfrm>
-            <a:off x="9144000" y="2331720"/>
-            <a:ext cx="502920" cy="502920"/>
-          </a:xfrm>
-          <a:prstGeom prst="ellipse">
-            <a:avLst/>
-          </a:prstGeom>
-          <a:solidFill>
-            <a:srgbClr val="12302A"/>
-          </a:solidFill>
-          <a:ln/>
-        </p:spPr>
-      </p:sp>
-      <p:sp>
-        <p:nvSpPr>
-          <p:cNvPr id="18" name="Text 16"/>
-          <p:cNvSpPr txBox="1"/>
-          <p:nvPr/>
-        </p:nvSpPr>
-        <p:spPr>
-          <a:xfrm>
-            <a:off x="9144000" y="2295144"/>
-            <a:ext cx="502920" cy="502920"/>
-          </a:xfrm>
-          <a:prstGeom prst="rect">
-            <a:avLst/>
-          </a:prstGeom>
-          <a:noFill/>
-          <a:ln/>
-        </p:spPr>
-        <p:txBody>
-          <a:bodyPr wrap="square" lIns="0" tIns="0" rIns="0" bIns="0" rtlCol="0" anchor="ctr"/>
-          <a:lstStyle/>
-          <a:p>
-            <a:pPr algn="ctr" indent="0" marL="0">
-              <a:buNone/>
-            </a:pPr>
-            <a:r>
-              <a:rPr lang="en-US" sz="1400" b="1" dirty="0">
-                <a:solidFill>
-                  <a:srgbClr val="FFFFFF"/>
+              <a:t>certain products will </a:t>
+            </a:r>
+            <a:r>
+              <a:rPr lang="en-US" sz="2600" b="1" i="1" dirty="0">
+                <a:solidFill>
+                  <a:srgbClr val="2C5F4A"/>
                 </a:solidFill>
                 <a:latin typeface="Cambria" pitchFamily="34" charset="0"/>
                 <a:ea typeface="Cambria" pitchFamily="34" charset="-122"/>
                 <a:cs typeface="Cambria" pitchFamily="34" charset="-120"/>
               </a:rPr>
-              <a:t>4</a:t>
-            </a:r>
-            <a:endParaRPr lang="en-US" sz="1400" dirty="0"/>
-          </a:p>
-        </p:txBody>
-      </p:sp>
-      <p:sp>
-        <p:nvSpPr>
-          <p:cNvPr id="19" name="Text 17"/>
-          <p:cNvSpPr txBox="1"/>
-          <p:nvPr/>
-        </p:nvSpPr>
-        <p:spPr>
-          <a:xfrm>
-            <a:off x="9098280" y="2971800"/>
-            <a:ext cx="2286000" cy="914400"/>
-          </a:xfrm>
-          <a:prstGeom prst="rect">
-            <a:avLst/>
-          </a:prstGeom>
-          <a:noFill/>
-          <a:ln/>
-        </p:spPr>
-        <p:txBody>
-          <a:bodyPr wrap="square" lIns="0" tIns="0" rIns="0" bIns="0" rtlCol="0" anchor="ctr"/>
-          <a:lstStyle/>
-          <a:p>
-            <a:pPr indent="0" marL="0">
-              <a:buNone/>
-            </a:pPr>
-            <a:r>
-              <a:rPr lang="en-US" sz="2100" b="1" dirty="0">
-                <a:solidFill>
-                  <a:srgbClr val="12302A"/>
-                </a:solidFill>
-                <a:latin typeface="Cambria" pitchFamily="34" charset="0"/>
-                <a:ea typeface="Cambria" pitchFamily="34" charset="-122"/>
-                <a:cs typeface="Cambria" pitchFamily="34" charset="-120"/>
-              </a:rPr>
-              <a:t>Wisdom</a:t>
-            </a:r>
-            <a:endParaRPr lang="en-US" sz="2100" dirty="0"/>
-          </a:p>
-        </p:txBody>
-      </p:sp>
-      <p:sp>
-        <p:nvSpPr>
-          <p:cNvPr id="20" name="Text 18"/>
-          <p:cNvSpPr txBox="1"/>
-          <p:nvPr/>
-        </p:nvSpPr>
-        <p:spPr>
-          <a:xfrm>
-            <a:off x="685800" y="4297680"/>
-            <a:ext cx="10820095" cy="457200"/>
-          </a:xfrm>
-          <a:prstGeom prst="rect">
-            <a:avLst/>
-          </a:prstGeom>
-          <a:noFill/>
-          <a:ln/>
-        </p:spPr>
-        <p:txBody>
-          <a:bodyPr wrap="square" lIns="0" tIns="0" rIns="0" bIns="0" rtlCol="0" anchor="ctr"/>
-          <a:lstStyle/>
-          <a:p>
-            <a:pPr indent="0" marL="0">
-              <a:buNone/>
-            </a:pPr>
-            <a:r>
-              <a:rPr lang="en-US" sz="2000" i="1" dirty="0">
-                <a:solidFill>
-                  <a:srgbClr val="6E7B74"/>
-                </a:solidFill>
-                <a:latin typeface="Calibri" pitchFamily="34" charset="0"/>
-                <a:ea typeface="Calibri" pitchFamily="34" charset="-122"/>
-                <a:cs typeface="Calibri" pitchFamily="34" charset="-120"/>
-              </a:rPr>
-              <a:t>Wisdom: to see what others do not see.</a:t>
-            </a:r>
-            <a:endParaRPr lang="en-US" sz="2000" dirty="0"/>
-          </a:p>
-        </p:txBody>
-      </p:sp>
-      <p:sp>
-        <p:nvSpPr>
-          <p:cNvPr id="21" name="Shape 19"/>
-          <p:cNvSpPr/>
-          <p:nvPr/>
-        </p:nvSpPr>
-        <p:spPr>
-          <a:xfrm>
-            <a:off x="685800" y="4937760"/>
-            <a:ext cx="10820095" cy="1280160"/>
-          </a:xfrm>
-          <a:prstGeom prst="roundRect">
-            <a:avLst>
-              <a:gd name="adj" fmla="val 7143"/>
-            </a:avLst>
-          </a:prstGeom>
-          <a:solidFill>
-            <a:srgbClr val="F1F3F1"/>
-          </a:solidFill>
-          <a:ln/>
-        </p:spPr>
-      </p:sp>
-      <p:sp>
-        <p:nvSpPr>
-          <p:cNvPr id="22" name="Text 20"/>
-          <p:cNvSpPr txBox="1"/>
-          <p:nvPr/>
-        </p:nvSpPr>
-        <p:spPr>
-          <a:xfrm>
-            <a:off x="1051560" y="4937760"/>
-            <a:ext cx="10088575" cy="1280160"/>
-          </a:xfrm>
-          <a:prstGeom prst="rect">
-            <a:avLst/>
-          </a:prstGeom>
-          <a:noFill/>
-          <a:ln/>
-        </p:spPr>
-        <p:txBody>
-          <a:bodyPr wrap="square" lIns="0" tIns="0" rIns="0" bIns="0" rtlCol="0" anchor="ctr"/>
-          <a:lstStyle/>
-          <a:p>
-            <a:pPr indent="0" marL="0">
-              <a:buNone/>
-            </a:pPr>
-            <a:r>
-              <a:rPr lang="en-US" sz="2400" b="1" dirty="0">
-                <a:solidFill>
-                  <a:srgbClr val="12302A"/>
-                </a:solidFill>
-                <a:latin typeface="Cambria" pitchFamily="34" charset="0"/>
-                <a:ea typeface="Cambria" pitchFamily="34" charset="-122"/>
-                <a:cs typeface="Cambria" pitchFamily="34" charset="-120"/>
-              </a:rPr>
-              <a:t>“ChatGPT, give me an idea”  →  no ownership. You cannot take it anywhere.</a:t>
-            </a:r>
-            <a:endParaRPr lang="en-US" sz="2400" dirty="0"/>
+              <a:t>never be in the public domain.</a:t>
+            </a:r>
+            <a:endParaRPr lang="en-US" sz="2600" dirty="0"/>
           </a:p>
         </p:txBody>
       </p:sp>
@@ -5637,6 +5808,7 @@
         <a:solidFill>
           <a:srgbClr val="12302A"/>
         </a:solidFill>
+        <a:effectLst/>
       </p:bgPr>
     </p:bg>
     <p:spTree>
@@ -5714,7 +5886,7 @@
           <a:bodyPr wrap="square" lIns="0" tIns="0" rIns="0" bIns="0" rtlCol="0" anchor="ctr"/>
           <a:lstStyle/>
           <a:p>
-            <a:pPr algn="ctr" indent="0" marL="0">
+            <a:pPr marL="0" indent="0" algn="ctr">
               <a:buNone/>
             </a:pPr>
             <a:r>
@@ -5753,11 +5925,10 @@
           <a:bodyPr wrap="square" lIns="0" tIns="0" rIns="0" bIns="0" rtlCol="0" anchor="ctr"/>
           <a:lstStyle/>
           <a:p>
-            <a:pPr indent="0" marL="0">
+            <a:pPr>
               <a:lnSpc>
                 <a:spcPts val="5800"/>
               </a:lnSpc>
-              <a:buNone/>
             </a:pPr>
             <a:r>
               <a:rPr lang="en-US" sz="5000" b="1" dirty="0">
@@ -5768,17 +5939,8 @@
                 <a:ea typeface="Cambria" pitchFamily="34" charset="-122"/>
                 <a:cs typeface="Cambria" pitchFamily="34" charset="-120"/>
               </a:rPr>
-              <a:t>Ownership of</a:t>
-            </a:r>
-            <a:endParaRPr lang="en-US" sz="5000" dirty="0"/>
-          </a:p>
-          <a:p>
-            <a:pPr indent="0" marL="0">
-              <a:lnSpc>
-                <a:spcPts val="5800"/>
-              </a:lnSpc>
-              <a:buNone/>
-            </a:pPr>
+              <a:t>Ownership is hard </a:t>
+            </a:r>
             <a:r>
               <a:rPr lang="en-US" sz="5000" b="1" dirty="0">
                 <a:solidFill>
@@ -5788,7 +5950,7 @@
                 <a:ea typeface="Cambria" pitchFamily="34" charset="-122"/>
                 <a:cs typeface="Cambria" pitchFamily="34" charset="-120"/>
               </a:rPr>
-              <a:t>hard work</a:t>
+              <a:t>work</a:t>
             </a:r>
             <a:endParaRPr lang="en-US" sz="5000" dirty="0"/>
           </a:p>
@@ -5815,7 +5977,7 @@
           <a:bodyPr wrap="square" lIns="0" tIns="0" rIns="0" bIns="0" rtlCol="0" anchor="ctr"/>
           <a:lstStyle/>
           <a:p>
-            <a:pPr indent="0" marL="0">
+            <a:pPr marL="0" indent="0">
               <a:buNone/>
             </a:pPr>
             <a:r>
@@ -5849,6 +6011,7 @@
         <a:solidFill>
           <a:srgbClr val="12302A"/>
         </a:solidFill>
+        <a:effectLst/>
       </p:bgPr>
     </p:bg>
     <p:spTree>
@@ -5886,11 +6049,11 @@
           <a:bodyPr wrap="square" lIns="0" tIns="0" rIns="0" bIns="0" rtlCol="0" anchor="ctr"/>
           <a:lstStyle/>
           <a:p>
-            <a:pPr indent="0" marL="0">
+            <a:pPr marL="0" indent="0">
               <a:buNone/>
             </a:pPr>
             <a:r>
-              <a:rPr lang="en-US" sz="1400" b="1" spc="250" kern="0" dirty="0">
+              <a:rPr lang="en-US" sz="1400" b="1" kern="0" spc="250" dirty="0">
                 <a:solidFill>
                   <a:srgbClr val="E8A317"/>
                 </a:solidFill>
@@ -5925,7 +6088,7 @@
           <a:bodyPr wrap="square" lIns="0" tIns="0" rIns="0" bIns="0" rtlCol="0" anchor="ctr"/>
           <a:lstStyle/>
           <a:p>
-            <a:pPr indent="0" marL="0">
+            <a:pPr marL="0" indent="0">
               <a:buNone/>
             </a:pPr>
             <a:r>
@@ -5986,7 +6149,7 @@
           <a:bodyPr wrap="square" lIns="0" tIns="0" rIns="0" bIns="0" rtlCol="0" anchor="ctr"/>
           <a:lstStyle/>
           <a:p>
-            <a:pPr indent="0" marL="0">
+            <a:pPr marL="0" indent="0">
               <a:buNone/>
             </a:pPr>
             <a:r>
@@ -6025,7 +6188,7 @@
           <a:bodyPr wrap="square" lIns="0" tIns="0" rIns="0" bIns="0" rtlCol="0" anchor="ctr"/>
           <a:lstStyle/>
           <a:p>
-            <a:pPr indent="0" marL="0">
+            <a:pPr marL="0" indent="0">
               <a:buNone/>
             </a:pPr>
             <a:r>
@@ -6086,7 +6249,7 @@
           <a:bodyPr wrap="square" lIns="0" tIns="0" rIns="0" bIns="0" rtlCol="0" anchor="ctr"/>
           <a:lstStyle/>
           <a:p>
-            <a:pPr indent="0" marL="0">
+            <a:pPr marL="0" indent="0">
               <a:buNone/>
             </a:pPr>
             <a:r>
@@ -6125,7 +6288,7 @@
           <a:bodyPr wrap="square" lIns="0" tIns="0" rIns="0" bIns="0" rtlCol="0" anchor="ctr"/>
           <a:lstStyle/>
           <a:p>
-            <a:pPr indent="0" marL="0">
+            <a:pPr marL="0" indent="0">
               <a:buNone/>
             </a:pPr>
             <a:r>
@@ -6164,7 +6327,7 @@
           <a:bodyPr wrap="square" lIns="0" tIns="0" rIns="0" bIns="0" rtlCol="0" anchor="ctr"/>
           <a:lstStyle/>
           <a:p>
-            <a:pPr indent="0" marL="0">
+            <a:pPr marL="0" indent="0">
               <a:buNone/>
             </a:pPr>
             <a:r>
@@ -6198,6 +6361,7 @@
         <a:solidFill>
           <a:srgbClr val="FFFFFF"/>
         </a:solidFill>
+        <a:effectLst/>
       </p:bgPr>
     </p:bg>
     <p:spTree>
@@ -6235,11 +6399,11 @@
           <a:bodyPr wrap="square" lIns="0" tIns="0" rIns="0" bIns="0" rtlCol="0" anchor="ctr"/>
           <a:lstStyle/>
           <a:p>
-            <a:pPr indent="0" marL="0">
+            <a:pPr marL="0" indent="0">
               <a:buNone/>
             </a:pPr>
             <a:r>
-              <a:rPr lang="en-US" sz="1400" b="1" spc="250" kern="0" dirty="0">
+              <a:rPr lang="en-US" sz="1400" b="1" kern="0" spc="250" dirty="0">
                 <a:solidFill>
                   <a:srgbClr val="2C5F4A"/>
                 </a:solidFill>
@@ -6274,7 +6438,7 @@
           <a:bodyPr wrap="square" lIns="0" tIns="0" rIns="0" bIns="0" rtlCol="0" anchor="ctr"/>
           <a:lstStyle/>
           <a:p>
-            <a:pPr indent="0" marL="0">
+            <a:pPr marL="0" indent="0">
               <a:buNone/>
             </a:pPr>
             <a:r>
@@ -6335,7 +6499,7 @@
           <a:bodyPr wrap="square" lIns="0" tIns="0" rIns="0" bIns="0" rtlCol="0" anchor="ctr"/>
           <a:lstStyle/>
           <a:p>
-            <a:pPr indent="0" marL="0">
+            <a:pPr marL="0" indent="0">
               <a:buNone/>
             </a:pPr>
             <a:r>
@@ -6514,7 +6678,7 @@
           <a:bodyPr wrap="square" lIns="0" tIns="0" rIns="0" bIns="0" rtlCol="0" anchor="ctr"/>
           <a:lstStyle/>
           <a:p>
-            <a:pPr indent="0" marL="0">
+            <a:pPr marL="0" indent="0">
               <a:buNone/>
             </a:pPr>
             <a:r>
@@ -6666,6 +6830,7 @@
         <a:solidFill>
           <a:srgbClr val="FFFFFF"/>
         </a:solidFill>
+        <a:effectLst/>
       </p:bgPr>
     </p:bg>
     <p:spTree>
@@ -6684,45 +6849,6 @@
       </p:grpSpPr>
       <p:sp>
         <p:nvSpPr>
-          <p:cNvPr id="2" name="Text 0"/>
-          <p:cNvSpPr txBox="1"/>
-          <p:nvPr/>
-        </p:nvSpPr>
-        <p:spPr>
-          <a:xfrm>
-            <a:off x="685800" y="365760"/>
-            <a:ext cx="10820095" cy="365760"/>
-          </a:xfrm>
-          <a:prstGeom prst="rect">
-            <a:avLst/>
-          </a:prstGeom>
-          <a:noFill/>
-          <a:ln/>
-        </p:spPr>
-        <p:txBody>
-          <a:bodyPr wrap="square" lIns="0" tIns="0" rIns="0" bIns="0" rtlCol="0" anchor="ctr"/>
-          <a:lstStyle/>
-          <a:p>
-            <a:pPr indent="0" marL="0">
-              <a:buNone/>
-            </a:pPr>
-            <a:r>
-              <a:rPr lang="en-US" sz="1400" b="1" spc="250" kern="0" dirty="0">
-                <a:solidFill>
-                  <a:srgbClr val="2C5F4A"/>
-                </a:solidFill>
-                <a:latin typeface="Calibri" pitchFamily="34" charset="0"/>
-                <a:ea typeface="Calibri" pitchFamily="34" charset="-122"/>
-                <a:cs typeface="Calibri" pitchFamily="34" charset="-120"/>
-              </a:rPr>
-              <a:t>GOOD MORNING</a:t>
-            </a:r>
-            <a:endParaRPr lang="en-US" sz="1400" dirty="0"/>
-          </a:p>
-        </p:txBody>
-      </p:sp>
-      <p:sp>
-        <p:nvSpPr>
           <p:cNvPr id="3" name="Text 1"/>
           <p:cNvSpPr txBox="1"/>
           <p:nvPr/>
@@ -6742,7 +6868,7 @@
           <a:bodyPr wrap="square" lIns="0" tIns="0" rIns="0" bIns="0" rtlCol="0" anchor="ctr"/>
           <a:lstStyle/>
           <a:p>
-            <a:pPr indent="0" marL="0">
+            <a:pPr marL="0" indent="0">
               <a:buNone/>
             </a:pPr>
             <a:r>
@@ -6897,7 +7023,7 @@
           <a:bodyPr wrap="square" lIns="0" tIns="0" rIns="0" bIns="0" rtlCol="0" anchor="ctr"/>
           <a:lstStyle/>
           <a:p>
-            <a:pPr indent="0" marL="0">
+            <a:pPr marL="0" indent="0">
               <a:buNone/>
             </a:pPr>
             <a:r>
@@ -6925,12 +7051,13 @@
 
 <file path=ppt/slides/slide20.xml><?xml version="1.0" encoding="utf-8"?>
 <p:sld xmlns:a="http://schemas.openxmlformats.org/drawingml/2006/main" xmlns:r="http://schemas.openxmlformats.org/officeDocument/2006/relationships" xmlns:p="http://schemas.openxmlformats.org/presentationml/2006/main">
-  <p:cSld name="Slide 20">
+  <p:cSld>
     <p:bg>
       <p:bgPr>
         <a:solidFill>
-          <a:srgbClr val="FFFFFF"/>
+          <a:srgbClr val="12302A"/>
         </a:solidFill>
+        <a:effectLst/>
       </p:bgPr>
     </p:bg>
     <p:spTree>
@@ -6949,14 +7076,54 @@
       </p:grpSpPr>
       <p:sp>
         <p:nvSpPr>
-          <p:cNvPr id="2" name="Text 0"/>
-          <p:cNvSpPr txBox="1"/>
-          <p:nvPr/>
-        </p:nvSpPr>
-        <p:spPr>
-          <a:xfrm>
-            <a:off x="685800" y="365760"/>
-            <a:ext cx="10820095" cy="365760"/>
+          <p:cNvPr id="2" name="Shape 0"/>
+          <p:cNvSpPr/>
+          <p:nvPr/>
+        </p:nvSpPr>
+        <p:spPr>
+          <a:xfrm>
+            <a:off x="-1645920" y="4023360"/>
+            <a:ext cx="4206240" cy="4206240"/>
+          </a:xfrm>
+          <a:prstGeom prst="ellipse">
+            <a:avLst/>
+          </a:prstGeom>
+          <a:solidFill>
+            <a:srgbClr val="2C5F4A"/>
+          </a:solidFill>
+          <a:ln/>
+        </p:spPr>
+      </p:sp>
+      <p:sp>
+        <p:nvSpPr>
+          <p:cNvPr id="3" name="Shape 1"/>
+          <p:cNvSpPr/>
+          <p:nvPr/>
+        </p:nvSpPr>
+        <p:spPr>
+          <a:xfrm>
+            <a:off x="9326880" y="1280160"/>
+            <a:ext cx="1463040" cy="1463040"/>
+          </a:xfrm>
+          <a:prstGeom prst="ellipse">
+            <a:avLst/>
+          </a:prstGeom>
+          <a:solidFill>
+            <a:srgbClr val="E8A317"/>
+          </a:solidFill>
+          <a:ln/>
+        </p:spPr>
+      </p:sp>
+      <p:sp>
+        <p:nvSpPr>
+          <p:cNvPr id="4" name="Text 2"/>
+          <p:cNvSpPr txBox="1"/>
+          <p:nvPr/>
+        </p:nvSpPr>
+        <p:spPr>
+          <a:xfrm>
+            <a:off x="9326880" y="1243584"/>
+            <a:ext cx="1463040" cy="1463040"/>
           </a:xfrm>
           <a:prstGeom prst="rect">
             <a:avLst/>
@@ -6968,221 +7135,117 @@
           <a:bodyPr wrap="square" lIns="0" tIns="0" rIns="0" bIns="0" rtlCol="0" anchor="ctr"/>
           <a:lstStyle/>
           <a:p>
-            <a:pPr indent="0" marL="0">
+            <a:pPr marL="0" indent="0" algn="ctr">
               <a:buNone/>
             </a:pPr>
             <a:r>
-              <a:rPr lang="en-US" sz="1400" b="1" spc="250" kern="0" dirty="0">
-                <a:solidFill>
-                  <a:srgbClr val="2C5F4A"/>
+              <a:rPr lang="en-US" sz="4200" b="1" dirty="0">
+                <a:solidFill>
+                  <a:srgbClr val="12302A"/>
+                </a:solidFill>
+                <a:latin typeface="Cambria" pitchFamily="34" charset="0"/>
+                <a:ea typeface="Cambria" pitchFamily="34" charset="-122"/>
+                <a:cs typeface="Cambria" pitchFamily="34" charset="-120"/>
+              </a:rPr>
+              <a:t>3</a:t>
+            </a:r>
+            <a:endParaRPr lang="en-US" sz="4200" dirty="0"/>
+          </a:p>
+        </p:txBody>
+      </p:sp>
+      <p:sp>
+        <p:nvSpPr>
+          <p:cNvPr id="5" name="Text 3"/>
+          <p:cNvSpPr txBox="1"/>
+          <p:nvPr/>
+        </p:nvSpPr>
+        <p:spPr>
+          <a:xfrm>
+            <a:off x="1005840" y="2103120"/>
+            <a:ext cx="7863840" cy="2103120"/>
+          </a:xfrm>
+          <a:prstGeom prst="rect">
+            <a:avLst/>
+          </a:prstGeom>
+          <a:noFill/>
+          <a:ln/>
+        </p:spPr>
+        <p:txBody>
+          <a:bodyPr wrap="square" lIns="0" tIns="0" rIns="0" bIns="0" rtlCol="0" anchor="ctr"/>
+          <a:lstStyle/>
+          <a:p>
+            <a:pPr>
+              <a:lnSpc>
+                <a:spcPts val="5800"/>
+              </a:lnSpc>
+            </a:pPr>
+            <a:r>
+              <a:rPr lang="en-US" sz="5000" b="1" dirty="0">
+                <a:solidFill>
+                  <a:srgbClr val="FFFFFF"/>
+                </a:solidFill>
+                <a:latin typeface="Cambria" pitchFamily="34" charset="0"/>
+                <a:ea typeface="Cambria" pitchFamily="34" charset="-122"/>
+                <a:cs typeface="Cambria" pitchFamily="34" charset="-120"/>
+              </a:rPr>
+              <a:t>Ownership </a:t>
+            </a:r>
+            <a:r>
+              <a:rPr lang="en-US" sz="5000" b="1" dirty="0" smtClean="0">
+                <a:solidFill>
+                  <a:srgbClr val="FFFFFF"/>
+                </a:solidFill>
+                <a:latin typeface="Cambria" pitchFamily="34" charset="0"/>
+                <a:ea typeface="Cambria" pitchFamily="34" charset="-122"/>
+                <a:cs typeface="Cambria" pitchFamily="34" charset="-120"/>
+              </a:rPr>
+              <a:t>is Empathy</a:t>
+            </a:r>
+            <a:endParaRPr lang="en-US" sz="5000" dirty="0"/>
+          </a:p>
+        </p:txBody>
+      </p:sp>
+      <p:sp>
+        <p:nvSpPr>
+          <p:cNvPr id="6" name="Text 4"/>
+          <p:cNvSpPr txBox="1"/>
+          <p:nvPr/>
+        </p:nvSpPr>
+        <p:spPr>
+          <a:xfrm>
+            <a:off x="1005840" y="4343400"/>
+            <a:ext cx="8229600" cy="731520"/>
+          </a:xfrm>
+          <a:prstGeom prst="rect">
+            <a:avLst/>
+          </a:prstGeom>
+          <a:noFill/>
+          <a:ln/>
+        </p:spPr>
+        <p:txBody>
+          <a:bodyPr wrap="square" lIns="0" tIns="0" rIns="0" bIns="0" rtlCol="0" anchor="ctr"/>
+          <a:lstStyle/>
+          <a:p>
+            <a:r>
+              <a:rPr lang="en-US" sz="2200" i="1" dirty="0">
+                <a:solidFill>
+                  <a:srgbClr val="E8A317"/>
                 </a:solidFill>
                 <a:latin typeface="Calibri" pitchFamily="34" charset="0"/>
                 <a:ea typeface="Calibri" pitchFamily="34" charset="-122"/>
                 <a:cs typeface="Calibri" pitchFamily="34" charset="-120"/>
               </a:rPr>
-              <a:t>LET ME BE PRACTICAL</a:t>
-            </a:r>
-            <a:endParaRPr lang="en-US" sz="1400" dirty="0"/>
-          </a:p>
-        </p:txBody>
-      </p:sp>
-      <p:sp>
-        <p:nvSpPr>
-          <p:cNvPr id="3" name="Text 1"/>
-          <p:cNvSpPr txBox="1"/>
-          <p:nvPr/>
-        </p:nvSpPr>
-        <p:spPr>
-          <a:xfrm>
-            <a:off x="685800" y="777240"/>
-            <a:ext cx="10820095" cy="1097280"/>
-          </a:xfrm>
-          <a:prstGeom prst="rect">
-            <a:avLst/>
-          </a:prstGeom>
-          <a:noFill/>
-          <a:ln/>
-        </p:spPr>
-        <p:txBody>
-          <a:bodyPr wrap="square" lIns="0" tIns="0" rIns="0" bIns="0" rtlCol="0" anchor="ctr"/>
-          <a:lstStyle/>
-          <a:p>
-            <a:pPr indent="0" marL="0">
-              <a:buNone/>
-            </a:pPr>
-            <a:r>
-              <a:rPr lang="en-US" sz="4000" b="1" dirty="0">
-                <a:solidFill>
-                  <a:srgbClr val="12302A"/>
-                </a:solidFill>
-                <a:latin typeface="Cambria" pitchFamily="34" charset="0"/>
-                <a:ea typeface="Cambria" pitchFamily="34" charset="-122"/>
-                <a:cs typeface="Cambria" pitchFamily="34" charset="-120"/>
-              </a:rPr>
-              <a:t>AI cannot replace you. It can support you.</a:t>
-            </a:r>
-            <a:endParaRPr lang="en-US" sz="4000" dirty="0"/>
-          </a:p>
-        </p:txBody>
-      </p:sp>
-      <p:sp>
-        <p:nvSpPr>
-          <p:cNvPr id="4" name="Text 2"/>
-          <p:cNvSpPr txBox="1"/>
-          <p:nvPr/>
-        </p:nvSpPr>
-        <p:spPr>
-          <a:xfrm>
-            <a:off x="685800" y="2103120"/>
-            <a:ext cx="10820095" cy="3931920"/>
-          </a:xfrm>
-          <a:prstGeom prst="rect">
-            <a:avLst/>
-          </a:prstGeom>
-          <a:noFill/>
-          <a:ln/>
-        </p:spPr>
-        <p:txBody>
-          <a:bodyPr wrap="square" lIns="0" tIns="0" rIns="0" bIns="0" rtlCol="0" anchor="t"/>
-          <a:lstStyle/>
-          <a:p>
-            <a:pPr marL="457200" indent="-457200">
-              <a:lnSpc>
-                <a:spcPts val="3600"/>
-              </a:lnSpc>
-              <a:spcAft>
-                <a:spcPts val="1400"/>
-              </a:spcAft>
-              <a:buSzPct val="100000"/>
-              <a:buChar char="•"/>
-            </a:pPr>
-            <a:r>
-              <a:rPr lang="en-US" sz="2600" dirty="0">
-                <a:solidFill>
-                  <a:srgbClr val="1B211E"/>
-                </a:solidFill>
-                <a:latin typeface="Calibri" pitchFamily="34" charset="0"/>
-                <a:ea typeface="Calibri" pitchFamily="34" charset="-122"/>
-                <a:cs typeface="Calibri" pitchFamily="34" charset="-120"/>
-              </a:rPr>
-              <a:t>Walk in the park — talk your ideas to an AI, then ask it to summarise</a:t>
-            </a:r>
-            <a:endParaRPr lang="en-US" sz="2600" dirty="0"/>
-          </a:p>
-          <a:p>
-            <a:pPr marL="457200" indent="-457200">
-              <a:lnSpc>
-                <a:spcPts val="3600"/>
-              </a:lnSpc>
-              <a:spcAft>
-                <a:spcPts val="1400"/>
-              </a:spcAft>
-              <a:buSzPct val="100000"/>
-              <a:buChar char="•"/>
-            </a:pPr>
-            <a:r>
-              <a:rPr lang="en-US" sz="2600" dirty="0">
-                <a:solidFill>
-                  <a:srgbClr val="1B211E"/>
-                </a:solidFill>
-                <a:latin typeface="Calibri" pitchFamily="34" charset="0"/>
-                <a:ea typeface="Calibri" pitchFamily="34" charset="-122"/>
-                <a:cs typeface="Calibri" pitchFamily="34" charset="-120"/>
-              </a:rPr>
-              <a:t>Preparing a pitch? Ask: “What have I not covered?”</a:t>
-            </a:r>
-            <a:endParaRPr lang="en-US" sz="2600" dirty="0"/>
-          </a:p>
-          <a:p>
-            <a:pPr marL="457200" indent="-457200">
-              <a:lnSpc>
-                <a:spcPts val="3600"/>
-              </a:lnSpc>
-              <a:spcAft>
-                <a:spcPts val="1400"/>
-              </a:spcAft>
-              <a:buSzPct val="100000"/>
-              <a:buChar char="•"/>
-            </a:pPr>
-            <a:r>
-              <a:rPr lang="en-US" sz="2600" dirty="0">
-                <a:solidFill>
-                  <a:srgbClr val="1B211E"/>
-                </a:solidFill>
-                <a:latin typeface="Calibri" pitchFamily="34" charset="0"/>
-                <a:ea typeface="Calibri" pitchFamily="34" charset="-122"/>
-                <a:cs typeface="Calibri" pitchFamily="34" charset="-120"/>
-              </a:rPr>
-              <a:t>In a meeting? Let your AI assistant take the notes</a:t>
-            </a:r>
-            <a:endParaRPr lang="en-US" sz="2600" dirty="0"/>
-          </a:p>
-          <a:p>
-            <a:pPr marL="457200" indent="-457200">
-              <a:lnSpc>
-                <a:spcPts val="3600"/>
-              </a:lnSpc>
-              <a:spcAft>
-                <a:spcPts val="1400"/>
-              </a:spcAft>
-              <a:buSzPct val="100000"/>
-              <a:buChar char="•"/>
-            </a:pPr>
-            <a:r>
-              <a:rPr lang="en-US" sz="2600" dirty="0">
-                <a:solidFill>
-                  <a:srgbClr val="1B211E"/>
-                </a:solidFill>
-                <a:latin typeface="Calibri" pitchFamily="34" charset="0"/>
-                <a:ea typeface="Calibri" pitchFamily="34" charset="-122"/>
-                <a:cs typeface="Calibri" pitchFamily="34" charset="-120"/>
-              </a:rPr>
-              <a:t>Need a second opinion, privately? Talk to the AI</a:t>
-            </a:r>
-            <a:endParaRPr lang="en-US" sz="2600" dirty="0"/>
-          </a:p>
-        </p:txBody>
-      </p:sp>
-      <p:sp>
-        <p:nvSpPr>
-          <p:cNvPr id="5" name="Text 3"/>
-          <p:cNvSpPr txBox="1"/>
-          <p:nvPr/>
-        </p:nvSpPr>
-        <p:spPr>
-          <a:xfrm>
-            <a:off x="685800" y="5577840"/>
-            <a:ext cx="10820095" cy="731520"/>
-          </a:xfrm>
-          <a:prstGeom prst="rect">
-            <a:avLst/>
-          </a:prstGeom>
-          <a:noFill/>
-          <a:ln/>
-        </p:spPr>
-        <p:txBody>
-          <a:bodyPr wrap="square" lIns="0" tIns="0" rIns="0" bIns="0" rtlCol="0" anchor="ctr"/>
-          <a:lstStyle/>
-          <a:p>
-            <a:pPr indent="0" marL="0">
-              <a:buNone/>
-            </a:pPr>
-            <a:r>
-              <a:rPr lang="en-US" sz="3000" b="1" i="1" dirty="0">
-                <a:solidFill>
-                  <a:srgbClr val="2C5F4A"/>
-                </a:solidFill>
-                <a:latin typeface="Cambria" pitchFamily="34" charset="0"/>
-                <a:ea typeface="Cambria" pitchFamily="34" charset="-122"/>
-                <a:cs typeface="Cambria" pitchFamily="34" charset="-120"/>
-              </a:rPr>
-              <a:t>Digitalise every step of your progress.</a:t>
-            </a:r>
-            <a:endParaRPr lang="en-US" sz="3000" dirty="0"/>
+              <a:t> and applying Emotional Intelligence</a:t>
+            </a:r>
           </a:p>
         </p:txBody>
       </p:sp>
     </p:spTree>
+    <p:extLst>
+      <p:ext uri="{BB962C8B-B14F-4D97-AF65-F5344CB8AC3E}">
+        <p14:creationId xmlns:p14="http://schemas.microsoft.com/office/powerpoint/2010/main" val="4126719763"/>
+      </p:ext>
+    </p:extLst>
   </p:cSld>
   <p:clrMapOvr>
     <a:masterClrMapping/>
@@ -7192,12 +7255,13 @@
 
 <file path=ppt/slides/slide21.xml><?xml version="1.0" encoding="utf-8"?>
 <p:sld xmlns:a="http://schemas.openxmlformats.org/drawingml/2006/main" xmlns:r="http://schemas.openxmlformats.org/officeDocument/2006/relationships" xmlns:p="http://schemas.openxmlformats.org/presentationml/2006/main">
-  <p:cSld name="Slide 21">
+  <p:cSld>
     <p:bg>
       <p:bgPr>
         <a:solidFill>
           <a:srgbClr val="12302A"/>
         </a:solidFill>
+        <a:effectLst/>
       </p:bgPr>
     </p:bg>
     <p:spTree>
@@ -7222,8 +7286,8 @@
         </p:nvSpPr>
         <p:spPr>
           <a:xfrm>
-            <a:off x="9326880" y="3840480"/>
-            <a:ext cx="4572000" cy="4572000"/>
+            <a:off x="-1645920" y="4023360"/>
+            <a:ext cx="4206240" cy="4206240"/>
           </a:xfrm>
           <a:prstGeom prst="ellipse">
             <a:avLst/>
@@ -7236,14 +7300,34 @@
       </p:sp>
       <p:sp>
         <p:nvSpPr>
-          <p:cNvPr id="3" name="Text 1"/>
-          <p:cNvSpPr txBox="1"/>
-          <p:nvPr/>
-        </p:nvSpPr>
-        <p:spPr>
-          <a:xfrm>
-            <a:off x="685800" y="365760"/>
-            <a:ext cx="10820095" cy="365760"/>
+          <p:cNvPr id="3" name="Shape 1"/>
+          <p:cNvSpPr/>
+          <p:nvPr/>
+        </p:nvSpPr>
+        <p:spPr>
+          <a:xfrm>
+            <a:off x="9326880" y="1280160"/>
+            <a:ext cx="1463040" cy="1463040"/>
+          </a:xfrm>
+          <a:prstGeom prst="ellipse">
+            <a:avLst/>
+          </a:prstGeom>
+          <a:solidFill>
+            <a:srgbClr val="E8A317"/>
+          </a:solidFill>
+          <a:ln/>
+        </p:spPr>
+      </p:sp>
+      <p:sp>
+        <p:nvSpPr>
+          <p:cNvPr id="4" name="Text 2"/>
+          <p:cNvSpPr txBox="1"/>
+          <p:nvPr/>
+        </p:nvSpPr>
+        <p:spPr>
+          <a:xfrm>
+            <a:off x="9326880" y="1243584"/>
+            <a:ext cx="1463040" cy="1463040"/>
           </a:xfrm>
           <a:prstGeom prst="rect">
             <a:avLst/>
@@ -7255,11 +7339,102 @@
           <a:bodyPr wrap="square" lIns="0" tIns="0" rIns="0" bIns="0" rtlCol="0" anchor="ctr"/>
           <a:lstStyle/>
           <a:p>
-            <a:pPr indent="0" marL="0">
+            <a:pPr marL="0" indent="0" algn="ctr">
               <a:buNone/>
             </a:pPr>
             <a:r>
-              <a:rPr lang="en-US" sz="1400" b="1" spc="250" kern="0" dirty="0">
+              <a:rPr lang="en-US" sz="4200" b="1" dirty="0">
+                <a:solidFill>
+                  <a:srgbClr val="12302A"/>
+                </a:solidFill>
+                <a:latin typeface="Cambria" pitchFamily="34" charset="0"/>
+                <a:ea typeface="Cambria" pitchFamily="34" charset="-122"/>
+                <a:cs typeface="Cambria" pitchFamily="34" charset="-120"/>
+              </a:rPr>
+              <a:t>3</a:t>
+            </a:r>
+            <a:endParaRPr lang="en-US" sz="4200" dirty="0"/>
+          </a:p>
+        </p:txBody>
+      </p:sp>
+      <p:sp>
+        <p:nvSpPr>
+          <p:cNvPr id="5" name="Text 3"/>
+          <p:cNvSpPr txBox="1"/>
+          <p:nvPr/>
+        </p:nvSpPr>
+        <p:spPr>
+          <a:xfrm>
+            <a:off x="1005840" y="2103120"/>
+            <a:ext cx="7863840" cy="2103120"/>
+          </a:xfrm>
+          <a:prstGeom prst="rect">
+            <a:avLst/>
+          </a:prstGeom>
+          <a:noFill/>
+          <a:ln/>
+        </p:spPr>
+        <p:txBody>
+          <a:bodyPr wrap="square" lIns="0" tIns="0" rIns="0" bIns="0" rtlCol="0" anchor="ctr"/>
+          <a:lstStyle/>
+          <a:p>
+            <a:pPr>
+              <a:lnSpc>
+                <a:spcPts val="5800"/>
+              </a:lnSpc>
+            </a:pPr>
+            <a:r>
+              <a:rPr lang="en-US" sz="5000" b="1" dirty="0">
+                <a:solidFill>
+                  <a:srgbClr val="FFFFFF"/>
+                </a:solidFill>
+                <a:latin typeface="Cambria" pitchFamily="34" charset="0"/>
+                <a:ea typeface="Cambria" pitchFamily="34" charset="-122"/>
+                <a:cs typeface="Cambria" pitchFamily="34" charset="-120"/>
+              </a:rPr>
+              <a:t>Ownership </a:t>
+            </a:r>
+            <a:r>
+              <a:rPr lang="en-US" sz="5000" b="1" dirty="0" smtClean="0">
+                <a:solidFill>
+                  <a:srgbClr val="FFFFFF"/>
+                </a:solidFill>
+                <a:latin typeface="Cambria" pitchFamily="34" charset="0"/>
+                <a:ea typeface="Cambria" pitchFamily="34" charset="-122"/>
+                <a:cs typeface="Cambria" pitchFamily="34" charset="-120"/>
+              </a:rPr>
+              <a:t>is making sacrifices</a:t>
+            </a:r>
+            <a:endParaRPr lang="en-US" sz="5000" dirty="0"/>
+          </a:p>
+        </p:txBody>
+      </p:sp>
+      <p:sp>
+        <p:nvSpPr>
+          <p:cNvPr id="6" name="Text 4"/>
+          <p:cNvSpPr txBox="1"/>
+          <p:nvPr/>
+        </p:nvSpPr>
+        <p:spPr>
+          <a:xfrm>
+            <a:off x="1005840" y="4343400"/>
+            <a:ext cx="8229600" cy="731520"/>
+          </a:xfrm>
+          <a:prstGeom prst="rect">
+            <a:avLst/>
+          </a:prstGeom>
+          <a:noFill/>
+          <a:ln/>
+        </p:spPr>
+        <p:txBody>
+          <a:bodyPr wrap="square" lIns="0" tIns="0" rIns="0" bIns="0" rtlCol="0" anchor="ctr"/>
+          <a:lstStyle/>
+          <a:p>
+            <a:pPr marL="0" indent="0">
+              <a:buNone/>
+            </a:pPr>
+            <a:r>
+              <a:rPr lang="en-US" sz="2200" i="1" dirty="0" smtClean="0">
                 <a:solidFill>
                   <a:srgbClr val="E8A317"/>
                 </a:solidFill>
@@ -7267,185 +7442,18 @@
                 <a:ea typeface="Calibri" pitchFamily="34" charset="-122"/>
                 <a:cs typeface="Calibri" pitchFamily="34" charset="-120"/>
               </a:rPr>
-              <a:t>LET ME ASK YOU</a:t>
-            </a:r>
-            <a:endParaRPr lang="en-US" sz="1400" dirty="0"/>
-          </a:p>
-        </p:txBody>
-      </p:sp>
-      <p:sp>
-        <p:nvSpPr>
-          <p:cNvPr id="4" name="Text 2"/>
-          <p:cNvSpPr txBox="1"/>
-          <p:nvPr/>
-        </p:nvSpPr>
-        <p:spPr>
-          <a:xfrm>
-            <a:off x="685800" y="777240"/>
-            <a:ext cx="8686800" cy="1097280"/>
-          </a:xfrm>
-          <a:prstGeom prst="rect">
-            <a:avLst/>
-          </a:prstGeom>
-          <a:noFill/>
-          <a:ln/>
-        </p:spPr>
-        <p:txBody>
-          <a:bodyPr wrap="square" lIns="0" tIns="0" rIns="0" bIns="0" rtlCol="0" anchor="ctr"/>
-          <a:lstStyle/>
-          <a:p>
-            <a:pPr indent="0" marL="0">
-              <a:buNone/>
-            </a:pPr>
-            <a:r>
-              <a:rPr lang="en-US" sz="4600" b="1" dirty="0">
-                <a:solidFill>
-                  <a:srgbClr val="FFFFFF"/>
-                </a:solidFill>
-                <a:latin typeface="Cambria" pitchFamily="34" charset="0"/>
-                <a:ea typeface="Cambria" pitchFamily="34" charset="-122"/>
-                <a:cs typeface="Cambria" pitchFamily="34" charset="-120"/>
-              </a:rPr>
-              <a:t>Ten years from now, where will you be?</a:t>
-            </a:r>
-            <a:endParaRPr lang="en-US" sz="4600" dirty="0"/>
-          </a:p>
-        </p:txBody>
-      </p:sp>
-      <p:sp>
-        <p:nvSpPr>
-          <p:cNvPr id="5" name="Text 3"/>
-          <p:cNvSpPr txBox="1"/>
-          <p:nvPr/>
-        </p:nvSpPr>
-        <p:spPr>
-          <a:xfrm>
-            <a:off x="685800" y="2286000"/>
-            <a:ext cx="8686800" cy="3931920"/>
-          </a:xfrm>
-          <a:prstGeom prst="rect">
-            <a:avLst/>
-          </a:prstGeom>
-          <a:noFill/>
-          <a:ln/>
-        </p:spPr>
-        <p:txBody>
-          <a:bodyPr wrap="square" lIns="0" tIns="0" rIns="0" bIns="0" rtlCol="0" anchor="t"/>
-          <a:lstStyle/>
-          <a:p>
-            <a:pPr marL="457200" indent="-457200">
-              <a:lnSpc>
-                <a:spcPts val="3800"/>
-              </a:lnSpc>
-              <a:spcAft>
-                <a:spcPts val="1800"/>
-              </a:spcAft>
-              <a:buSzPct val="100000"/>
-              <a:buChar char="•"/>
-            </a:pPr>
-            <a:r>
-              <a:rPr lang="en-US" sz="2800" dirty="0">
-                <a:solidFill>
-                  <a:srgbClr val="C9D8CF"/>
-                </a:solidFill>
-                <a:latin typeface="Calibri" pitchFamily="34" charset="0"/>
-                <a:ea typeface="Calibri" pitchFamily="34" charset="-122"/>
-                <a:cs typeface="Calibri" pitchFamily="34" charset="-120"/>
-              </a:rPr>
-              <a:t>Building something your company is proud of?</a:t>
-            </a:r>
-            <a:endParaRPr lang="en-US" sz="2800" dirty="0"/>
-          </a:p>
-          <a:p>
-            <a:pPr marL="457200" indent="-457200">
-              <a:lnSpc>
-                <a:spcPts val="3800"/>
-              </a:lnSpc>
-              <a:spcAft>
-                <a:spcPts val="1800"/>
-              </a:spcAft>
-              <a:buSzPct val="100000"/>
-              <a:buChar char="•"/>
-            </a:pPr>
-            <a:r>
-              <a:rPr lang="en-US" sz="2800" dirty="0">
-                <a:solidFill>
-                  <a:srgbClr val="C9D8CF"/>
-                </a:solidFill>
-                <a:latin typeface="Calibri" pitchFamily="34" charset="0"/>
-                <a:ea typeface="Calibri" pitchFamily="34" charset="-122"/>
-                <a:cs typeface="Calibri" pitchFamily="34" charset="-120"/>
-              </a:rPr>
-              <a:t>Building something nations thank God for?</a:t>
-            </a:r>
-            <a:endParaRPr lang="en-US" sz="2800" dirty="0"/>
-          </a:p>
-          <a:p>
-            <a:pPr marL="457200" indent="-457200">
-              <a:lnSpc>
-                <a:spcPts val="3800"/>
-              </a:lnSpc>
-              <a:spcAft>
-                <a:spcPts val="1800"/>
-              </a:spcAft>
-              <a:buSzPct val="100000"/>
-              <a:buChar char="•"/>
-            </a:pPr>
-            <a:r>
-              <a:rPr lang="en-US" sz="2800" dirty="0">
-                <a:solidFill>
-                  <a:srgbClr val="C9D8CF"/>
-                </a:solidFill>
-                <a:latin typeface="Calibri" pitchFamily="34" charset="0"/>
-                <a:ea typeface="Calibri" pitchFamily="34" charset="-122"/>
-                <a:cs typeface="Calibri" pitchFamily="34" charset="-120"/>
-              </a:rPr>
-              <a:t>Building something of national impact?</a:t>
-            </a:r>
-            <a:endParaRPr lang="en-US" sz="2800" dirty="0"/>
-          </a:p>
-        </p:txBody>
-      </p:sp>
-      <p:sp>
-        <p:nvSpPr>
-          <p:cNvPr id="6" name="Text 4"/>
-          <p:cNvSpPr txBox="1"/>
-          <p:nvPr/>
-        </p:nvSpPr>
-        <p:spPr>
-          <a:xfrm>
-            <a:off x="685800" y="5212080"/>
-            <a:ext cx="8686800" cy="914400"/>
-          </a:xfrm>
-          <a:prstGeom prst="rect">
-            <a:avLst/>
-          </a:prstGeom>
-          <a:noFill/>
-          <a:ln/>
-        </p:spPr>
-        <p:txBody>
-          <a:bodyPr wrap="square" lIns="0" tIns="0" rIns="0" bIns="0" rtlCol="0" anchor="ctr"/>
-          <a:lstStyle/>
-          <a:p>
-            <a:pPr indent="0" marL="0">
-              <a:buNone/>
-            </a:pPr>
-            <a:r>
-              <a:rPr lang="en-US" sz="3000" b="1" i="1" dirty="0">
-                <a:solidFill>
-                  <a:srgbClr val="E8A317"/>
-                </a:solidFill>
-                <a:latin typeface="Cambria" pitchFamily="34" charset="0"/>
-                <a:ea typeface="Cambria" pitchFamily="34" charset="-122"/>
-                <a:cs typeface="Cambria" pitchFamily="34" charset="-120"/>
-              </a:rPr>
-              <a:t>Let the answer be yes. But it takes YOU to do it.</a:t>
-            </a:r>
-            <a:endParaRPr lang="en-US" sz="3000" dirty="0"/>
+              <a:t>Some Rules inhibit</a:t>
+            </a:r>
+            <a:endParaRPr lang="en-US" sz="2200" dirty="0"/>
           </a:p>
         </p:txBody>
       </p:sp>
     </p:spTree>
+    <p:extLst>
+      <p:ext uri="{BB962C8B-B14F-4D97-AF65-F5344CB8AC3E}">
+        <p14:creationId xmlns:p14="http://schemas.microsoft.com/office/powerpoint/2010/main" val="4053514811"/>
+      </p:ext>
+    </p:extLst>
   </p:cSld>
   <p:clrMapOvr>
     <a:masterClrMapping/>
@@ -7455,12 +7463,13 @@
 
 <file path=ppt/slides/slide22.xml><?xml version="1.0" encoding="utf-8"?>
 <p:sld xmlns:a="http://schemas.openxmlformats.org/drawingml/2006/main" xmlns:r="http://schemas.openxmlformats.org/officeDocument/2006/relationships" xmlns:p="http://schemas.openxmlformats.org/presentationml/2006/main">
-  <p:cSld name="Slide 22">
+  <p:cSld name="Slide 20">
     <p:bg>
       <p:bgPr>
         <a:solidFill>
-          <a:srgbClr val="12302A"/>
+          <a:srgbClr val="FFFFFF"/>
         </a:solidFill>
+        <a:effectLst/>
       </p:bgPr>
     </p:bg>
     <p:spTree>
@@ -7479,27 +7488,7 @@
       </p:grpSpPr>
       <p:sp>
         <p:nvSpPr>
-          <p:cNvPr id="2" name="Shape 0"/>
-          <p:cNvSpPr/>
-          <p:nvPr/>
-        </p:nvSpPr>
-        <p:spPr>
-          <a:xfrm>
-            <a:off x="-1828800" y="3840480"/>
-            <a:ext cx="4754880" cy="4754880"/>
-          </a:xfrm>
-          <a:prstGeom prst="ellipse">
-            <a:avLst/>
-          </a:prstGeom>
-          <a:solidFill>
-            <a:srgbClr val="2C5F4A"/>
-          </a:solidFill>
-          <a:ln/>
-        </p:spPr>
-      </p:sp>
-      <p:sp>
-        <p:nvSpPr>
-          <p:cNvPr id="3" name="Text 1"/>
+          <p:cNvPr id="2" name="Text 0"/>
           <p:cNvSpPr txBox="1"/>
           <p:nvPr/>
         </p:nvSpPr>
@@ -7518,19 +7507,19 @@
           <a:bodyPr wrap="square" lIns="0" tIns="0" rIns="0" bIns="0" rtlCol="0" anchor="ctr"/>
           <a:lstStyle/>
           <a:p>
-            <a:pPr indent="0" marL="0">
+            <a:pPr marL="0" indent="0">
               <a:buNone/>
             </a:pPr>
             <a:r>
-              <a:rPr lang="en-US" sz="1400" b="1" spc="250" kern="0" dirty="0">
-                <a:solidFill>
-                  <a:srgbClr val="E8A317"/>
+              <a:rPr lang="en-US" sz="1400" b="1" kern="0" spc="250" dirty="0">
+                <a:solidFill>
+                  <a:srgbClr val="2C5F4A"/>
                 </a:solidFill>
                 <a:latin typeface="Calibri" pitchFamily="34" charset="0"/>
                 <a:ea typeface="Calibri" pitchFamily="34" charset="-122"/>
                 <a:cs typeface="Calibri" pitchFamily="34" charset="-120"/>
               </a:rPr>
-              <a:t>MY CLOSING REMARK</a:t>
+              <a:t>LET ME BE PRACTICAL</a:t>
             </a:r>
             <a:endParaRPr lang="en-US" sz="1400" dirty="0"/>
           </a:p>
@@ -7538,169 +7527,193 @@
       </p:sp>
       <p:sp>
         <p:nvSpPr>
+          <p:cNvPr id="3" name="Text 1"/>
+          <p:cNvSpPr txBox="1"/>
+          <p:nvPr/>
+        </p:nvSpPr>
+        <p:spPr>
+          <a:xfrm>
+            <a:off x="685800" y="777240"/>
+            <a:ext cx="10820095" cy="1097280"/>
+          </a:xfrm>
+          <a:prstGeom prst="rect">
+            <a:avLst/>
+          </a:prstGeom>
+          <a:noFill/>
+          <a:ln/>
+        </p:spPr>
+        <p:txBody>
+          <a:bodyPr wrap="square" lIns="0" tIns="0" rIns="0" bIns="0" rtlCol="0" anchor="ctr"/>
+          <a:lstStyle/>
+          <a:p>
+            <a:pPr marL="0" indent="0">
+              <a:buNone/>
+            </a:pPr>
+            <a:r>
+              <a:rPr lang="en-US" sz="4000" b="1" dirty="0">
+                <a:solidFill>
+                  <a:srgbClr val="12302A"/>
+                </a:solidFill>
+                <a:latin typeface="Cambria" pitchFamily="34" charset="0"/>
+                <a:ea typeface="Cambria" pitchFamily="34" charset="-122"/>
+                <a:cs typeface="Cambria" pitchFamily="34" charset="-120"/>
+              </a:rPr>
+              <a:t>AI cannot replace you. It can </a:t>
+            </a:r>
+            <a:r>
+              <a:rPr lang="en-US" sz="4000" b="1" dirty="0" smtClean="0">
+                <a:solidFill>
+                  <a:srgbClr val="12302A"/>
+                </a:solidFill>
+                <a:latin typeface="Cambria" pitchFamily="34" charset="0"/>
+                <a:ea typeface="Cambria" pitchFamily="34" charset="-122"/>
+                <a:cs typeface="Cambria" pitchFamily="34" charset="-120"/>
+              </a:rPr>
+              <a:t>only support </a:t>
+            </a:r>
+            <a:r>
+              <a:rPr lang="en-US" sz="4000" b="1" dirty="0">
+                <a:solidFill>
+                  <a:srgbClr val="12302A"/>
+                </a:solidFill>
+                <a:latin typeface="Cambria" pitchFamily="34" charset="0"/>
+                <a:ea typeface="Cambria" pitchFamily="34" charset="-122"/>
+                <a:cs typeface="Cambria" pitchFamily="34" charset="-120"/>
+              </a:rPr>
+              <a:t>you.</a:t>
+            </a:r>
+            <a:endParaRPr lang="en-US" sz="4000" dirty="0"/>
+          </a:p>
+        </p:txBody>
+      </p:sp>
+      <p:sp>
+        <p:nvSpPr>
           <p:cNvPr id="4" name="Text 2"/>
           <p:cNvSpPr txBox="1"/>
           <p:nvPr/>
         </p:nvSpPr>
         <p:spPr>
           <a:xfrm>
-            <a:off x="685800" y="1188720"/>
-            <a:ext cx="10820095" cy="640080"/>
-          </a:xfrm>
-          <a:prstGeom prst="rect">
-            <a:avLst/>
-          </a:prstGeom>
-          <a:noFill/>
-          <a:ln/>
-        </p:spPr>
-        <p:txBody>
-          <a:bodyPr wrap="square" lIns="0" tIns="0" rIns="0" bIns="0" rtlCol="0" anchor="ctr"/>
-          <a:lstStyle/>
-          <a:p>
-            <a:pPr indent="0" marL="0">
-              <a:buNone/>
-            </a:pPr>
-            <a:r>
-              <a:rPr lang="en-US" sz="2600" i="1" dirty="0">
-                <a:solidFill>
-                  <a:srgbClr val="C9D8CF"/>
+            <a:off x="685800" y="2103120"/>
+            <a:ext cx="10820095" cy="3931920"/>
+          </a:xfrm>
+          <a:prstGeom prst="rect">
+            <a:avLst/>
+          </a:prstGeom>
+          <a:noFill/>
+          <a:ln/>
+        </p:spPr>
+        <p:txBody>
+          <a:bodyPr wrap="square" lIns="0" tIns="0" rIns="0" bIns="0" rtlCol="0" anchor="t"/>
+          <a:lstStyle/>
+          <a:p>
+            <a:pPr marL="457200" indent="-457200">
+              <a:lnSpc>
+                <a:spcPts val="3600"/>
+              </a:lnSpc>
+              <a:spcAft>
+                <a:spcPts val="1400"/>
+              </a:spcAft>
+              <a:buSzPct val="100000"/>
+              <a:buChar char="•"/>
+            </a:pPr>
+            <a:r>
+              <a:rPr lang="en-US" sz="2600" dirty="0">
+                <a:solidFill>
+                  <a:srgbClr val="1B211E"/>
                 </a:solidFill>
                 <a:latin typeface="Calibri" pitchFamily="34" charset="0"/>
                 <a:ea typeface="Calibri" pitchFamily="34" charset="-122"/>
                 <a:cs typeface="Calibri" pitchFamily="34" charset="-120"/>
               </a:rPr>
-              <a:t>Do not transfer to AI:</a:t>
+              <a:t>Walk in the park — talk your ideas to an AI, then ask it to summarise</a:t>
             </a:r>
             <a:endParaRPr lang="en-US" sz="2600" dirty="0"/>
           </a:p>
-        </p:txBody>
-      </p:sp>
-      <p:sp>
-        <p:nvSpPr>
-          <p:cNvPr id="5" name="Text 3"/>
-          <p:cNvSpPr txBox="1"/>
-          <p:nvPr/>
-        </p:nvSpPr>
-        <p:spPr>
-          <a:xfrm>
-            <a:off x="685800" y="1920240"/>
-            <a:ext cx="10820095" cy="2377440"/>
-          </a:xfrm>
-          <a:prstGeom prst="rect">
-            <a:avLst/>
-          </a:prstGeom>
-          <a:noFill/>
-          <a:ln/>
-        </p:spPr>
-        <p:txBody>
-          <a:bodyPr wrap="square" lIns="0" tIns="0" rIns="0" bIns="0" rtlCol="0" anchor="t"/>
-          <a:lstStyle/>
           <a:p>
             <a:pPr marL="457200" indent="-457200">
               <a:lnSpc>
-                <a:spcPts val="5200"/>
+                <a:spcPts val="3600"/>
               </a:lnSpc>
               <a:spcAft>
-                <a:spcPts val="1000"/>
+                <a:spcPts val="1400"/>
               </a:spcAft>
               <a:buSzPct val="100000"/>
               <a:buChar char="•"/>
             </a:pPr>
             <a:r>
-              <a:rPr lang="en-US" sz="4000" dirty="0">
-                <a:solidFill>
-                  <a:srgbClr val="FFFFFF"/>
+              <a:rPr lang="en-US" sz="2600" dirty="0">
+                <a:solidFill>
+                  <a:srgbClr val="1B211E"/>
                 </a:solidFill>
                 <a:latin typeface="Calibri" pitchFamily="34" charset="0"/>
                 <a:ea typeface="Calibri" pitchFamily="34" charset="-122"/>
                 <a:cs typeface="Calibri" pitchFamily="34" charset="-120"/>
               </a:rPr>
-              <a:t>Your studentship</a:t>
-            </a:r>
-            <a:endParaRPr lang="en-US" sz="4000" dirty="0"/>
+              <a:t>Preparing a pitch? Ask: “What have I not covered?”</a:t>
+            </a:r>
+            <a:endParaRPr lang="en-US" sz="2600" dirty="0"/>
           </a:p>
           <a:p>
             <a:pPr marL="457200" indent="-457200">
               <a:lnSpc>
-                <a:spcPts val="5200"/>
+                <a:spcPts val="3600"/>
               </a:lnSpc>
               <a:spcAft>
-                <a:spcPts val="1000"/>
+                <a:spcPts val="1400"/>
               </a:spcAft>
               <a:buSzPct val="100000"/>
               <a:buChar char="•"/>
             </a:pPr>
             <a:r>
-              <a:rPr lang="en-US" sz="4000" dirty="0">
-                <a:solidFill>
-                  <a:srgbClr val="FFFFFF"/>
+              <a:rPr lang="en-US" sz="2600" dirty="0">
+                <a:solidFill>
+                  <a:srgbClr val="1B211E"/>
                 </a:solidFill>
                 <a:latin typeface="Calibri" pitchFamily="34" charset="0"/>
                 <a:ea typeface="Calibri" pitchFamily="34" charset="-122"/>
                 <a:cs typeface="Calibri" pitchFamily="34" charset="-120"/>
               </a:rPr>
-              <a:t>Your engineer-ship</a:t>
-            </a:r>
-            <a:endParaRPr lang="en-US" sz="4000" dirty="0"/>
+              <a:t>In a meeting? Let your AI assistant take the notes</a:t>
+            </a:r>
+            <a:endParaRPr lang="en-US" sz="2600" dirty="0"/>
           </a:p>
           <a:p>
             <a:pPr marL="457200" indent="-457200">
               <a:lnSpc>
-                <a:spcPts val="5200"/>
+                <a:spcPts val="3600"/>
               </a:lnSpc>
               <a:spcAft>
-                <a:spcPts val="1000"/>
+                <a:spcPts val="1400"/>
               </a:spcAft>
               <a:buSzPct val="100000"/>
               <a:buChar char="•"/>
             </a:pPr>
             <a:r>
-              <a:rPr lang="en-US" sz="4000" dirty="0">
-                <a:solidFill>
-                  <a:srgbClr val="FFFFFF"/>
+              <a:rPr lang="en-US" sz="2600" dirty="0">
+                <a:solidFill>
+                  <a:srgbClr val="1B211E"/>
                 </a:solidFill>
                 <a:latin typeface="Calibri" pitchFamily="34" charset="0"/>
                 <a:ea typeface="Calibri" pitchFamily="34" charset="-122"/>
                 <a:cs typeface="Calibri" pitchFamily="34" charset="-120"/>
               </a:rPr>
-              <a:t>Your ambition</a:t>
-            </a:r>
-            <a:endParaRPr lang="en-US" sz="4000" dirty="0"/>
-          </a:p>
-        </p:txBody>
-      </p:sp>
-      <p:sp>
-        <p:nvSpPr>
-          <p:cNvPr id="6" name="Shape 4"/>
-          <p:cNvSpPr/>
-          <p:nvPr/>
-        </p:nvSpPr>
-        <p:spPr>
-          <a:xfrm>
-            <a:off x="685800" y="4480560"/>
-            <a:ext cx="10820095" cy="1645920"/>
-          </a:xfrm>
-          <a:prstGeom prst="roundRect">
-            <a:avLst>
-              <a:gd name="adj" fmla="val 5556"/>
-            </a:avLst>
-          </a:prstGeom>
-          <a:solidFill>
-            <a:srgbClr val="E8A317"/>
-          </a:solidFill>
-          <a:ln/>
-        </p:spPr>
-      </p:sp>
-      <p:sp>
-        <p:nvSpPr>
-          <p:cNvPr id="7" name="Text 5"/>
-          <p:cNvSpPr txBox="1"/>
-          <p:nvPr/>
-        </p:nvSpPr>
-        <p:spPr>
-          <a:xfrm>
-            <a:off x="1051560" y="4480560"/>
-            <a:ext cx="10088575" cy="1645920"/>
+              <a:t>Need a second opinion, privately? Talk to the AI</a:t>
+            </a:r>
+            <a:endParaRPr lang="en-US" sz="2600" dirty="0"/>
+          </a:p>
+        </p:txBody>
+      </p:sp>
+      <p:sp>
+        <p:nvSpPr>
+          <p:cNvPr id="5" name="Text 3"/>
+          <p:cNvSpPr txBox="1"/>
+          <p:nvPr/>
+        </p:nvSpPr>
+        <p:spPr>
+          <a:xfrm>
+            <a:off x="685800" y="5577840"/>
+            <a:ext cx="10820095" cy="731520"/>
           </a:xfrm>
           <a:prstGeom prst="rect">
             <a:avLst/>
@@ -7712,21 +7725,21 @@
           <a:bodyPr wrap="square" lIns="0" tIns="0" rIns="0" bIns="0" rtlCol="0" anchor="ctr"/>
           <a:lstStyle/>
           <a:p>
-            <a:pPr indent="0" marL="0">
+            <a:pPr marL="0" indent="0">
               <a:buNone/>
             </a:pPr>
             <a:r>
-              <a:rPr lang="en-US" sz="3400" b="1" dirty="0">
-                <a:solidFill>
-                  <a:srgbClr val="12302A"/>
+              <a:rPr lang="en-US" sz="3000" b="1" i="1" dirty="0">
+                <a:solidFill>
+                  <a:srgbClr val="2C5F4A"/>
                 </a:solidFill>
                 <a:latin typeface="Cambria" pitchFamily="34" charset="0"/>
                 <a:ea typeface="Cambria" pitchFamily="34" charset="-122"/>
                 <a:cs typeface="Cambria" pitchFamily="34" charset="-120"/>
               </a:rPr>
-              <a:t>Be the creator. Take ownership. Follow the process.</a:t>
-            </a:r>
-            <a:endParaRPr lang="en-US" sz="3400" dirty="0"/>
+              <a:t>Digitalise every step of your progress.</a:t>
+            </a:r>
+            <a:endParaRPr lang="en-US" sz="3000" dirty="0"/>
           </a:p>
         </p:txBody>
       </p:sp>
@@ -7740,12 +7753,13 @@
 
 <file path=ppt/slides/slide23.xml><?xml version="1.0" encoding="utf-8"?>
 <p:sld xmlns:a="http://schemas.openxmlformats.org/drawingml/2006/main" xmlns:r="http://schemas.openxmlformats.org/officeDocument/2006/relationships" xmlns:p="http://schemas.openxmlformats.org/presentationml/2006/main">
-  <p:cSld name="Slide 23">
+  <p:cSld name="Slide 21">
     <p:bg>
       <p:bgPr>
         <a:solidFill>
           <a:srgbClr val="12302A"/>
         </a:solidFill>
+        <a:effectLst/>
       </p:bgPr>
     </p:bg>
     <p:spTree>
@@ -7770,8 +7784,8 @@
         </p:nvSpPr>
         <p:spPr>
           <a:xfrm>
-            <a:off x="-1828800" y="-1828800"/>
-            <a:ext cx="5120640" cy="5120640"/>
+            <a:off x="9326880" y="3840480"/>
+            <a:ext cx="4572000" cy="4572000"/>
           </a:xfrm>
           <a:prstGeom prst="ellipse">
             <a:avLst/>
@@ -7790,6 +7804,556 @@
         </p:nvSpPr>
         <p:spPr>
           <a:xfrm>
+            <a:off x="685800" y="365760"/>
+            <a:ext cx="10820095" cy="365760"/>
+          </a:xfrm>
+          <a:prstGeom prst="rect">
+            <a:avLst/>
+          </a:prstGeom>
+          <a:noFill/>
+          <a:ln/>
+        </p:spPr>
+        <p:txBody>
+          <a:bodyPr wrap="square" lIns="0" tIns="0" rIns="0" bIns="0" rtlCol="0" anchor="ctr"/>
+          <a:lstStyle/>
+          <a:p>
+            <a:pPr marL="0" indent="0">
+              <a:buNone/>
+            </a:pPr>
+            <a:r>
+              <a:rPr lang="en-US" sz="1400" b="1" kern="0" spc="250" dirty="0">
+                <a:solidFill>
+                  <a:srgbClr val="E8A317"/>
+                </a:solidFill>
+                <a:latin typeface="Calibri" pitchFamily="34" charset="0"/>
+                <a:ea typeface="Calibri" pitchFamily="34" charset="-122"/>
+                <a:cs typeface="Calibri" pitchFamily="34" charset="-120"/>
+              </a:rPr>
+              <a:t>LET ME ASK YOU</a:t>
+            </a:r>
+            <a:endParaRPr lang="en-US" sz="1400" dirty="0"/>
+          </a:p>
+        </p:txBody>
+      </p:sp>
+      <p:sp>
+        <p:nvSpPr>
+          <p:cNvPr id="4" name="Text 2"/>
+          <p:cNvSpPr txBox="1"/>
+          <p:nvPr/>
+        </p:nvSpPr>
+        <p:spPr>
+          <a:xfrm>
+            <a:off x="685800" y="777240"/>
+            <a:ext cx="8686800" cy="1097280"/>
+          </a:xfrm>
+          <a:prstGeom prst="rect">
+            <a:avLst/>
+          </a:prstGeom>
+          <a:noFill/>
+          <a:ln/>
+        </p:spPr>
+        <p:txBody>
+          <a:bodyPr wrap="square" lIns="0" tIns="0" rIns="0" bIns="0" rtlCol="0" anchor="ctr"/>
+          <a:lstStyle/>
+          <a:p>
+            <a:pPr marL="0" indent="0">
+              <a:buNone/>
+            </a:pPr>
+            <a:r>
+              <a:rPr lang="en-US" sz="4600" b="1" dirty="0">
+                <a:solidFill>
+                  <a:srgbClr val="FFFFFF"/>
+                </a:solidFill>
+                <a:latin typeface="Cambria" pitchFamily="34" charset="0"/>
+                <a:ea typeface="Cambria" pitchFamily="34" charset="-122"/>
+                <a:cs typeface="Cambria" pitchFamily="34" charset="-120"/>
+              </a:rPr>
+              <a:t>Ten years from now, where will you be?</a:t>
+            </a:r>
+            <a:endParaRPr lang="en-US" sz="4600" dirty="0"/>
+          </a:p>
+        </p:txBody>
+      </p:sp>
+      <p:sp>
+        <p:nvSpPr>
+          <p:cNvPr id="5" name="Text 3"/>
+          <p:cNvSpPr txBox="1"/>
+          <p:nvPr/>
+        </p:nvSpPr>
+        <p:spPr>
+          <a:xfrm>
+            <a:off x="685800" y="2286000"/>
+            <a:ext cx="8686800" cy="3931920"/>
+          </a:xfrm>
+          <a:prstGeom prst="rect">
+            <a:avLst/>
+          </a:prstGeom>
+          <a:noFill/>
+          <a:ln/>
+        </p:spPr>
+        <p:txBody>
+          <a:bodyPr wrap="square" lIns="0" tIns="0" rIns="0" bIns="0" rtlCol="0" anchor="t"/>
+          <a:lstStyle/>
+          <a:p>
+            <a:pPr marL="457200" indent="-457200">
+              <a:lnSpc>
+                <a:spcPts val="3800"/>
+              </a:lnSpc>
+              <a:spcAft>
+                <a:spcPts val="1800"/>
+              </a:spcAft>
+              <a:buSzPct val="100000"/>
+              <a:buChar char="•"/>
+            </a:pPr>
+            <a:r>
+              <a:rPr lang="en-US" sz="2800" dirty="0">
+                <a:solidFill>
+                  <a:srgbClr val="C9D8CF"/>
+                </a:solidFill>
+                <a:latin typeface="Calibri" pitchFamily="34" charset="0"/>
+                <a:ea typeface="Calibri" pitchFamily="34" charset="-122"/>
+                <a:cs typeface="Calibri" pitchFamily="34" charset="-120"/>
+              </a:rPr>
+              <a:t>Building something your company is proud of?</a:t>
+            </a:r>
+            <a:endParaRPr lang="en-US" sz="2800" dirty="0"/>
+          </a:p>
+          <a:p>
+            <a:pPr marL="457200" indent="-457200">
+              <a:lnSpc>
+                <a:spcPts val="3800"/>
+              </a:lnSpc>
+              <a:spcAft>
+                <a:spcPts val="1800"/>
+              </a:spcAft>
+              <a:buSzPct val="100000"/>
+              <a:buChar char="•"/>
+            </a:pPr>
+            <a:r>
+              <a:rPr lang="en-US" sz="2800" dirty="0">
+                <a:solidFill>
+                  <a:srgbClr val="C9D8CF"/>
+                </a:solidFill>
+                <a:latin typeface="Calibri" pitchFamily="34" charset="0"/>
+                <a:ea typeface="Calibri" pitchFamily="34" charset="-122"/>
+                <a:cs typeface="Calibri" pitchFamily="34" charset="-120"/>
+              </a:rPr>
+              <a:t>Building something nations thank God for?</a:t>
+            </a:r>
+            <a:endParaRPr lang="en-US" sz="2800" dirty="0"/>
+          </a:p>
+          <a:p>
+            <a:pPr marL="457200" indent="-457200">
+              <a:lnSpc>
+                <a:spcPts val="3800"/>
+              </a:lnSpc>
+              <a:spcAft>
+                <a:spcPts val="1800"/>
+              </a:spcAft>
+              <a:buSzPct val="100000"/>
+              <a:buChar char="•"/>
+            </a:pPr>
+            <a:r>
+              <a:rPr lang="en-US" sz="2800" dirty="0">
+                <a:solidFill>
+                  <a:srgbClr val="C9D8CF"/>
+                </a:solidFill>
+                <a:latin typeface="Calibri" pitchFamily="34" charset="0"/>
+                <a:ea typeface="Calibri" pitchFamily="34" charset="-122"/>
+                <a:cs typeface="Calibri" pitchFamily="34" charset="-120"/>
+              </a:rPr>
+              <a:t>Building something of national impact?</a:t>
+            </a:r>
+            <a:endParaRPr lang="en-US" sz="2800" dirty="0"/>
+          </a:p>
+        </p:txBody>
+      </p:sp>
+      <p:sp>
+        <p:nvSpPr>
+          <p:cNvPr id="6" name="Text 4"/>
+          <p:cNvSpPr txBox="1"/>
+          <p:nvPr/>
+        </p:nvSpPr>
+        <p:spPr>
+          <a:xfrm>
+            <a:off x="685800" y="5212080"/>
+            <a:ext cx="8686800" cy="914400"/>
+          </a:xfrm>
+          <a:prstGeom prst="rect">
+            <a:avLst/>
+          </a:prstGeom>
+          <a:noFill/>
+          <a:ln/>
+        </p:spPr>
+        <p:txBody>
+          <a:bodyPr wrap="square" lIns="0" tIns="0" rIns="0" bIns="0" rtlCol="0" anchor="ctr"/>
+          <a:lstStyle/>
+          <a:p>
+            <a:pPr marL="0" indent="0">
+              <a:buNone/>
+            </a:pPr>
+            <a:r>
+              <a:rPr lang="en-US" sz="3000" b="1" i="1" dirty="0">
+                <a:solidFill>
+                  <a:srgbClr val="E8A317"/>
+                </a:solidFill>
+                <a:latin typeface="Cambria" pitchFamily="34" charset="0"/>
+                <a:ea typeface="Cambria" pitchFamily="34" charset="-122"/>
+                <a:cs typeface="Cambria" pitchFamily="34" charset="-120"/>
+              </a:rPr>
+              <a:t>Let the answer be yes. But it takes YOU to do it.</a:t>
+            </a:r>
+            <a:endParaRPr lang="en-US" sz="3000" dirty="0"/>
+          </a:p>
+        </p:txBody>
+      </p:sp>
+    </p:spTree>
+  </p:cSld>
+  <p:clrMapOvr>
+    <a:masterClrMapping/>
+  </p:clrMapOvr>
+</p:sld>
+</file>
+
+<file path=ppt/slides/slide24.xml><?xml version="1.0" encoding="utf-8"?>
+<p:sld xmlns:a="http://schemas.openxmlformats.org/drawingml/2006/main" xmlns:r="http://schemas.openxmlformats.org/officeDocument/2006/relationships" xmlns:p="http://schemas.openxmlformats.org/presentationml/2006/main">
+  <p:cSld name="Slide 22">
+    <p:bg>
+      <p:bgPr>
+        <a:solidFill>
+          <a:srgbClr val="12302A"/>
+        </a:solidFill>
+        <a:effectLst/>
+      </p:bgPr>
+    </p:bg>
+    <p:spTree>
+      <p:nvGrpSpPr>
+        <p:cNvPr id="1" name=""/>
+        <p:cNvGrpSpPr/>
+        <p:nvPr/>
+      </p:nvGrpSpPr>
+      <p:grpSpPr>
+        <a:xfrm>
+          <a:off x="0" y="0"/>
+          <a:ext cx="0" cy="0"/>
+          <a:chOff x="0" y="0"/>
+          <a:chExt cx="0" cy="0"/>
+        </a:xfrm>
+      </p:grpSpPr>
+      <p:sp>
+        <p:nvSpPr>
+          <p:cNvPr id="2" name="Shape 0"/>
+          <p:cNvSpPr/>
+          <p:nvPr/>
+        </p:nvSpPr>
+        <p:spPr>
+          <a:xfrm>
+            <a:off x="-1828800" y="3840480"/>
+            <a:ext cx="4754880" cy="4754880"/>
+          </a:xfrm>
+          <a:prstGeom prst="ellipse">
+            <a:avLst/>
+          </a:prstGeom>
+          <a:solidFill>
+            <a:srgbClr val="2C5F4A"/>
+          </a:solidFill>
+          <a:ln/>
+        </p:spPr>
+      </p:sp>
+      <p:sp>
+        <p:nvSpPr>
+          <p:cNvPr id="3" name="Text 1"/>
+          <p:cNvSpPr txBox="1"/>
+          <p:nvPr/>
+        </p:nvSpPr>
+        <p:spPr>
+          <a:xfrm>
+            <a:off x="685800" y="365760"/>
+            <a:ext cx="10820095" cy="365760"/>
+          </a:xfrm>
+          <a:prstGeom prst="rect">
+            <a:avLst/>
+          </a:prstGeom>
+          <a:noFill/>
+          <a:ln/>
+        </p:spPr>
+        <p:txBody>
+          <a:bodyPr wrap="square" lIns="0" tIns="0" rIns="0" bIns="0" rtlCol="0" anchor="ctr"/>
+          <a:lstStyle/>
+          <a:p>
+            <a:pPr marL="0" indent="0">
+              <a:buNone/>
+            </a:pPr>
+            <a:r>
+              <a:rPr lang="en-US" sz="1400" b="1" kern="0" spc="250" dirty="0">
+                <a:solidFill>
+                  <a:srgbClr val="E8A317"/>
+                </a:solidFill>
+                <a:latin typeface="Calibri" pitchFamily="34" charset="0"/>
+                <a:ea typeface="Calibri" pitchFamily="34" charset="-122"/>
+                <a:cs typeface="Calibri" pitchFamily="34" charset="-120"/>
+              </a:rPr>
+              <a:t>MY CLOSING REMARK</a:t>
+            </a:r>
+            <a:endParaRPr lang="en-US" sz="1400" dirty="0"/>
+          </a:p>
+        </p:txBody>
+      </p:sp>
+      <p:sp>
+        <p:nvSpPr>
+          <p:cNvPr id="4" name="Text 2"/>
+          <p:cNvSpPr txBox="1"/>
+          <p:nvPr/>
+        </p:nvSpPr>
+        <p:spPr>
+          <a:xfrm>
+            <a:off x="685800" y="1188720"/>
+            <a:ext cx="10820095" cy="640080"/>
+          </a:xfrm>
+          <a:prstGeom prst="rect">
+            <a:avLst/>
+          </a:prstGeom>
+          <a:noFill/>
+          <a:ln/>
+        </p:spPr>
+        <p:txBody>
+          <a:bodyPr wrap="square" lIns="0" tIns="0" rIns="0" bIns="0" rtlCol="0" anchor="ctr"/>
+          <a:lstStyle/>
+          <a:p>
+            <a:pPr marL="0" indent="0">
+              <a:buNone/>
+            </a:pPr>
+            <a:r>
+              <a:rPr lang="en-US" sz="2600" i="1" dirty="0">
+                <a:solidFill>
+                  <a:srgbClr val="C9D8CF"/>
+                </a:solidFill>
+                <a:latin typeface="Calibri" pitchFamily="34" charset="0"/>
+                <a:ea typeface="Calibri" pitchFamily="34" charset="-122"/>
+                <a:cs typeface="Calibri" pitchFamily="34" charset="-120"/>
+              </a:rPr>
+              <a:t>Do not transfer to AI:</a:t>
+            </a:r>
+            <a:endParaRPr lang="en-US" sz="2600" dirty="0"/>
+          </a:p>
+        </p:txBody>
+      </p:sp>
+      <p:sp>
+        <p:nvSpPr>
+          <p:cNvPr id="5" name="Text 3"/>
+          <p:cNvSpPr txBox="1"/>
+          <p:nvPr/>
+        </p:nvSpPr>
+        <p:spPr>
+          <a:xfrm>
+            <a:off x="685800" y="1920240"/>
+            <a:ext cx="10820095" cy="2377440"/>
+          </a:xfrm>
+          <a:prstGeom prst="rect">
+            <a:avLst/>
+          </a:prstGeom>
+          <a:noFill/>
+          <a:ln/>
+        </p:spPr>
+        <p:txBody>
+          <a:bodyPr wrap="square" lIns="0" tIns="0" rIns="0" bIns="0" rtlCol="0" anchor="t"/>
+          <a:lstStyle/>
+          <a:p>
+            <a:pPr marL="457200" indent="-457200">
+              <a:lnSpc>
+                <a:spcPts val="5200"/>
+              </a:lnSpc>
+              <a:spcAft>
+                <a:spcPts val="1000"/>
+              </a:spcAft>
+              <a:buSzPct val="100000"/>
+              <a:buChar char="•"/>
+            </a:pPr>
+            <a:r>
+              <a:rPr lang="en-US" sz="4000" dirty="0">
+                <a:solidFill>
+                  <a:srgbClr val="FFFFFF"/>
+                </a:solidFill>
+                <a:latin typeface="Calibri" pitchFamily="34" charset="0"/>
+                <a:ea typeface="Calibri" pitchFamily="34" charset="-122"/>
+                <a:cs typeface="Calibri" pitchFamily="34" charset="-120"/>
+              </a:rPr>
+              <a:t>Your studentship</a:t>
+            </a:r>
+            <a:endParaRPr lang="en-US" sz="4000" dirty="0"/>
+          </a:p>
+          <a:p>
+            <a:pPr marL="457200" indent="-457200">
+              <a:lnSpc>
+                <a:spcPts val="5200"/>
+              </a:lnSpc>
+              <a:spcAft>
+                <a:spcPts val="1000"/>
+              </a:spcAft>
+              <a:buSzPct val="100000"/>
+              <a:buChar char="•"/>
+            </a:pPr>
+            <a:r>
+              <a:rPr lang="en-US" sz="4000" dirty="0">
+                <a:solidFill>
+                  <a:srgbClr val="FFFFFF"/>
+                </a:solidFill>
+                <a:latin typeface="Calibri" pitchFamily="34" charset="0"/>
+                <a:ea typeface="Calibri" pitchFamily="34" charset="-122"/>
+                <a:cs typeface="Calibri" pitchFamily="34" charset="-120"/>
+              </a:rPr>
+              <a:t>Your engineer-ship</a:t>
+            </a:r>
+            <a:endParaRPr lang="en-US" sz="4000" dirty="0"/>
+          </a:p>
+          <a:p>
+            <a:pPr marL="457200" indent="-457200">
+              <a:lnSpc>
+                <a:spcPts val="5200"/>
+              </a:lnSpc>
+              <a:spcAft>
+                <a:spcPts val="1000"/>
+              </a:spcAft>
+              <a:buSzPct val="100000"/>
+              <a:buChar char="•"/>
+            </a:pPr>
+            <a:r>
+              <a:rPr lang="en-US" sz="4000" dirty="0">
+                <a:solidFill>
+                  <a:srgbClr val="FFFFFF"/>
+                </a:solidFill>
+                <a:latin typeface="Calibri" pitchFamily="34" charset="0"/>
+                <a:ea typeface="Calibri" pitchFamily="34" charset="-122"/>
+                <a:cs typeface="Calibri" pitchFamily="34" charset="-120"/>
+              </a:rPr>
+              <a:t>Your ambition</a:t>
+            </a:r>
+            <a:endParaRPr lang="en-US" sz="4000" dirty="0"/>
+          </a:p>
+        </p:txBody>
+      </p:sp>
+      <p:sp>
+        <p:nvSpPr>
+          <p:cNvPr id="6" name="Shape 4"/>
+          <p:cNvSpPr/>
+          <p:nvPr/>
+        </p:nvSpPr>
+        <p:spPr>
+          <a:xfrm>
+            <a:off x="685800" y="4480560"/>
+            <a:ext cx="10820095" cy="1645920"/>
+          </a:xfrm>
+          <a:prstGeom prst="roundRect">
+            <a:avLst>
+              <a:gd name="adj" fmla="val 5556"/>
+            </a:avLst>
+          </a:prstGeom>
+          <a:solidFill>
+            <a:srgbClr val="E8A317"/>
+          </a:solidFill>
+          <a:ln/>
+        </p:spPr>
+      </p:sp>
+      <p:sp>
+        <p:nvSpPr>
+          <p:cNvPr id="7" name="Text 5"/>
+          <p:cNvSpPr txBox="1"/>
+          <p:nvPr/>
+        </p:nvSpPr>
+        <p:spPr>
+          <a:xfrm>
+            <a:off x="1051560" y="4480560"/>
+            <a:ext cx="10088575" cy="1645920"/>
+          </a:xfrm>
+          <a:prstGeom prst="rect">
+            <a:avLst/>
+          </a:prstGeom>
+          <a:noFill/>
+          <a:ln/>
+        </p:spPr>
+        <p:txBody>
+          <a:bodyPr wrap="square" lIns="0" tIns="0" rIns="0" bIns="0" rtlCol="0" anchor="ctr"/>
+          <a:lstStyle/>
+          <a:p>
+            <a:pPr marL="0" indent="0">
+              <a:buNone/>
+            </a:pPr>
+            <a:r>
+              <a:rPr lang="en-US" sz="3400" b="1" dirty="0">
+                <a:solidFill>
+                  <a:srgbClr val="12302A"/>
+                </a:solidFill>
+                <a:latin typeface="Cambria" pitchFamily="34" charset="0"/>
+                <a:ea typeface="Cambria" pitchFamily="34" charset="-122"/>
+                <a:cs typeface="Cambria" pitchFamily="34" charset="-120"/>
+              </a:rPr>
+              <a:t>Be the creator. Take ownership. Follow the process.</a:t>
+            </a:r>
+            <a:endParaRPr lang="en-US" sz="3400" dirty="0"/>
+          </a:p>
+        </p:txBody>
+      </p:sp>
+    </p:spTree>
+  </p:cSld>
+  <p:clrMapOvr>
+    <a:masterClrMapping/>
+  </p:clrMapOvr>
+</p:sld>
+</file>
+
+<file path=ppt/slides/slide25.xml><?xml version="1.0" encoding="utf-8"?>
+<p:sld xmlns:a="http://schemas.openxmlformats.org/drawingml/2006/main" xmlns:r="http://schemas.openxmlformats.org/officeDocument/2006/relationships" xmlns:p="http://schemas.openxmlformats.org/presentationml/2006/main">
+  <p:cSld name="Slide 23">
+    <p:bg>
+      <p:bgPr>
+        <a:solidFill>
+          <a:srgbClr val="12302A"/>
+        </a:solidFill>
+        <a:effectLst/>
+      </p:bgPr>
+    </p:bg>
+    <p:spTree>
+      <p:nvGrpSpPr>
+        <p:cNvPr id="1" name=""/>
+        <p:cNvGrpSpPr/>
+        <p:nvPr/>
+      </p:nvGrpSpPr>
+      <p:grpSpPr>
+        <a:xfrm>
+          <a:off x="0" y="0"/>
+          <a:ext cx="0" cy="0"/>
+          <a:chOff x="0" y="0"/>
+          <a:chExt cx="0" cy="0"/>
+        </a:xfrm>
+      </p:grpSpPr>
+      <p:sp>
+        <p:nvSpPr>
+          <p:cNvPr id="2" name="Shape 0"/>
+          <p:cNvSpPr/>
+          <p:nvPr/>
+        </p:nvSpPr>
+        <p:spPr>
+          <a:xfrm>
+            <a:off x="-1828800" y="-1828800"/>
+            <a:ext cx="5120640" cy="5120640"/>
+          </a:xfrm>
+          <a:prstGeom prst="ellipse">
+            <a:avLst/>
+          </a:prstGeom>
+          <a:solidFill>
+            <a:srgbClr val="2C5F4A"/>
+          </a:solidFill>
+          <a:ln/>
+        </p:spPr>
+      </p:sp>
+      <p:sp>
+        <p:nvSpPr>
+          <p:cNvPr id="3" name="Text 1"/>
+          <p:cNvSpPr txBox="1"/>
+          <p:nvPr/>
+        </p:nvSpPr>
+        <p:spPr>
+          <a:xfrm>
             <a:off x="3657600" y="1828800"/>
             <a:ext cx="7863840" cy="2011680"/>
           </a:xfrm>
@@ -7803,7 +8367,7 @@
           <a:bodyPr wrap="square" lIns="0" tIns="0" rIns="0" bIns="0" rtlCol="0" anchor="ctr"/>
           <a:lstStyle/>
           <a:p>
-            <a:pPr algn="r" indent="0" marL="0">
+            <a:pPr marL="0" indent="0" algn="r">
               <a:lnSpc>
                 <a:spcPts val="6000"/>
               </a:lnSpc>
@@ -7823,7 +8387,7 @@
             <a:endParaRPr lang="en-US" sz="5200" dirty="0"/>
           </a:p>
           <a:p>
-            <a:pPr algn="r" indent="0" marL="0">
+            <a:pPr marL="0" indent="0" algn="r">
               <a:lnSpc>
                 <a:spcPts val="6000"/>
               </a:lnSpc>
@@ -7846,45 +8410,6 @@
       </p:sp>
       <p:sp>
         <p:nvSpPr>
-          <p:cNvPr id="4" name="Text 2"/>
-          <p:cNvSpPr txBox="1"/>
-          <p:nvPr/>
-        </p:nvSpPr>
-        <p:spPr>
-          <a:xfrm>
-            <a:off x="3657600" y="3931920"/>
-            <a:ext cx="7863840" cy="548640"/>
-          </a:xfrm>
-          <a:prstGeom prst="rect">
-            <a:avLst/>
-          </a:prstGeom>
-          <a:noFill/>
-          <a:ln/>
-        </p:spPr>
-        <p:txBody>
-          <a:bodyPr wrap="square" lIns="0" tIns="0" rIns="0" bIns="0" rtlCol="0" anchor="ctr"/>
-          <a:lstStyle/>
-          <a:p>
-            <a:pPr algn="r" indent="0" marL="0">
-              <a:buNone/>
-            </a:pPr>
-            <a:r>
-              <a:rPr lang="en-US" sz="2400" i="1" dirty="0">
-                <a:solidFill>
-                  <a:srgbClr val="E8A317"/>
-                </a:solidFill>
-                <a:latin typeface="Calibri" pitchFamily="34" charset="0"/>
-                <a:ea typeface="Calibri" pitchFamily="34" charset="-122"/>
-                <a:cs typeface="Calibri" pitchFamily="34" charset="-120"/>
-              </a:rPr>
-              <a:t>Questions</a:t>
-            </a:r>
-            <a:endParaRPr lang="en-US" sz="2400" dirty="0"/>
-          </a:p>
-        </p:txBody>
-      </p:sp>
-      <p:sp>
-        <p:nvSpPr>
           <p:cNvPr id="5" name="Text 3"/>
           <p:cNvSpPr txBox="1"/>
           <p:nvPr/>
@@ -7904,7 +8429,7 @@
           <a:bodyPr wrap="square" lIns="0" tIns="0" rIns="0" bIns="0" rtlCol="0" anchor="ctr"/>
           <a:lstStyle/>
           <a:p>
-            <a:pPr algn="r" indent="0" marL="0">
+            <a:pPr marL="0" indent="0" algn="r">
               <a:lnSpc>
                 <a:spcPts val="2400"/>
               </a:lnSpc>
@@ -7924,7 +8449,7 @@
             <a:endParaRPr lang="en-US" sz="1800" dirty="0"/>
           </a:p>
           <a:p>
-            <a:pPr algn="r" indent="0" marL="0">
+            <a:pPr marL="0" indent="0" algn="r">
               <a:lnSpc>
                 <a:spcPts val="2400"/>
               </a:lnSpc>
@@ -7944,7 +8469,7 @@
             <a:endParaRPr lang="en-US" sz="1800" dirty="0"/>
           </a:p>
           <a:p>
-            <a:pPr algn="r" indent="0" marL="0">
+            <a:pPr marL="0" indent="0" algn="r">
               <a:lnSpc>
                 <a:spcPts val="2400"/>
               </a:lnSpc>
@@ -7981,6 +8506,7 @@
         <a:solidFill>
           <a:srgbClr val="FFFFFF"/>
         </a:solidFill>
+        <a:effectLst/>
       </p:bgPr>
     </p:bg>
     <p:spTree>
@@ -8018,11 +8544,11 @@
           <a:bodyPr wrap="square" lIns="0" tIns="0" rIns="0" bIns="0" rtlCol="0" anchor="ctr"/>
           <a:lstStyle/>
           <a:p>
-            <a:pPr indent="0" marL="0">
+            <a:pPr marL="0" indent="0">
               <a:buNone/>
             </a:pPr>
             <a:r>
-              <a:rPr lang="en-US" sz="1400" b="1" spc="250" kern="0" dirty="0">
+              <a:rPr lang="en-US" sz="1400" b="1" kern="0" spc="250" dirty="0">
                 <a:solidFill>
                   <a:srgbClr val="2C5F4A"/>
                 </a:solidFill>
@@ -8057,7 +8583,7 @@
           <a:bodyPr wrap="square" lIns="0" tIns="0" rIns="0" bIns="0" rtlCol="0" anchor="ctr"/>
           <a:lstStyle/>
           <a:p>
-            <a:pPr indent="0" marL="0">
+            <a:pPr marL="0" indent="0">
               <a:buNone/>
             </a:pPr>
             <a:r>
@@ -8096,7 +8622,7 @@
           <a:bodyPr wrap="square" lIns="0" tIns="0" rIns="0" bIns="0" rtlCol="0" anchor="ctr"/>
           <a:lstStyle/>
           <a:p>
-            <a:pPr indent="0" marL="0">
+            <a:pPr marL="0" indent="0">
               <a:buNone/>
             </a:pPr>
             <a:r>
@@ -8157,7 +8683,7 @@
           <a:bodyPr wrap="square" lIns="0" tIns="0" rIns="0" bIns="0" rtlCol="0" anchor="ctr"/>
           <a:lstStyle/>
           <a:p>
-            <a:pPr indent="0" marL="0">
+            <a:pPr marL="0" indent="0">
               <a:buNone/>
             </a:pPr>
             <a:r>
@@ -8218,7 +8744,7 @@
           <a:bodyPr wrap="square" lIns="0" tIns="0" rIns="0" bIns="0" rtlCol="0" anchor="ctr"/>
           <a:lstStyle/>
           <a:p>
-            <a:pPr indent="0" marL="0">
+            <a:pPr marL="0" indent="0">
               <a:buNone/>
             </a:pPr>
             <a:r>
@@ -8279,7 +8805,7 @@
           <a:bodyPr wrap="square" lIns="0" tIns="0" rIns="0" bIns="0" rtlCol="0" anchor="ctr"/>
           <a:lstStyle/>
           <a:p>
-            <a:pPr indent="0" marL="0">
+            <a:pPr marL="0" indent="0">
               <a:buNone/>
             </a:pPr>
             <a:r>
@@ -8340,7 +8866,7 @@
           <a:bodyPr wrap="square" lIns="0" tIns="0" rIns="0" bIns="0" rtlCol="0" anchor="ctr"/>
           <a:lstStyle/>
           <a:p>
-            <a:pPr indent="0" marL="0">
+            <a:pPr marL="0" indent="0">
               <a:buNone/>
             </a:pPr>
             <a:r>
@@ -8379,7 +8905,7 @@
           <a:bodyPr wrap="square" lIns="0" tIns="0" rIns="0" bIns="0" rtlCol="0" anchor="ctr"/>
           <a:lstStyle/>
           <a:p>
-            <a:pPr indent="0" marL="0">
+            <a:pPr marL="0" indent="0">
               <a:buNone/>
             </a:pPr>
             <a:r>
@@ -8413,6 +8939,7 @@
         <a:solidFill>
           <a:srgbClr val="12302A"/>
         </a:solidFill>
+        <a:effectLst/>
       </p:bgPr>
     </p:bg>
     <p:spTree>
@@ -8450,11 +8977,11 @@
           <a:bodyPr wrap="square" lIns="0" tIns="0" rIns="0" bIns="0" rtlCol="0" anchor="ctr"/>
           <a:lstStyle/>
           <a:p>
-            <a:pPr indent="0" marL="0">
+            <a:pPr marL="0" indent="0">
               <a:buNone/>
             </a:pPr>
             <a:r>
-              <a:rPr lang="en-US" sz="1400" b="1" spc="250" kern="0" dirty="0">
+              <a:rPr lang="en-US" sz="1400" b="1" kern="0" spc="250" dirty="0">
                 <a:solidFill>
                   <a:srgbClr val="E8A317"/>
                 </a:solidFill>
@@ -8511,7 +9038,7 @@
           <a:bodyPr wrap="square" lIns="0" tIns="0" rIns="0" bIns="0" rtlCol="0" anchor="ctr"/>
           <a:lstStyle/>
           <a:p>
-            <a:pPr algn="ctr" indent="0" marL="0">
+            <a:pPr marL="0" indent="0" algn="ctr">
               <a:lnSpc>
                 <a:spcPts val="4800"/>
               </a:lnSpc>
@@ -8531,7 +9058,7 @@
             <a:endParaRPr lang="en-US" sz="4000" dirty="0"/>
           </a:p>
           <a:p>
-            <a:pPr algn="ctr" indent="0" marL="0">
+            <a:pPr marL="0" indent="0" algn="ctr">
               <a:lnSpc>
                 <a:spcPts val="4800"/>
               </a:lnSpc>
@@ -8573,7 +9100,7 @@
           <a:bodyPr wrap="square" lIns="0" tIns="0" rIns="0" bIns="0" rtlCol="0" anchor="ctr"/>
           <a:lstStyle/>
           <a:p>
-            <a:pPr algn="ctr" indent="0" marL="0">
+            <a:pPr marL="0" indent="0" algn="ctr">
               <a:buNone/>
             </a:pPr>
             <a:r>
@@ -8634,7 +9161,7 @@
           <a:bodyPr wrap="square" lIns="0" tIns="0" rIns="0" bIns="0" rtlCol="0" anchor="ctr"/>
           <a:lstStyle/>
           <a:p>
-            <a:pPr algn="ctr" indent="0" marL="0">
+            <a:pPr marL="0" indent="0" algn="ctr">
               <a:lnSpc>
                 <a:spcPts val="4800"/>
               </a:lnSpc>
@@ -8654,7 +9181,7 @@
             <a:endParaRPr lang="en-US" sz="4000" dirty="0"/>
           </a:p>
           <a:p>
-            <a:pPr algn="ctr" indent="0" marL="0">
+            <a:pPr marL="0" indent="0" algn="ctr">
               <a:lnSpc>
                 <a:spcPts val="4800"/>
               </a:lnSpc>
@@ -8696,7 +9223,7 @@
           <a:bodyPr wrap="square" lIns="0" tIns="0" rIns="0" bIns="0" rtlCol="0" anchor="ctr"/>
           <a:lstStyle/>
           <a:p>
-            <a:pPr algn="ctr" indent="0" marL="0">
+            <a:pPr marL="0" indent="0" algn="ctr">
               <a:buNone/>
             </a:pPr>
             <a:r>
@@ -8730,6 +9257,7 @@
         <a:solidFill>
           <a:srgbClr val="FFFFFF"/>
         </a:solidFill>
+        <a:effectLst/>
       </p:bgPr>
     </p:bg>
     <p:spTree>
@@ -8767,11 +9295,11 @@
           <a:bodyPr wrap="square" lIns="0" tIns="0" rIns="0" bIns="0" rtlCol="0" anchor="ctr"/>
           <a:lstStyle/>
           <a:p>
-            <a:pPr indent="0" marL="0">
+            <a:pPr marL="0" indent="0">
               <a:buNone/>
             </a:pPr>
             <a:r>
-              <a:rPr lang="en-US" sz="1400" b="1" spc="250" kern="0" dirty="0">
+              <a:rPr lang="en-US" sz="1400" b="1" kern="0" spc="250" dirty="0">
                 <a:solidFill>
                   <a:srgbClr val="2C5F4A"/>
                 </a:solidFill>
@@ -8806,7 +9334,7 @@
           <a:bodyPr wrap="square" lIns="0" tIns="0" rIns="0" bIns="0" rtlCol="0" anchor="ctr"/>
           <a:lstStyle/>
           <a:p>
-            <a:pPr indent="0" marL="0">
+            <a:pPr marL="0" indent="0">
               <a:buNone/>
             </a:pPr>
             <a:r>
@@ -8963,7 +9491,7 @@
           <a:bodyPr wrap="square" lIns="0" tIns="0" rIns="0" bIns="0" rtlCol="0" anchor="ctr"/>
           <a:lstStyle/>
           <a:p>
-            <a:pPr indent="0" marL="0">
+            <a:pPr marL="0" indent="0">
               <a:buNone/>
             </a:pPr>
             <a:r>
@@ -8997,6 +9525,7 @@
         <a:solidFill>
           <a:srgbClr val="FFFFFF"/>
         </a:solidFill>
+        <a:effectLst/>
       </p:bgPr>
     </p:bg>
     <p:spTree>
@@ -9034,11 +9563,11 @@
           <a:bodyPr wrap="square" lIns="0" tIns="0" rIns="0" bIns="0" rtlCol="0" anchor="ctr"/>
           <a:lstStyle/>
           <a:p>
-            <a:pPr indent="0" marL="0">
+            <a:pPr marL="0" indent="0">
               <a:buNone/>
             </a:pPr>
             <a:r>
-              <a:rPr lang="en-US" sz="1400" b="1" spc="250" kern="0" dirty="0">
+              <a:rPr lang="en-US" sz="1400" b="1" kern="0" spc="250" dirty="0">
                 <a:solidFill>
                   <a:srgbClr val="2C5F4A"/>
                 </a:solidFill>
@@ -9073,7 +9602,7 @@
           <a:bodyPr wrap="square" lIns="0" tIns="0" rIns="0" bIns="0" rtlCol="0" anchor="ctr"/>
           <a:lstStyle/>
           <a:p>
-            <a:pPr indent="0" marL="0">
+            <a:pPr marL="0" indent="0">
               <a:buNone/>
             </a:pPr>
             <a:r>
@@ -9134,11 +9663,11 @@
           <a:bodyPr wrap="square" lIns="0" tIns="0" rIns="0" bIns="0" rtlCol="0" anchor="ctr"/>
           <a:lstStyle/>
           <a:p>
-            <a:pPr indent="0" marL="0">
+            <a:pPr marL="0" indent="0">
               <a:buNone/>
             </a:pPr>
             <a:r>
-              <a:rPr lang="en-US" sz="1500" b="1" spc="250" kern="0" dirty="0">
+              <a:rPr lang="en-US" sz="1500" b="1" kern="0" spc="250" dirty="0">
                 <a:solidFill>
                   <a:srgbClr val="6E7B74"/>
                 </a:solidFill>
@@ -9184,7 +9713,7 @@
               <a:buChar char="•"/>
             </a:pPr>
             <a:r>
-              <a:rPr lang="en-US" sz="2200" dirty="0">
+              <a:rPr lang="en-US" sz="2200" dirty="0" smtClean="0">
                 <a:solidFill>
                   <a:srgbClr val="1B211E"/>
                 </a:solidFill>
@@ -9192,7 +9721,40 @@
                 <a:ea typeface="Calibri" pitchFamily="34" charset="-122"/>
                 <a:cs typeface="Calibri" pitchFamily="34" charset="-120"/>
               </a:rPr>
-              <a:t>One Commissioner, on his own</a:t>
+              <a:t>Every stakeholder </a:t>
+            </a:r>
+            <a:r>
+              <a:rPr lang="en-US" sz="2200" dirty="0">
+                <a:solidFill>
+                  <a:srgbClr val="1B211E"/>
+                </a:solidFill>
+                <a:latin typeface="Calibri" pitchFamily="34" charset="0"/>
+                <a:ea typeface="Calibri" pitchFamily="34" charset="-122"/>
+                <a:cs typeface="Calibri" pitchFamily="34" charset="-120"/>
+              </a:rPr>
+              <a:t>on </a:t>
+            </a:r>
+            <a:r>
+              <a:rPr lang="en-US" sz="2200" dirty="0" smtClean="0">
+                <a:solidFill>
+                  <a:srgbClr val="1B211E"/>
+                </a:solidFill>
+                <a:latin typeface="Calibri" pitchFamily="34" charset="0"/>
+                <a:ea typeface="Calibri" pitchFamily="34" charset="-122"/>
+                <a:cs typeface="Calibri" pitchFamily="34" charset="-120"/>
+              </a:rPr>
+              <a:t>their </a:t>
+            </a:r>
+            <a:r>
+              <a:rPr lang="en-US" sz="2200" dirty="0">
+                <a:solidFill>
+                  <a:srgbClr val="1B211E"/>
+                </a:solidFill>
+                <a:latin typeface="Calibri" pitchFamily="34" charset="0"/>
+                <a:ea typeface="Calibri" pitchFamily="34" charset="-122"/>
+                <a:cs typeface="Calibri" pitchFamily="34" charset="-120"/>
+              </a:rPr>
+              <a:t>own</a:t>
             </a:r>
             <a:endParaRPr lang="en-US" sz="2200" dirty="0"/>
           </a:p>
@@ -9208,7 +9770,7 @@
               <a:buChar char="•"/>
             </a:pPr>
             <a:r>
-              <a:rPr lang="en-US" sz="2200" dirty="0">
+              <a:rPr lang="en-US" sz="2200" dirty="0" smtClean="0">
                 <a:solidFill>
                   <a:srgbClr val="1B211E"/>
                 </a:solidFill>
@@ -9216,21 +9778,8 @@
                 <a:ea typeface="Calibri" pitchFamily="34" charset="-122"/>
                 <a:cs typeface="Calibri" pitchFamily="34" charset="-120"/>
               </a:rPr>
-              <a:t>One General, on his own</a:t>
-            </a:r>
-            <a:endParaRPr lang="en-US" sz="2200" dirty="0"/>
-          </a:p>
-          <a:p>
-            <a:pPr marL="457200" indent="-457200">
-              <a:lnSpc>
-                <a:spcPts val="3000"/>
-              </a:lnSpc>
-              <a:spcAft>
-                <a:spcPts val="1200"/>
-              </a:spcAft>
-              <a:buSzPct val="100000"/>
-              <a:buChar char="•"/>
-            </a:pPr>
+              <a:t>Security </a:t>
+            </a:r>
             <a:r>
               <a:rPr lang="en-US" sz="2200" dirty="0">
                 <a:solidFill>
@@ -9240,23 +9789,10 @@
                 <a:ea typeface="Calibri" pitchFamily="34" charset="-122"/>
                 <a:cs typeface="Calibri" pitchFamily="34" charset="-120"/>
               </a:rPr>
-              <a:t>Nobody working together</a:t>
-            </a:r>
-            <a:endParaRPr lang="en-US" sz="2200" dirty="0"/>
-          </a:p>
-          <a:p>
-            <a:pPr marL="457200" indent="-457200">
-              <a:lnSpc>
-                <a:spcPts val="3000"/>
-              </a:lnSpc>
-              <a:spcAft>
-                <a:spcPts val="1200"/>
-              </a:spcAft>
-              <a:buSzPct val="100000"/>
-              <a:buChar char="•"/>
-            </a:pPr>
-            <a:r>
-              <a:rPr lang="en-US" sz="2200" dirty="0">
+              <a:t>treated </a:t>
+            </a:r>
+            <a:r>
+              <a:rPr lang="en-US" sz="2200" dirty="0" smtClean="0">
                 <a:solidFill>
                   <a:srgbClr val="1B211E"/>
                 </a:solidFill>
@@ -9264,7 +9800,7 @@
                 <a:ea typeface="Calibri" pitchFamily="34" charset="-122"/>
                 <a:cs typeface="Calibri" pitchFamily="34" charset="-120"/>
               </a:rPr>
-              <a:t>Security treated with kid gloves</a:t>
+              <a:t>as individual agenda</a:t>
             </a:r>
             <a:endParaRPr lang="en-US" sz="2200" dirty="0"/>
           </a:p>
@@ -9313,11 +9849,11 @@
           <a:bodyPr wrap="square" lIns="0" tIns="0" rIns="0" bIns="0" rtlCol="0" anchor="ctr"/>
           <a:lstStyle/>
           <a:p>
-            <a:pPr indent="0" marL="0">
+            <a:pPr marL="0" indent="0">
               <a:buNone/>
             </a:pPr>
             <a:r>
-              <a:rPr lang="en-US" sz="1500" b="1" spc="250" kern="0" dirty="0">
+              <a:rPr lang="en-US" sz="1500" b="1" kern="0" spc="250" dirty="0">
                 <a:solidFill>
                   <a:srgbClr val="E8A317"/>
                 </a:solidFill>
@@ -9465,6 +10001,7 @@
         <a:solidFill>
           <a:srgbClr val="12302A"/>
         </a:solidFill>
+        <a:effectLst/>
       </p:bgPr>
     </p:bg>
     <p:spTree>
@@ -9502,11 +10039,11 @@
           <a:bodyPr wrap="square" lIns="0" tIns="0" rIns="0" bIns="0" rtlCol="0" anchor="ctr"/>
           <a:lstStyle/>
           <a:p>
-            <a:pPr indent="0" marL="0">
+            <a:pPr marL="0" indent="0">
               <a:buNone/>
             </a:pPr>
             <a:r>
-              <a:rPr lang="en-US" sz="1400" b="1" spc="250" kern="0" dirty="0">
+              <a:rPr lang="en-US" sz="1400" b="1" kern="0" spc="250" dirty="0">
                 <a:solidFill>
                   <a:srgbClr val="E8A317"/>
                 </a:solidFill>
@@ -9541,7 +10078,7 @@
           <a:bodyPr wrap="square" lIns="0" tIns="0" rIns="0" bIns="0" rtlCol="0" anchor="ctr"/>
           <a:lstStyle/>
           <a:p>
-            <a:pPr indent="0" marL="0">
+            <a:pPr marL="0" indent="0">
               <a:buNone/>
             </a:pPr>
             <a:r>
@@ -9599,7 +10136,29 @@
                 <a:ea typeface="Calibri" pitchFamily="34" charset="-122"/>
                 <a:cs typeface="Calibri" pitchFamily="34" charset="-120"/>
               </a:rPr>
-              <a:t>Malaysia came to collect seedlings from us</a:t>
+              <a:t>Malaysia came to collect seedlings from </a:t>
+            </a:r>
+            <a:r>
+              <a:rPr lang="en-US" sz="3000" dirty="0" smtClean="0">
+                <a:solidFill>
+                  <a:srgbClr val="C9D8CF"/>
+                </a:solidFill>
+                <a:latin typeface="Calibri" pitchFamily="34" charset="0"/>
+                <a:ea typeface="Calibri" pitchFamily="34" charset="-122"/>
+                <a:cs typeface="Calibri" pitchFamily="34" charset="-120"/>
+              </a:rPr>
+              <a:t>us, Today</a:t>
+            </a:r>
+            <a:r>
+              <a:rPr lang="en-US" sz="3000" dirty="0">
+                <a:solidFill>
+                  <a:srgbClr val="C9D8CF"/>
+                </a:solidFill>
+                <a:latin typeface="Calibri" pitchFamily="34" charset="0"/>
+                <a:ea typeface="Calibri" pitchFamily="34" charset="-122"/>
+                <a:cs typeface="Calibri" pitchFamily="34" charset="-120"/>
+              </a:rPr>
+              <a:t>, they export it</a:t>
             </a:r>
             <a:endParaRPr lang="en-US" sz="3000" dirty="0"/>
           </a:p>
@@ -9623,7 +10182,29 @@
                 <a:ea typeface="Calibri" pitchFamily="34" charset="-122"/>
                 <a:cs typeface="Calibri" pitchFamily="34" charset="-120"/>
               </a:rPr>
-              <a:t>Today, they export it</a:t>
+              <a:t>China is making </a:t>
+            </a:r>
+            <a:r>
+              <a:rPr lang="en-US" sz="3000" dirty="0" err="1" smtClean="0">
+                <a:solidFill>
+                  <a:srgbClr val="C9D8CF"/>
+                </a:solidFill>
+                <a:latin typeface="Calibri" pitchFamily="34" charset="0"/>
+                <a:ea typeface="Calibri" pitchFamily="34" charset="-122"/>
+                <a:cs typeface="Calibri" pitchFamily="34" charset="-120"/>
+              </a:rPr>
+              <a:t>Garri</a:t>
+            </a:r>
+            <a:r>
+              <a:rPr lang="en-US" sz="3000" dirty="0" smtClean="0">
+                <a:solidFill>
+                  <a:srgbClr val="C9D8CF"/>
+                </a:solidFill>
+                <a:latin typeface="Calibri" pitchFamily="34" charset="0"/>
+                <a:ea typeface="Calibri" pitchFamily="34" charset="-122"/>
+                <a:cs typeface="Calibri" pitchFamily="34" charset="-120"/>
+              </a:rPr>
+              <a:t> today</a:t>
             </a:r>
             <a:endParaRPr lang="en-US" sz="3000" dirty="0"/>
           </a:p>
@@ -9647,23 +10228,10 @@
                 <a:ea typeface="Calibri" pitchFamily="34" charset="-122"/>
                 <a:cs typeface="Calibri" pitchFamily="34" charset="-120"/>
               </a:rPr>
-              <a:t>China is making garri</a:t>
-            </a:r>
-            <a:endParaRPr lang="en-US" sz="3000" dirty="0"/>
-          </a:p>
-          <a:p>
-            <a:pPr marL="457200" indent="-457200">
-              <a:lnSpc>
-                <a:spcPts val="4000"/>
-              </a:lnSpc>
-              <a:spcAft>
-                <a:spcPts val="1800"/>
-              </a:spcAft>
-              <a:buSzPct val="100000"/>
-              <a:buChar char="•"/>
-            </a:pPr>
-            <a:r>
-              <a:rPr lang="en-US" sz="3000" dirty="0">
+              <a:t>We keep doing our </a:t>
+            </a:r>
+            <a:r>
+              <a:rPr lang="en-US" sz="3000" dirty="0" smtClean="0">
                 <a:solidFill>
                   <a:srgbClr val="C9D8CF"/>
                 </a:solidFill>
@@ -9671,7 +10239,7 @@
                 <a:ea typeface="Calibri" pitchFamily="34" charset="-122"/>
                 <a:cs typeface="Calibri" pitchFamily="34" charset="-120"/>
               </a:rPr>
-              <a:t>We keep doing our own</a:t>
+              <a:t>things small scale; everything!</a:t>
             </a:r>
             <a:endParaRPr lang="en-US" sz="3000" dirty="0"/>
           </a:p>
@@ -9720,7 +10288,7 @@
           <a:bodyPr wrap="square" lIns="0" tIns="0" rIns="0" bIns="0" rtlCol="0" anchor="ctr"/>
           <a:lstStyle/>
           <a:p>
-            <a:pPr indent="0" marL="0">
+            <a:pPr marL="0" indent="0">
               <a:buNone/>
             </a:pPr>
             <a:r>
@@ -9732,7 +10300,29 @@
                 <a:ea typeface="Cambria" pitchFamily="34" charset="-122"/>
                 <a:cs typeface="Cambria" pitchFamily="34" charset="-120"/>
               </a:rPr>
-              <a:t>Because we have not understood the power of industrialisation.</a:t>
+              <a:t>Because we </a:t>
+            </a:r>
+            <a:r>
+              <a:rPr lang="en-US" sz="2600" b="1" i="1" dirty="0" smtClean="0">
+                <a:solidFill>
+                  <a:srgbClr val="E8A317"/>
+                </a:solidFill>
+                <a:latin typeface="Cambria" pitchFamily="34" charset="0"/>
+                <a:ea typeface="Cambria" pitchFamily="34" charset="-122"/>
+                <a:cs typeface="Cambria" pitchFamily="34" charset="-120"/>
+              </a:rPr>
+              <a:t>do not appreciate the power and process </a:t>
+            </a:r>
+            <a:r>
+              <a:rPr lang="en-US" sz="2600" b="1" i="1" dirty="0">
+                <a:solidFill>
+                  <a:srgbClr val="E8A317"/>
+                </a:solidFill>
+                <a:latin typeface="Cambria" pitchFamily="34" charset="0"/>
+                <a:ea typeface="Cambria" pitchFamily="34" charset="-122"/>
+                <a:cs typeface="Cambria" pitchFamily="34" charset="-120"/>
+              </a:rPr>
+              <a:t>of industrialisation.</a:t>
             </a:r>
             <a:endParaRPr lang="en-US" sz="2600" dirty="0"/>
           </a:p>
@@ -9754,6 +10344,7 @@
         <a:solidFill>
           <a:srgbClr val="FFFFFF"/>
         </a:solidFill>
+        <a:effectLst/>
       </p:bgPr>
     </p:bg>
     <p:spTree>
@@ -9791,11 +10382,11 @@
           <a:bodyPr wrap="square" lIns="0" tIns="0" rIns="0" bIns="0" rtlCol="0" anchor="ctr"/>
           <a:lstStyle/>
           <a:p>
-            <a:pPr indent="0" marL="0">
+            <a:pPr marL="0" indent="0">
               <a:buNone/>
             </a:pPr>
             <a:r>
-              <a:rPr lang="en-US" sz="1400" b="1" spc="250" kern="0" dirty="0">
+              <a:rPr lang="en-US" sz="1400" b="1" kern="0" spc="250" dirty="0">
                 <a:solidFill>
                   <a:srgbClr val="2C5F4A"/>
                 </a:solidFill>
@@ -9830,11 +10421,11 @@
           <a:bodyPr wrap="square" lIns="0" tIns="0" rIns="0" bIns="0" rtlCol="0" anchor="ctr"/>
           <a:lstStyle/>
           <a:p>
-            <a:pPr indent="0" marL="0">
+            <a:pPr marL="0" indent="0">
               <a:buNone/>
             </a:pPr>
             <a:r>
-              <a:rPr lang="en-US" sz="5000" b="1" dirty="0">
+              <a:rPr lang="en-US" sz="5000" b="1" dirty="0" smtClean="0">
                 <a:solidFill>
                   <a:srgbClr val="12302A"/>
                 </a:solidFill>
@@ -9842,7 +10433,18 @@
                 <a:ea typeface="Cambria" pitchFamily="34" charset="-122"/>
                 <a:cs typeface="Cambria" pitchFamily="34" charset="-120"/>
               </a:rPr>
-              <a:t>Every player stands tall.</a:t>
+              <a:t>We must learn that in Industrialization, every </a:t>
+            </a:r>
+            <a:r>
+              <a:rPr lang="en-US" sz="5000" b="1" dirty="0">
+                <a:solidFill>
+                  <a:srgbClr val="12302A"/>
+                </a:solidFill>
+                <a:latin typeface="Cambria" pitchFamily="34" charset="0"/>
+                <a:ea typeface="Cambria" pitchFamily="34" charset="-122"/>
+                <a:cs typeface="Cambria" pitchFamily="34" charset="-120"/>
+              </a:rPr>
+              <a:t>player stands tall.</a:t>
             </a:r>
             <a:endParaRPr lang="en-US" sz="5000" dirty="0"/>
           </a:p>
@@ -9856,7 +10458,7 @@
         </p:nvSpPr>
         <p:spPr>
           <a:xfrm>
-            <a:off x="685800" y="2194560"/>
+            <a:off x="685800" y="2421195"/>
             <a:ext cx="3429000" cy="2377440"/>
           </a:xfrm>
           <a:prstGeom prst="roundRect">
@@ -9878,7 +10480,7 @@
         </p:nvSpPr>
         <p:spPr>
           <a:xfrm>
-            <a:off x="960120" y="2194560"/>
+            <a:off x="960120" y="2421195"/>
             <a:ext cx="2880360" cy="2377440"/>
           </a:xfrm>
           <a:prstGeom prst="rect">
@@ -9891,7 +10493,7 @@
           <a:bodyPr wrap="square" lIns="0" tIns="0" rIns="0" bIns="0" rtlCol="0" anchor="ctr"/>
           <a:lstStyle/>
           <a:p>
-            <a:pPr algn="ctr" indent="0" marL="0">
+            <a:pPr marL="0" indent="0" algn="ctr">
               <a:buNone/>
             </a:pPr>
             <a:r>
@@ -9903,7 +10505,18 @@
                 <a:ea typeface="Cambria" pitchFamily="34" charset="-122"/>
                 <a:cs typeface="Cambria" pitchFamily="34" charset="-120"/>
               </a:rPr>
-              <a:t>The machine</a:t>
+              <a:t>The </a:t>
+            </a:r>
+            <a:r>
+              <a:rPr lang="en-US" sz="3000" b="1" dirty="0" smtClean="0">
+                <a:solidFill>
+                  <a:srgbClr val="FFFFFF"/>
+                </a:solidFill>
+                <a:latin typeface="Cambria" pitchFamily="34" charset="0"/>
+                <a:ea typeface="Cambria" pitchFamily="34" charset="-122"/>
+                <a:cs typeface="Cambria" pitchFamily="34" charset="-120"/>
+              </a:rPr>
+              <a:t>tool</a:t>
             </a:r>
             <a:endParaRPr lang="en-US" sz="3000" dirty="0"/>
           </a:p>
@@ -9917,7 +10530,7 @@
         </p:nvSpPr>
         <p:spPr>
           <a:xfrm>
-            <a:off x="4389120" y="2194560"/>
+            <a:off x="4389120" y="2421195"/>
             <a:ext cx="3429000" cy="2377440"/>
           </a:xfrm>
           <a:prstGeom prst="roundRect">
@@ -9939,7 +10552,7 @@
         </p:nvSpPr>
         <p:spPr>
           <a:xfrm>
-            <a:off x="4663440" y="2194560"/>
+            <a:off x="4663440" y="2421195"/>
             <a:ext cx="2880360" cy="2377440"/>
           </a:xfrm>
           <a:prstGeom prst="rect">
@@ -9952,7 +10565,7 @@
           <a:bodyPr wrap="square" lIns="0" tIns="0" rIns="0" bIns="0" rtlCol="0" anchor="ctr"/>
           <a:lstStyle/>
           <a:p>
-            <a:pPr algn="ctr" indent="0" marL="0">
+            <a:pPr marL="0" indent="0" algn="ctr">
               <a:buNone/>
             </a:pPr>
             <a:r>
@@ -9978,7 +10591,7 @@
         </p:nvSpPr>
         <p:spPr>
           <a:xfrm>
-            <a:off x="8092440" y="2194560"/>
+            <a:off x="8092440" y="2421195"/>
             <a:ext cx="3429000" cy="2377440"/>
           </a:xfrm>
           <a:prstGeom prst="roundRect">
@@ -10000,7 +10613,7 @@
         </p:nvSpPr>
         <p:spPr>
           <a:xfrm>
-            <a:off x="8366760" y="2194560"/>
+            <a:off x="8366760" y="2421195"/>
             <a:ext cx="2880360" cy="2377440"/>
           </a:xfrm>
           <a:prstGeom prst="rect">
@@ -10013,7 +10626,7 @@
           <a:bodyPr wrap="square" lIns="0" tIns="0" rIns="0" bIns="0" rtlCol="0" anchor="ctr"/>
           <a:lstStyle/>
           <a:p>
-            <a:pPr algn="ctr" indent="0" marL="0">
+            <a:pPr marL="0" indent="0" algn="ctr">
               <a:buNone/>
             </a:pPr>
             <a:r>
@@ -10052,7 +10665,7 @@
           <a:bodyPr wrap="square" lIns="0" tIns="0" rIns="0" bIns="0" rtlCol="0" anchor="ctr"/>
           <a:lstStyle/>
           <a:p>
-            <a:pPr indent="0" marL="0">
+            <a:pPr marL="0" indent="0">
               <a:buNone/>
             </a:pPr>
             <a:r>
@@ -10064,7 +10677,29 @@
                 <a:ea typeface="Cambria" pitchFamily="34" charset="-122"/>
                 <a:cs typeface="Cambria" pitchFamily="34" charset="-120"/>
               </a:rPr>
-              <a:t>No player is insignificant. No player is treated with levity.</a:t>
+              <a:t>No player is insignificant. No player is </a:t>
+            </a:r>
+            <a:r>
+              <a:rPr lang="en-US" sz="2800" b="1" i="1" dirty="0" err="1" smtClean="0">
+                <a:solidFill>
+                  <a:srgbClr val="2C5F4A"/>
+                </a:solidFill>
+                <a:latin typeface="Cambria" pitchFamily="34" charset="0"/>
+                <a:ea typeface="Cambria" pitchFamily="34" charset="-122"/>
+                <a:cs typeface="Cambria" pitchFamily="34" charset="-120"/>
+              </a:rPr>
+              <a:t>dispensible</a:t>
+            </a:r>
+            <a:r>
+              <a:rPr lang="en-US" sz="2800" b="1" i="1" dirty="0" smtClean="0">
+                <a:solidFill>
+                  <a:srgbClr val="2C5F4A"/>
+                </a:solidFill>
+                <a:latin typeface="Cambria" pitchFamily="34" charset="0"/>
+                <a:ea typeface="Cambria" pitchFamily="34" charset="-122"/>
+                <a:cs typeface="Cambria" pitchFamily="34" charset="-120"/>
+              </a:rPr>
+              <a:t>.</a:t>
             </a:r>
             <a:endParaRPr lang="en-US" sz="2800" dirty="0"/>
           </a:p>
@@ -10086,6 +10721,7 @@
         <a:solidFill>
           <a:srgbClr val="12302A"/>
         </a:solidFill>
+        <a:effectLst/>
       </p:bgPr>
     </p:bg>
     <p:spTree>
@@ -10143,11 +10779,11 @@
           <a:bodyPr wrap="square" lIns="0" tIns="0" rIns="0" bIns="0" rtlCol="0" anchor="ctr"/>
           <a:lstStyle/>
           <a:p>
-            <a:pPr indent="0" marL="0">
+            <a:pPr marL="0" indent="0">
               <a:buNone/>
             </a:pPr>
             <a:r>
-              <a:rPr lang="en-US" sz="1400" b="1" spc="250" kern="0" dirty="0">
+              <a:rPr lang="en-US" sz="1400" b="1" kern="0" spc="250" dirty="0">
                 <a:solidFill>
                   <a:srgbClr val="E8A317"/>
                 </a:solidFill>
@@ -10182,7 +10818,7 @@
           <a:bodyPr wrap="square" lIns="0" tIns="0" rIns="0" bIns="0" rtlCol="0" anchor="ctr"/>
           <a:lstStyle/>
           <a:p>
-            <a:pPr indent="0" marL="0">
+            <a:pPr marL="0" indent="0">
               <a:lnSpc>
                 <a:spcPts val="6200"/>
               </a:lnSpc>
@@ -10202,7 +10838,7 @@
             <a:endParaRPr lang="en-US" sz="5400" dirty="0"/>
           </a:p>
           <a:p>
-            <a:pPr indent="0" marL="0">
+            <a:pPr marL="0" indent="0">
               <a:lnSpc>
                 <a:spcPts val="6200"/>
               </a:lnSpc>
@@ -10244,11 +10880,11 @@
           <a:bodyPr wrap="square" lIns="0" tIns="0" rIns="0" bIns="0" rtlCol="0" anchor="ctr"/>
           <a:lstStyle/>
           <a:p>
-            <a:pPr indent="0" marL="0">
+            <a:pPr marL="0" indent="0">
               <a:buNone/>
             </a:pPr>
             <a:r>
-              <a:rPr lang="en-US" sz="2400" i="1" dirty="0">
+              <a:rPr lang="en-US" sz="2400" i="1" dirty="0" smtClean="0">
                 <a:solidFill>
                   <a:srgbClr val="C9D8CF"/>
                 </a:solidFill>
@@ -10256,7 +10892,7 @@
                 <a:ea typeface="Calibri" pitchFamily="34" charset="-122"/>
                 <a:cs typeface="Calibri" pitchFamily="34" charset="-120"/>
               </a:rPr>
-              <a:t>Whoever came up with this theme must have been in the spirit.</a:t>
+              <a:t>How Process Discipline Creates Impact, Not Just Output</a:t>
             </a:r>
             <a:endParaRPr lang="en-US" sz="2400" dirty="0"/>
           </a:p>
@@ -10313,7 +10949,7 @@
     </a:clrScheme>
     <a:fontScheme name="Office">
       <a:majorFont>
-        <a:latin typeface="Calibri Light" panose="020F0302020204030204"/>
+        <a:latin typeface="Calibri Light"/>
         <a:ea typeface=""/>
         <a:cs typeface=""/>
         <a:font script="Jpan" typeface="游ゴシック Light"/>
@@ -10365,7 +11001,7 @@
         <a:font script="Tfng" typeface="Ebrima"/>
       </a:majorFont>
       <a:minorFont>
-        <a:latin typeface="Calibri" panose="020F0502020204030204"/>
+        <a:latin typeface="Calibri"/>
         <a:ea typeface=""/>
         <a:cs typeface=""/>
         <a:font script="Jpan" typeface="游ゴシック"/>
@@ -10559,8 +11195,293 @@
   <a:extraClrSchemeLst/>
   <a:extLst>
     <a:ext uri="{05A4C25C-085E-4340-85A3-A5531E510DB2}">
-      <thm15:themeFamily xmlns:thm15="http://schemas.microsoft.com/office/thememl/2012/main" name="Office Theme" id="{62F939B6-93AF-4DB8-9C6B-D6C7DFDC589F}" vid="{4A3C46E8-61CC-4603-A589-7422A47A8E4A}"/>
+      <thm15:themeFamily xmlns:thm15="http://schemas.microsoft.com/office/thememl/2012/main" xmlns="" name="Office Theme" id="{62F939B6-93AF-4DB8-9C6B-D6C7DFDC589F}" vid="{4A3C46E8-61CC-4603-A589-7422A47A8E4A}"/>
     </a:ext>
   </a:extLst>
 </a:theme>
+</file>
+
+<file path=ppt/theme/theme2.xml><?xml version="1.0" encoding="utf-8"?>
+<a:theme xmlns:a="http://schemas.openxmlformats.org/drawingml/2006/main" name="Office Theme">
+  <a:themeElements>
+    <a:clrScheme name="Office">
+      <a:dk1>
+        <a:sysClr val="windowText" lastClr="000000"/>
+      </a:dk1>
+      <a:lt1>
+        <a:sysClr val="window" lastClr="FFFFFF"/>
+      </a:lt1>
+      <a:dk2>
+        <a:srgbClr val="1F497D"/>
+      </a:dk2>
+      <a:lt2>
+        <a:srgbClr val="EEECE1"/>
+      </a:lt2>
+      <a:accent1>
+        <a:srgbClr val="4F81BD"/>
+      </a:accent1>
+      <a:accent2>
+        <a:srgbClr val="C0504D"/>
+      </a:accent2>
+      <a:accent3>
+        <a:srgbClr val="9BBB59"/>
+      </a:accent3>
+      <a:accent4>
+        <a:srgbClr val="8064A2"/>
+      </a:accent4>
+      <a:accent5>
+        <a:srgbClr val="4BACC6"/>
+      </a:accent5>
+      <a:accent6>
+        <a:srgbClr val="F79646"/>
+      </a:accent6>
+      <a:hlink>
+        <a:srgbClr val="0000FF"/>
+      </a:hlink>
+      <a:folHlink>
+        <a:srgbClr val="800080"/>
+      </a:folHlink>
+    </a:clrScheme>
+    <a:fontScheme name="Office">
+      <a:majorFont>
+        <a:latin typeface="Calibri"/>
+        <a:ea typeface=""/>
+        <a:cs typeface=""/>
+        <a:font script="Jpan" typeface="ＭＳ Ｐゴシック"/>
+        <a:font script="Hang" typeface="맑은 고딕"/>
+        <a:font script="Hans" typeface="宋体"/>
+        <a:font script="Hant" typeface="新細明體"/>
+        <a:font script="Arab" typeface="Times New Roman"/>
+        <a:font script="Hebr" typeface="Times New Roman"/>
+        <a:font script="Thai" typeface="Angsana New"/>
+        <a:font script="Ethi" typeface="Nyala"/>
+        <a:font script="Beng" typeface="Vrinda"/>
+        <a:font script="Gujr" typeface="Shruti"/>
+        <a:font script="Khmr" typeface="MoolBoran"/>
+        <a:font script="Knda" typeface="Tunga"/>
+        <a:font script="Guru" typeface="Raavi"/>
+        <a:font script="Cans" typeface="Euphemia"/>
+        <a:font script="Cher" typeface="Plantagenet Cherokee"/>
+        <a:font script="Yiii" typeface="Microsoft Yi Baiti"/>
+        <a:font script="Tibt" typeface="Microsoft Himalaya"/>
+        <a:font script="Thaa" typeface="MV Boli"/>
+        <a:font script="Deva" typeface="Mangal"/>
+        <a:font script="Telu" typeface="Gautami"/>
+        <a:font script="Taml" typeface="Latha"/>
+        <a:font script="Syrc" typeface="Estrangelo Edessa"/>
+        <a:font script="Orya" typeface="Kalinga"/>
+        <a:font script="Mlym" typeface="Kartika"/>
+        <a:font script="Laoo" typeface="DokChampa"/>
+        <a:font script="Sinh" typeface="Iskoola Pota"/>
+        <a:font script="Mong" typeface="Mongolian Baiti"/>
+        <a:font script="Viet" typeface="Times New Roman"/>
+        <a:font script="Uigh" typeface="Microsoft Uighur"/>
+        <a:font script="Geor" typeface="Sylfaen"/>
+      </a:majorFont>
+      <a:minorFont>
+        <a:latin typeface="Calibri"/>
+        <a:ea typeface=""/>
+        <a:cs typeface=""/>
+        <a:font script="Jpan" typeface="ＭＳ Ｐゴシック"/>
+        <a:font script="Hang" typeface="맑은 고딕"/>
+        <a:font script="Hans" typeface="宋体"/>
+        <a:font script="Hant" typeface="新細明體"/>
+        <a:font script="Arab" typeface="Arial"/>
+        <a:font script="Hebr" typeface="Arial"/>
+        <a:font script="Thai" typeface="Cordia New"/>
+        <a:font script="Ethi" typeface="Nyala"/>
+        <a:font script="Beng" typeface="Vrinda"/>
+        <a:font script="Gujr" typeface="Shruti"/>
+        <a:font script="Khmr" typeface="DaunPenh"/>
+        <a:font script="Knda" typeface="Tunga"/>
+        <a:font script="Guru" typeface="Raavi"/>
+        <a:font script="Cans" typeface="Euphemia"/>
+        <a:font script="Cher" typeface="Plantagenet Cherokee"/>
+        <a:font script="Yiii" typeface="Microsoft Yi Baiti"/>
+        <a:font script="Tibt" typeface="Microsoft Himalaya"/>
+        <a:font script="Thaa" typeface="MV Boli"/>
+        <a:font script="Deva" typeface="Mangal"/>
+        <a:font script="Telu" typeface="Gautami"/>
+        <a:font script="Taml" typeface="Latha"/>
+        <a:font script="Syrc" typeface="Estrangelo Edessa"/>
+        <a:font script="Orya" typeface="Kalinga"/>
+        <a:font script="Mlym" typeface="Kartika"/>
+        <a:font script="Laoo" typeface="DokChampa"/>
+        <a:font script="Sinh" typeface="Iskoola Pota"/>
+        <a:font script="Mong" typeface="Mongolian Baiti"/>
+        <a:font script="Viet" typeface="Arial"/>
+        <a:font script="Uigh" typeface="Microsoft Uighur"/>
+        <a:font script="Geor" typeface="Sylfaen"/>
+      </a:minorFont>
+    </a:fontScheme>
+    <a:fmtScheme name="Office">
+      <a:fillStyleLst>
+        <a:solidFill>
+          <a:schemeClr val="phClr"/>
+        </a:solidFill>
+        <a:gradFill rotWithShape="1">
+          <a:gsLst>
+            <a:gs pos="0">
+              <a:schemeClr val="phClr">
+                <a:tint val="50000"/>
+                <a:satMod val="300000"/>
+              </a:schemeClr>
+            </a:gs>
+            <a:gs pos="35000">
+              <a:schemeClr val="phClr">
+                <a:tint val="37000"/>
+                <a:satMod val="300000"/>
+              </a:schemeClr>
+            </a:gs>
+            <a:gs pos="100000">
+              <a:schemeClr val="phClr">
+                <a:tint val="15000"/>
+                <a:satMod val="350000"/>
+              </a:schemeClr>
+            </a:gs>
+          </a:gsLst>
+          <a:lin ang="16200000" scaled="1"/>
+        </a:gradFill>
+        <a:gradFill rotWithShape="1">
+          <a:gsLst>
+            <a:gs pos="0">
+              <a:schemeClr val="phClr">
+                <a:shade val="51000"/>
+                <a:satMod val="130000"/>
+              </a:schemeClr>
+            </a:gs>
+            <a:gs pos="80000">
+              <a:schemeClr val="phClr">
+                <a:shade val="93000"/>
+                <a:satMod val="130000"/>
+              </a:schemeClr>
+            </a:gs>
+            <a:gs pos="100000">
+              <a:schemeClr val="phClr">
+                <a:shade val="94000"/>
+                <a:satMod val="135000"/>
+              </a:schemeClr>
+            </a:gs>
+          </a:gsLst>
+          <a:lin ang="16200000" scaled="0"/>
+        </a:gradFill>
+      </a:fillStyleLst>
+      <a:lnStyleLst>
+        <a:ln w="9525" cap="flat" cmpd="sng" algn="ctr">
+          <a:solidFill>
+            <a:schemeClr val="phClr">
+              <a:shade val="95000"/>
+              <a:satMod val="105000"/>
+            </a:schemeClr>
+          </a:solidFill>
+          <a:prstDash val="solid"/>
+        </a:ln>
+        <a:ln w="25400" cap="flat" cmpd="sng" algn="ctr">
+          <a:solidFill>
+            <a:schemeClr val="phClr"/>
+          </a:solidFill>
+          <a:prstDash val="solid"/>
+        </a:ln>
+        <a:ln w="38100" cap="flat" cmpd="sng" algn="ctr">
+          <a:solidFill>
+            <a:schemeClr val="phClr"/>
+          </a:solidFill>
+          <a:prstDash val="solid"/>
+        </a:ln>
+      </a:lnStyleLst>
+      <a:effectStyleLst>
+        <a:effectStyle>
+          <a:effectLst>
+            <a:outerShdw blurRad="40000" dist="20000" dir="5400000" rotWithShape="0">
+              <a:srgbClr val="000000">
+                <a:alpha val="38000"/>
+              </a:srgbClr>
+            </a:outerShdw>
+          </a:effectLst>
+        </a:effectStyle>
+        <a:effectStyle>
+          <a:effectLst>
+            <a:outerShdw blurRad="40000" dist="23000" dir="5400000" rotWithShape="0">
+              <a:srgbClr val="000000">
+                <a:alpha val="35000"/>
+              </a:srgbClr>
+            </a:outerShdw>
+          </a:effectLst>
+        </a:effectStyle>
+        <a:effectStyle>
+          <a:effectLst>
+            <a:outerShdw blurRad="40000" dist="23000" dir="5400000" rotWithShape="0">
+              <a:srgbClr val="000000">
+                <a:alpha val="35000"/>
+              </a:srgbClr>
+            </a:outerShdw>
+          </a:effectLst>
+          <a:scene3d>
+            <a:camera prst="orthographicFront">
+              <a:rot lat="0" lon="0" rev="0"/>
+            </a:camera>
+            <a:lightRig rig="threePt" dir="t">
+              <a:rot lat="0" lon="0" rev="1200000"/>
+            </a:lightRig>
+          </a:scene3d>
+          <a:sp3d>
+            <a:bevelT w="63500" h="25400"/>
+          </a:sp3d>
+        </a:effectStyle>
+      </a:effectStyleLst>
+      <a:bgFillStyleLst>
+        <a:solidFill>
+          <a:schemeClr val="phClr"/>
+        </a:solidFill>
+        <a:gradFill rotWithShape="1">
+          <a:gsLst>
+            <a:gs pos="0">
+              <a:schemeClr val="phClr">
+                <a:tint val="40000"/>
+                <a:satMod val="350000"/>
+              </a:schemeClr>
+            </a:gs>
+            <a:gs pos="40000">
+              <a:schemeClr val="phClr">
+                <a:tint val="45000"/>
+                <a:shade val="99000"/>
+                <a:satMod val="350000"/>
+              </a:schemeClr>
+            </a:gs>
+            <a:gs pos="100000">
+              <a:schemeClr val="phClr">
+                <a:shade val="20000"/>
+                <a:satMod val="255000"/>
+              </a:schemeClr>
+            </a:gs>
+          </a:gsLst>
+          <a:path path="circle">
+            <a:fillToRect l="50000" t="-80000" r="50000" b="180000"/>
+          </a:path>
+        </a:gradFill>
+        <a:gradFill rotWithShape="1">
+          <a:gsLst>
+            <a:gs pos="0">
+              <a:schemeClr val="phClr">
+                <a:tint val="80000"/>
+                <a:satMod val="300000"/>
+              </a:schemeClr>
+            </a:gs>
+            <a:gs pos="100000">
+              <a:schemeClr val="phClr">
+                <a:shade val="30000"/>
+                <a:satMod val="200000"/>
+              </a:schemeClr>
+            </a:gs>
+          </a:gsLst>
+          <a:path path="circle">
+            <a:fillToRect l="50000" t="50000" r="50000" b="50000"/>
+          </a:path>
+        </a:gradFill>
+      </a:bgFillStyleLst>
+    </a:fmtScheme>
+  </a:themeElements>
+  <a:objectDefaults/>
+  <a:extraClrSchemeLst/>
+</a:theme>
 </file>
--- a/iesa.pptx
+++ b/iesa.pptx
@@ -10408,7 +10408,7 @@
         </p:nvSpPr>
         <p:spPr>
           <a:xfrm>
-            <a:off x="685800" y="777240"/>
+            <a:off x="701345" y="1337212"/>
             <a:ext cx="10820095" cy="1097280"/>
           </a:xfrm>
           <a:prstGeom prst="rect">
@@ -10458,7 +10458,7 @@
         </p:nvSpPr>
         <p:spPr>
           <a:xfrm>
-            <a:off x="685800" y="2421195"/>
+            <a:off x="685800" y="2991690"/>
             <a:ext cx="3429000" cy="2377440"/>
           </a:xfrm>
           <a:prstGeom prst="roundRect">
@@ -10480,7 +10480,7 @@
         </p:nvSpPr>
         <p:spPr>
           <a:xfrm>
-            <a:off x="960120" y="2421195"/>
+            <a:off x="960120" y="2991690"/>
             <a:ext cx="2880360" cy="2377440"/>
           </a:xfrm>
           <a:prstGeom prst="rect">
@@ -10530,7 +10530,7 @@
         </p:nvSpPr>
         <p:spPr>
           <a:xfrm>
-            <a:off x="4389120" y="2421195"/>
+            <a:off x="4389120" y="2991690"/>
             <a:ext cx="3429000" cy="2377440"/>
           </a:xfrm>
           <a:prstGeom prst="roundRect">
@@ -10552,7 +10552,7 @@
         </p:nvSpPr>
         <p:spPr>
           <a:xfrm>
-            <a:off x="4663440" y="2421195"/>
+            <a:off x="4663440" y="2991690"/>
             <a:ext cx="2880360" cy="2377440"/>
           </a:xfrm>
           <a:prstGeom prst="rect">
@@ -10591,7 +10591,7 @@
         </p:nvSpPr>
         <p:spPr>
           <a:xfrm>
-            <a:off x="8092440" y="2421195"/>
+            <a:off x="8092440" y="2991690"/>
             <a:ext cx="3429000" cy="2377440"/>
           </a:xfrm>
           <a:prstGeom prst="roundRect">
@@ -10613,7 +10613,7 @@
         </p:nvSpPr>
         <p:spPr>
           <a:xfrm>
-            <a:off x="8366760" y="2421195"/>
+            <a:off x="8366760" y="2991690"/>
             <a:ext cx="2880360" cy="2377440"/>
           </a:xfrm>
           <a:prstGeom prst="rect">
@@ -10652,7 +10652,7 @@
         </p:nvSpPr>
         <p:spPr>
           <a:xfrm>
-            <a:off x="685800" y="5029200"/>
+            <a:off x="685800" y="5486400"/>
             <a:ext cx="10820095" cy="914400"/>
           </a:xfrm>
           <a:prstGeom prst="rect">
